--- a/Task-4-Statistical-Validation/Task4_Final_Presentation.pptx
+++ b/Task-4-Statistical-Validation/Task4_Final_Presentation.pptx
@@ -11,6 +11,10 @@
     <p:sldId id="259" r:id="rId10"/>
     <p:sldId id="260" r:id="rId11"/>
     <p:sldId id="261" r:id="rId12"/>
+    <p:sldId id="262" r:id="rId13"/>
+    <p:sldId id="263" r:id="rId14"/>
+    <p:sldId id="264" r:id="rId15"/>
+    <p:sldId id="265" r:id="rId16"/>
   </p:sldIdLst>
   <p:sldSz cx="12191695" cy="6858000" type="screen4x3"/>
   <p:notesSz cx="6858000" cy="9144000"/>
@@ -3095,30 +3099,322 @@
       <p:grpSpPr/>
       <p:sp>
         <p:nvSpPr>
-          <p:cNvPr id="2" name="TextBox 1"/>
-          <p:cNvSpPr txBox="1"/>
-          <p:nvPr/>
-        </p:nvSpPr>
-        <p:spPr>
-          <a:xfrm>
-            <a:off x="548640" y="320040"/>
-            <a:ext cx="10972800" cy="731520"/>
-          </a:xfrm>
-          <a:prstGeom prst="rect">
-            <a:avLst/>
-          </a:prstGeom>
-          <a:noFill/>
-        </p:spPr>
-        <p:txBody>
-          <a:bodyPr wrap="none">
-            <a:spAutoFit/>
-          </a:bodyPr>
-          <a:lstStyle/>
-          <a:p>
-            <a:pPr>
-              <a:defRPr sz="2800" b="1"/>
-            </a:pPr>
-            <a:r>
+          <p:cNvPr id="2" name="Rectangle 1"/>
+          <p:cNvSpPr/>
+          <p:nvPr/>
+        </p:nvSpPr>
+        <p:spPr>
+          <a:xfrm>
+            <a:off x="0" y="0"/>
+            <a:ext cx="12191695" cy="6858000"/>
+          </a:xfrm>
+          <a:prstGeom prst="rect">
+            <a:avLst/>
+          </a:prstGeom>
+          <a:solidFill>
+            <a:srgbClr val="0C1426"/>
+          </a:solidFill>
+          <a:ln>
+            <a:noFill/>
+          </a:ln>
+        </p:spPr>
+        <p:style>
+          <a:lnRef idx="1">
+            <a:schemeClr val="accent1"/>
+          </a:lnRef>
+          <a:fillRef idx="3">
+            <a:schemeClr val="accent1"/>
+          </a:fillRef>
+          <a:effectRef idx="2">
+            <a:schemeClr val="accent1"/>
+          </a:effectRef>
+          <a:fontRef idx="minor">
+            <a:schemeClr val="lt1"/>
+          </a:fontRef>
+        </p:style>
+        <p:txBody>
+          <a:bodyPr rtlCol="0" anchor="ctr"/>
+          <a:lstStyle/>
+          <a:p>
+            <a:pPr algn="ctr"/>
+          </a:p>
+        </p:txBody>
+      </p:sp>
+      <p:sp>
+        <p:nvSpPr>
+          <p:cNvPr id="3" name="TextBox 2"/>
+          <p:cNvSpPr txBox="1"/>
+          <p:nvPr/>
+        </p:nvSpPr>
+        <p:spPr>
+          <a:xfrm>
+            <a:off x="594360" y="320040"/>
+            <a:ext cx="5486400" cy="274320"/>
+          </a:xfrm>
+          <a:prstGeom prst="rect">
+            <a:avLst/>
+          </a:prstGeom>
+          <a:noFill/>
+        </p:spPr>
+        <p:txBody>
+          <a:bodyPr wrap="none" anchor="ctr">
+            <a:spAutoFit/>
+          </a:bodyPr>
+          <a:lstStyle/>
+          <a:p>
+            <a:pPr algn="l"/>
+            <a:r>
+              <a:rPr sz="1000" b="1">
+                <a:solidFill>
+                  <a:srgbClr val="26BED2"/>
+                </a:solidFill>
+                <a:latin typeface="Aptos"/>
+              </a:rPr>
+              <a:t>TASK 04</a:t>
+            </a:r>
+          </a:p>
+        </p:txBody>
+      </p:sp>
+      <p:sp>
+        <p:nvSpPr>
+          <p:cNvPr id="4" name="TextBox 3"/>
+          <p:cNvSpPr txBox="1"/>
+          <p:nvPr/>
+        </p:nvSpPr>
+        <p:spPr>
+          <a:xfrm>
+            <a:off x="594360" y="658368"/>
+            <a:ext cx="10881360" cy="594360"/>
+          </a:xfrm>
+          <a:prstGeom prst="rect">
+            <a:avLst/>
+          </a:prstGeom>
+          <a:noFill/>
+        </p:spPr>
+        <p:txBody>
+          <a:bodyPr wrap="none" anchor="ctr">
+            <a:spAutoFit/>
+          </a:bodyPr>
+          <a:lstStyle/>
+          <a:p>
+            <a:pPr algn="l"/>
+            <a:r>
+              <a:rPr sz="2800" b="1">
+                <a:solidFill>
+                  <a:srgbClr val="F8FAFC"/>
+                </a:solidFill>
+                <a:latin typeface="Aptos"/>
+              </a:rPr>
+              <a:t>Sales Analytics</a:t>
+            </a:r>
+          </a:p>
+        </p:txBody>
+      </p:sp>
+      <p:sp>
+        <p:nvSpPr>
+          <p:cNvPr id="5" name="TextBox 4"/>
+          <p:cNvSpPr txBox="1"/>
+          <p:nvPr/>
+        </p:nvSpPr>
+        <p:spPr>
+          <a:xfrm>
+            <a:off x="612648" y="1280160"/>
+            <a:ext cx="10698480" cy="365760"/>
+          </a:xfrm>
+          <a:prstGeom prst="rect">
+            <a:avLst/>
+          </a:prstGeom>
+          <a:noFill/>
+        </p:spPr>
+        <p:txBody>
+          <a:bodyPr wrap="none" anchor="ctr">
+            <a:spAutoFit/>
+          </a:bodyPr>
+          <a:lstStyle/>
+          <a:p>
+            <a:pPr algn="l"/>
+            <a:r>
+              <a:rPr sz="1100" b="0">
+                <a:solidFill>
+                  <a:srgbClr val="A0AEC0"/>
+                </a:solidFill>
+                <a:latin typeface="Aptos"/>
+              </a:rPr>
+              <a:t>Data Storytelling &amp; Statistical Validation</a:t>
+            </a:r>
+          </a:p>
+        </p:txBody>
+      </p:sp>
+      <p:sp>
+        <p:nvSpPr>
+          <p:cNvPr id="6" name="TextBox 5"/>
+          <p:cNvSpPr txBox="1"/>
+          <p:nvPr/>
+        </p:nvSpPr>
+        <p:spPr>
+          <a:xfrm>
+            <a:off x="594360" y="6473952"/>
+            <a:ext cx="5029200" cy="182880"/>
+          </a:xfrm>
+          <a:prstGeom prst="rect">
+            <a:avLst/>
+          </a:prstGeom>
+          <a:noFill/>
+        </p:spPr>
+        <p:txBody>
+          <a:bodyPr wrap="none" anchor="ctr">
+            <a:spAutoFit/>
+          </a:bodyPr>
+          <a:lstStyle/>
+          <a:p>
+            <a:pPr algn="l"/>
+            <a:r>
+              <a:rPr sz="800" b="1">
+                <a:solidFill>
+                  <a:srgbClr val="A0AEC0"/>
+                </a:solidFill>
+                <a:latin typeface="Aptos"/>
+              </a:rPr>
+              <a:t>APEXPLANET • DATA ANALYTICS INTERNSHIP</a:t>
+            </a:r>
+          </a:p>
+        </p:txBody>
+      </p:sp>
+      <p:sp>
+        <p:nvSpPr>
+          <p:cNvPr id="7" name="TextBox 6"/>
+          <p:cNvSpPr txBox="1"/>
+          <p:nvPr/>
+        </p:nvSpPr>
+        <p:spPr>
+          <a:xfrm>
+            <a:off x="11018520" y="6446520"/>
+            <a:ext cx="548640" cy="228600"/>
+          </a:xfrm>
+          <a:prstGeom prst="rect">
+            <a:avLst/>
+          </a:prstGeom>
+          <a:noFill/>
+        </p:spPr>
+        <p:txBody>
+          <a:bodyPr wrap="none" anchor="ctr">
+            <a:spAutoFit/>
+          </a:bodyPr>
+          <a:lstStyle/>
+          <a:p>
+            <a:pPr algn="r"/>
+            <a:r>
+              <a:rPr sz="900" b="1">
+                <a:solidFill>
+                  <a:srgbClr val="A0AEC0"/>
+                </a:solidFill>
+                <a:latin typeface="Aptos"/>
+              </a:rPr>
+              <a:t>01</a:t>
+            </a:r>
+          </a:p>
+        </p:txBody>
+      </p:sp>
+      <p:sp>
+        <p:nvSpPr>
+          <p:cNvPr id="8" name="TextBox 7"/>
+          <p:cNvSpPr txBox="1"/>
+          <p:nvPr/>
+        </p:nvSpPr>
+        <p:spPr>
+          <a:xfrm>
+            <a:off x="713232" y="1920240"/>
+            <a:ext cx="5120640" cy="320040"/>
+          </a:xfrm>
+          <a:prstGeom prst="rect">
+            <a:avLst/>
+          </a:prstGeom>
+          <a:noFill/>
+        </p:spPr>
+        <p:txBody>
+          <a:bodyPr wrap="none" anchor="ctr">
+            <a:spAutoFit/>
+          </a:bodyPr>
+          <a:lstStyle/>
+          <a:p>
+            <a:pPr algn="l"/>
+            <a:r>
+              <a:rPr sz="1200" b="1">
+                <a:solidFill>
+                  <a:srgbClr val="26BED2"/>
+                </a:solidFill>
+                <a:latin typeface="Aptos"/>
+              </a:rPr>
+              <a:t>FROM DESCRIPTIVE INSIGHT</a:t>
+            </a:r>
+          </a:p>
+        </p:txBody>
+      </p:sp>
+      <p:sp>
+        <p:nvSpPr>
+          <p:cNvPr id="9" name="TextBox 8"/>
+          <p:cNvSpPr txBox="1"/>
+          <p:nvPr/>
+        </p:nvSpPr>
+        <p:spPr>
+          <a:xfrm>
+            <a:off x="713232" y="2267712"/>
+            <a:ext cx="7132320" cy="594360"/>
+          </a:xfrm>
+          <a:prstGeom prst="rect">
+            <a:avLst/>
+          </a:prstGeom>
+          <a:noFill/>
+        </p:spPr>
+        <p:txBody>
+          <a:bodyPr wrap="none" anchor="ctr">
+            <a:spAutoFit/>
+          </a:bodyPr>
+          <a:lstStyle/>
+          <a:p>
+            <a:pPr algn="l"/>
+            <a:r>
+              <a:rPr sz="2800" b="1">
+                <a:solidFill>
+                  <a:srgbClr val="F8FAFC"/>
+                </a:solidFill>
+                <a:latin typeface="Aptos"/>
+              </a:rPr>
+              <a:t>to statistically validated evidence</a:t>
+            </a:r>
+          </a:p>
+        </p:txBody>
+      </p:sp>
+      <p:sp>
+        <p:nvSpPr>
+          <p:cNvPr id="10" name="TextBox 9"/>
+          <p:cNvSpPr txBox="1"/>
+          <p:nvPr/>
+        </p:nvSpPr>
+        <p:spPr>
+          <a:xfrm>
+            <a:off x="731520" y="3017520"/>
+            <a:ext cx="5486400" cy="320040"/>
+          </a:xfrm>
+          <a:prstGeom prst="rect">
+            <a:avLst/>
+          </a:prstGeom>
+          <a:noFill/>
+        </p:spPr>
+        <p:txBody>
+          <a:bodyPr wrap="none" anchor="ctr">
+            <a:spAutoFit/>
+          </a:bodyPr>
+          <a:lstStyle/>
+          <a:p>
+            <a:pPr algn="l"/>
+            <a:r>
+              <a:rPr sz="1400" b="0">
+                <a:solidFill>
+                  <a:srgbClr val="DCE4F0"/>
+                </a:solidFill>
+                <a:latin typeface="Aptos"/>
+              </a:rPr>
               <a:t>ApexPlanet Data Analytics Internship</a:t>
             </a:r>
           </a:p>
@@ -3126,31 +3422,570 @@
       </p:sp>
       <p:sp>
         <p:nvSpPr>
+          <p:cNvPr id="11" name="Rounded Rectangle 10"/>
+          <p:cNvSpPr/>
+          <p:nvPr/>
+        </p:nvSpPr>
+        <p:spPr>
+          <a:xfrm>
+            <a:off x="8001000" y="1645920"/>
+            <a:ext cx="3246120" cy="1325880"/>
+          </a:xfrm>
+          <a:prstGeom prst="roundRect">
+            <a:avLst/>
+          </a:prstGeom>
+          <a:solidFill>
+            <a:srgbClr val="18233A"/>
+          </a:solidFill>
+          <a:ln>
+            <a:solidFill>
+              <a:srgbClr val="374660"/>
+            </a:solidFill>
+          </a:ln>
+        </p:spPr>
+        <p:style>
+          <a:lnRef idx="1">
+            <a:schemeClr val="accent1"/>
+          </a:lnRef>
+          <a:fillRef idx="3">
+            <a:schemeClr val="accent1"/>
+          </a:fillRef>
+          <a:effectRef idx="2">
+            <a:schemeClr val="accent1"/>
+          </a:effectRef>
+          <a:fontRef idx="minor">
+            <a:schemeClr val="lt1"/>
+          </a:fontRef>
+        </p:style>
+        <p:txBody>
+          <a:bodyPr rtlCol="0" anchor="ctr"/>
+          <a:lstStyle/>
+          <a:p>
+            <a:pPr algn="ctr"/>
+          </a:p>
+        </p:txBody>
+      </p:sp>
+      <p:sp>
+        <p:nvSpPr>
+          <p:cNvPr id="12" name="TextBox 11"/>
+          <p:cNvSpPr txBox="1"/>
+          <p:nvPr/>
+        </p:nvSpPr>
+        <p:spPr>
+          <a:xfrm>
+            <a:off x="8183879" y="1810512"/>
+            <a:ext cx="2880360" cy="438912"/>
+          </a:xfrm>
+          <a:prstGeom prst="rect">
+            <a:avLst/>
+          </a:prstGeom>
+          <a:noFill/>
+        </p:spPr>
+        <p:txBody>
+          <a:bodyPr wrap="none" anchor="ctr">
+            <a:spAutoFit/>
+          </a:bodyPr>
+          <a:lstStyle/>
+          <a:p>
+            <a:pPr algn="l"/>
+            <a:r>
+              <a:rPr sz="2400" b="1">
+                <a:solidFill>
+                  <a:srgbClr val="F8FAFC"/>
+                </a:solidFill>
+                <a:latin typeface="Aptos"/>
+              </a:rPr>
+              <a:t>₹139.4M</a:t>
+            </a:r>
+          </a:p>
+        </p:txBody>
+      </p:sp>
+      <p:sp>
+        <p:nvSpPr>
+          <p:cNvPr id="13" name="TextBox 12"/>
+          <p:cNvSpPr txBox="1"/>
+          <p:nvPr/>
+        </p:nvSpPr>
+        <p:spPr>
+          <a:xfrm>
+            <a:off x="8183879" y="2359152"/>
+            <a:ext cx="2880360" cy="228600"/>
+          </a:xfrm>
+          <a:prstGeom prst="rect">
+            <a:avLst/>
+          </a:prstGeom>
+          <a:noFill/>
+        </p:spPr>
+        <p:txBody>
+          <a:bodyPr wrap="none" anchor="ctr">
+            <a:spAutoFit/>
+          </a:bodyPr>
+          <a:lstStyle/>
+          <a:p>
+            <a:pPr algn="l"/>
+            <a:r>
+              <a:rPr sz="800" b="1">
+                <a:solidFill>
+                  <a:srgbClr val="A0AEC0"/>
+                </a:solidFill>
+                <a:latin typeface="Aptos"/>
+              </a:rPr>
+              <a:t>TOTAL SALES</a:t>
+            </a:r>
+          </a:p>
+        </p:txBody>
+      </p:sp>
+      <p:sp>
+        <p:nvSpPr>
+          <p:cNvPr id="14" name="Rectangle 13"/>
+          <p:cNvSpPr/>
+          <p:nvPr/>
+        </p:nvSpPr>
+        <p:spPr>
+          <a:xfrm>
+            <a:off x="8001000" y="1645920"/>
+            <a:ext cx="50292" cy="1325880"/>
+          </a:xfrm>
+          <a:prstGeom prst="rect">
+            <a:avLst/>
+          </a:prstGeom>
+          <a:solidFill>
+            <a:srgbClr val="366EE6"/>
+          </a:solidFill>
+          <a:ln>
+            <a:noFill/>
+          </a:ln>
+        </p:spPr>
+        <p:style>
+          <a:lnRef idx="1">
+            <a:schemeClr val="accent1"/>
+          </a:lnRef>
+          <a:fillRef idx="3">
+            <a:schemeClr val="accent1"/>
+          </a:fillRef>
+          <a:effectRef idx="2">
+            <a:schemeClr val="accent1"/>
+          </a:effectRef>
+          <a:fontRef idx="minor">
+            <a:schemeClr val="lt1"/>
+          </a:fontRef>
+        </p:style>
+        <p:txBody>
+          <a:bodyPr rtlCol="0" anchor="ctr"/>
+          <a:lstStyle/>
+          <a:p>
+            <a:pPr algn="ctr"/>
+          </a:p>
+        </p:txBody>
+      </p:sp>
+      <p:sp>
+        <p:nvSpPr>
+          <p:cNvPr id="15" name="Rounded Rectangle 14"/>
+          <p:cNvSpPr/>
+          <p:nvPr/>
+        </p:nvSpPr>
+        <p:spPr>
+          <a:xfrm>
+            <a:off x="8001000" y="3200400"/>
+            <a:ext cx="3246120" cy="1325880"/>
+          </a:xfrm>
+          <a:prstGeom prst="roundRect">
+            <a:avLst/>
+          </a:prstGeom>
+          <a:solidFill>
+            <a:srgbClr val="18233A"/>
+          </a:solidFill>
+          <a:ln>
+            <a:solidFill>
+              <a:srgbClr val="374660"/>
+            </a:solidFill>
+          </a:ln>
+        </p:spPr>
+        <p:style>
+          <a:lnRef idx="1">
+            <a:schemeClr val="accent1"/>
+          </a:lnRef>
+          <a:fillRef idx="3">
+            <a:schemeClr val="accent1"/>
+          </a:fillRef>
+          <a:effectRef idx="2">
+            <a:schemeClr val="accent1"/>
+          </a:effectRef>
+          <a:fontRef idx="minor">
+            <a:schemeClr val="lt1"/>
+          </a:fontRef>
+        </p:style>
+        <p:txBody>
+          <a:bodyPr rtlCol="0" anchor="ctr"/>
+          <a:lstStyle/>
+          <a:p>
+            <a:pPr algn="ctr"/>
+          </a:p>
+        </p:txBody>
+      </p:sp>
+      <p:sp>
+        <p:nvSpPr>
+          <p:cNvPr id="16" name="TextBox 15"/>
+          <p:cNvSpPr txBox="1"/>
+          <p:nvPr/>
+        </p:nvSpPr>
+        <p:spPr>
+          <a:xfrm>
+            <a:off x="8183879" y="3364992"/>
+            <a:ext cx="2880360" cy="438912"/>
+          </a:xfrm>
+          <a:prstGeom prst="rect">
+            <a:avLst/>
+          </a:prstGeom>
+          <a:noFill/>
+        </p:spPr>
+        <p:txBody>
+          <a:bodyPr wrap="none" anchor="ctr">
+            <a:spAutoFit/>
+          </a:bodyPr>
+          <a:lstStyle/>
+          <a:p>
+            <a:pPr algn="l"/>
+            <a:r>
+              <a:rPr sz="2400" b="1">
+                <a:solidFill>
+                  <a:srgbClr val="F8FAFC"/>
+                </a:solidFill>
+                <a:latin typeface="Aptos"/>
+              </a:rPr>
+              <a:t>1,000</a:t>
+            </a:r>
+          </a:p>
+        </p:txBody>
+      </p:sp>
+      <p:sp>
+        <p:nvSpPr>
+          <p:cNvPr id="17" name="TextBox 16"/>
+          <p:cNvSpPr txBox="1"/>
+          <p:nvPr/>
+        </p:nvSpPr>
+        <p:spPr>
+          <a:xfrm>
+            <a:off x="8183879" y="3913632"/>
+            <a:ext cx="2880360" cy="228600"/>
+          </a:xfrm>
+          <a:prstGeom prst="rect">
+            <a:avLst/>
+          </a:prstGeom>
+          <a:noFill/>
+        </p:spPr>
+        <p:txBody>
+          <a:bodyPr wrap="none" anchor="ctr">
+            <a:spAutoFit/>
+          </a:bodyPr>
+          <a:lstStyle/>
+          <a:p>
+            <a:pPr algn="l"/>
+            <a:r>
+              <a:rPr sz="800" b="1">
+                <a:solidFill>
+                  <a:srgbClr val="A0AEC0"/>
+                </a:solidFill>
+                <a:latin typeface="Aptos"/>
+              </a:rPr>
+              <a:t>TRANSACTIONS</a:t>
+            </a:r>
+          </a:p>
+        </p:txBody>
+      </p:sp>
+      <p:sp>
+        <p:nvSpPr>
+          <p:cNvPr id="18" name="Rectangle 17"/>
+          <p:cNvSpPr/>
+          <p:nvPr/>
+        </p:nvSpPr>
+        <p:spPr>
+          <a:xfrm>
+            <a:off x="8001000" y="3200400"/>
+            <a:ext cx="50292" cy="1325880"/>
+          </a:xfrm>
+          <a:prstGeom prst="rect">
+            <a:avLst/>
+          </a:prstGeom>
+          <a:solidFill>
+            <a:srgbClr val="26BED2"/>
+          </a:solidFill>
+          <a:ln>
+            <a:noFill/>
+          </a:ln>
+        </p:spPr>
+        <p:style>
+          <a:lnRef idx="1">
+            <a:schemeClr val="accent1"/>
+          </a:lnRef>
+          <a:fillRef idx="3">
+            <a:schemeClr val="accent1"/>
+          </a:fillRef>
+          <a:effectRef idx="2">
+            <a:schemeClr val="accent1"/>
+          </a:effectRef>
+          <a:fontRef idx="minor">
+            <a:schemeClr val="lt1"/>
+          </a:fontRef>
+        </p:style>
+        <p:txBody>
+          <a:bodyPr rtlCol="0" anchor="ctr"/>
+          <a:lstStyle/>
+          <a:p>
+            <a:pPr algn="ctr"/>
+          </a:p>
+        </p:txBody>
+      </p:sp>
+      <p:sp>
+        <p:nvSpPr>
+          <p:cNvPr id="19" name="Rounded Rectangle 18"/>
+          <p:cNvSpPr/>
+          <p:nvPr/>
+        </p:nvSpPr>
+        <p:spPr>
+          <a:xfrm>
+            <a:off x="8001000" y="4754880"/>
+            <a:ext cx="3246120" cy="1325880"/>
+          </a:xfrm>
+          <a:prstGeom prst="roundRect">
+            <a:avLst/>
+          </a:prstGeom>
+          <a:solidFill>
+            <a:srgbClr val="18233A"/>
+          </a:solidFill>
+          <a:ln>
+            <a:solidFill>
+              <a:srgbClr val="374660"/>
+            </a:solidFill>
+          </a:ln>
+        </p:spPr>
+        <p:style>
+          <a:lnRef idx="1">
+            <a:schemeClr val="accent1"/>
+          </a:lnRef>
+          <a:fillRef idx="3">
+            <a:schemeClr val="accent1"/>
+          </a:fillRef>
+          <a:effectRef idx="2">
+            <a:schemeClr val="accent1"/>
+          </a:effectRef>
+          <a:fontRef idx="minor">
+            <a:schemeClr val="lt1"/>
+          </a:fontRef>
+        </p:style>
+        <p:txBody>
+          <a:bodyPr rtlCol="0" anchor="ctr"/>
+          <a:lstStyle/>
+          <a:p>
+            <a:pPr algn="ctr"/>
+          </a:p>
+        </p:txBody>
+      </p:sp>
+      <p:sp>
+        <p:nvSpPr>
+          <p:cNvPr id="20" name="TextBox 19"/>
+          <p:cNvSpPr txBox="1"/>
+          <p:nvPr/>
+        </p:nvSpPr>
+        <p:spPr>
+          <a:xfrm>
+            <a:off x="8183879" y="4919472"/>
+            <a:ext cx="2880360" cy="438912"/>
+          </a:xfrm>
+          <a:prstGeom prst="rect">
+            <a:avLst/>
+          </a:prstGeom>
+          <a:noFill/>
+        </p:spPr>
+        <p:txBody>
+          <a:bodyPr wrap="none" anchor="ctr">
+            <a:spAutoFit/>
+          </a:bodyPr>
+          <a:lstStyle/>
+          <a:p>
+            <a:pPr algn="l"/>
+            <a:r>
+              <a:rPr sz="2400" b="1">
+                <a:solidFill>
+                  <a:srgbClr val="F8FAFC"/>
+                </a:solidFill>
+                <a:latin typeface="Aptos"/>
+              </a:rPr>
+              <a:t>947</a:t>
+            </a:r>
+          </a:p>
+        </p:txBody>
+      </p:sp>
+      <p:sp>
+        <p:nvSpPr>
+          <p:cNvPr id="21" name="TextBox 20"/>
+          <p:cNvSpPr txBox="1"/>
+          <p:nvPr/>
+        </p:nvSpPr>
+        <p:spPr>
+          <a:xfrm>
+            <a:off x="8183879" y="5468112"/>
+            <a:ext cx="2880360" cy="228600"/>
+          </a:xfrm>
+          <a:prstGeom prst="rect">
+            <a:avLst/>
+          </a:prstGeom>
+          <a:noFill/>
+        </p:spPr>
+        <p:txBody>
+          <a:bodyPr wrap="none" anchor="ctr">
+            <a:spAutoFit/>
+          </a:bodyPr>
+          <a:lstStyle/>
+          <a:p>
+            <a:pPr algn="l"/>
+            <a:r>
+              <a:rPr sz="800" b="1">
+                <a:solidFill>
+                  <a:srgbClr val="A0AEC0"/>
+                </a:solidFill>
+                <a:latin typeface="Aptos"/>
+              </a:rPr>
+              <a:t>UNIQUE CUSTOMERS</a:t>
+            </a:r>
+          </a:p>
+        </p:txBody>
+      </p:sp>
+      <p:sp>
+        <p:nvSpPr>
+          <p:cNvPr id="22" name="Rectangle 21"/>
+          <p:cNvSpPr/>
+          <p:nvPr/>
+        </p:nvSpPr>
+        <p:spPr>
+          <a:xfrm>
+            <a:off x="8001000" y="4754880"/>
+            <a:ext cx="50292" cy="1325880"/>
+          </a:xfrm>
+          <a:prstGeom prst="rect">
+            <a:avLst/>
+          </a:prstGeom>
+          <a:solidFill>
+            <a:srgbClr val="28BE87"/>
+          </a:solidFill>
+          <a:ln>
+            <a:noFill/>
+          </a:ln>
+        </p:spPr>
+        <p:style>
+          <a:lnRef idx="1">
+            <a:schemeClr val="accent1"/>
+          </a:lnRef>
+          <a:fillRef idx="3">
+            <a:schemeClr val="accent1"/>
+          </a:fillRef>
+          <a:effectRef idx="2">
+            <a:schemeClr val="accent1"/>
+          </a:effectRef>
+          <a:fontRef idx="minor">
+            <a:schemeClr val="lt1"/>
+          </a:fontRef>
+        </p:style>
+        <p:txBody>
+          <a:bodyPr rtlCol="0" anchor="ctr"/>
+          <a:lstStyle/>
+          <a:p>
+            <a:pPr algn="ctr"/>
+          </a:p>
+        </p:txBody>
+      </p:sp>
+    </p:spTree>
+  </p:cSld>
+  <p:clrMapOvr>
+    <a:masterClrMapping/>
+  </p:clrMapOvr>
+</p:sld>
+</file>
+
+<file path=ppt/slides/slide10.xml><?xml version="1.0" encoding="utf-8"?>
+<p:sld xmlns:a="http://schemas.openxmlformats.org/drawingml/2006/main" xmlns:p="http://schemas.openxmlformats.org/presentationml/2006/main" xmlns:r="http://schemas.openxmlformats.org/officeDocument/2006/relationships">
+  <p:cSld>
+    <p:spTree>
+      <p:nvGrpSpPr>
+        <p:cNvPr id="1" name=""/>
+        <p:cNvGrpSpPr/>
+        <p:nvPr/>
+      </p:nvGrpSpPr>
+      <p:grpSpPr/>
+      <p:sp>
+        <p:nvSpPr>
+          <p:cNvPr id="2" name="Rectangle 1"/>
+          <p:cNvSpPr/>
+          <p:nvPr/>
+        </p:nvSpPr>
+        <p:spPr>
+          <a:xfrm>
+            <a:off x="0" y="0"/>
+            <a:ext cx="12191695" cy="6858000"/>
+          </a:xfrm>
+          <a:prstGeom prst="rect">
+            <a:avLst/>
+          </a:prstGeom>
+          <a:solidFill>
+            <a:srgbClr val="0C1426"/>
+          </a:solidFill>
+          <a:ln>
+            <a:noFill/>
+          </a:ln>
+        </p:spPr>
+        <p:style>
+          <a:lnRef idx="1">
+            <a:schemeClr val="accent1"/>
+          </a:lnRef>
+          <a:fillRef idx="3">
+            <a:schemeClr val="accent1"/>
+          </a:fillRef>
+          <a:effectRef idx="2">
+            <a:schemeClr val="accent1"/>
+          </a:effectRef>
+          <a:fontRef idx="minor">
+            <a:schemeClr val="lt1"/>
+          </a:fontRef>
+        </p:style>
+        <p:txBody>
+          <a:bodyPr rtlCol="0" anchor="ctr"/>
+          <a:lstStyle/>
+          <a:p>
+            <a:pPr algn="ctr"/>
+          </a:p>
+        </p:txBody>
+      </p:sp>
+      <p:sp>
+        <p:nvSpPr>
           <p:cNvPr id="3" name="TextBox 2"/>
           <p:cNvSpPr txBox="1"/>
           <p:nvPr/>
         </p:nvSpPr>
         <p:spPr>
           <a:xfrm>
-            <a:off x="548640" y="1051560"/>
-            <a:ext cx="10972800" cy="411480"/>
-          </a:xfrm>
-          <a:prstGeom prst="rect">
-            <a:avLst/>
-          </a:prstGeom>
-          <a:noFill/>
-        </p:spPr>
-        <p:txBody>
-          <a:bodyPr wrap="none">
-            <a:spAutoFit/>
-          </a:bodyPr>
-          <a:lstStyle/>
-          <a:p>
-            <a:pPr>
-              <a:defRPr sz="1400"/>
-            </a:pPr>
-            <a:r>
-              <a:t>Sales Analytics — End-to-End Portfolio</a:t>
+            <a:off x="594360" y="320040"/>
+            <a:ext cx="5486400" cy="274320"/>
+          </a:xfrm>
+          <a:prstGeom prst="rect">
+            <a:avLst/>
+          </a:prstGeom>
+          <a:noFill/>
+        </p:spPr>
+        <p:txBody>
+          <a:bodyPr wrap="none" anchor="ctr">
+            <a:spAutoFit/>
+          </a:bodyPr>
+          <a:lstStyle/>
+          <a:p>
+            <a:pPr algn="l"/>
+            <a:r>
+              <a:rPr sz="1000" b="1">
+                <a:solidFill>
+                  <a:srgbClr val="26BED2"/>
+                </a:solidFill>
+                <a:latin typeface="Aptos"/>
+              </a:rPr>
+              <a:t>PORTFOLIO JOURNEY</a:t>
             </a:r>
           </a:p>
         </p:txBody>
@@ -3163,61 +3998,944 @@
         </p:nvSpPr>
         <p:spPr>
           <a:xfrm>
-            <a:off x="731520" y="1463040"/>
-            <a:ext cx="10789920" cy="4754880"/>
-          </a:xfrm>
-          <a:prstGeom prst="rect">
-            <a:avLst/>
-          </a:prstGeom>
-          <a:noFill/>
-        </p:spPr>
-        <p:txBody>
-          <a:bodyPr wrap="none">
-            <a:spAutoFit/>
-          </a:bodyPr>
-          <a:lstStyle/>
-          <a:p>
-            <a:pPr>
-              <a:spcAft>
-                <a:spcPts val="1200"/>
-              </a:spcAft>
-              <a:defRPr sz="1800"/>
-            </a:pPr>
-            <a:r>
-              <a:t>Dataset: 1,000 transaction rows</a:t>
-            </a:r>
-          </a:p>
-          <a:p>
-            <a:pPr>
-              <a:spcAft>
-                <a:spcPts val="1200"/>
-              </a:spcAft>
-              <a:defRPr sz="1800"/>
-            </a:pPr>
-            <a:r>
-              <a:t>Total sales: 139,399,439.65</a:t>
-            </a:r>
-          </a:p>
-          <a:p>
-            <a:pPr>
-              <a:spcAft>
-                <a:spcPts val="1200"/>
-              </a:spcAft>
-              <a:defRPr sz="1800"/>
-            </a:pPr>
-            <a:r>
-              <a:t>Scope: Data cleaning → EDA → dashboarding → statistical validation</a:t>
-            </a:r>
-          </a:p>
-          <a:p>
-            <a:pPr>
-              <a:spcAft>
-                <a:spcPts val="1200"/>
-              </a:spcAft>
-              <a:defRPr sz="1800"/>
-            </a:pPr>
-            <a:r>
-              <a:t>Business focus: sales and product/category performance</a:t>
+            <a:off x="594360" y="658368"/>
+            <a:ext cx="10881360" cy="594360"/>
+          </a:xfrm>
+          <a:prstGeom prst="rect">
+            <a:avLst/>
+          </a:prstGeom>
+          <a:noFill/>
+        </p:spPr>
+        <p:txBody>
+          <a:bodyPr wrap="none" anchor="ctr">
+            <a:spAutoFit/>
+          </a:bodyPr>
+          <a:lstStyle/>
+          <a:p>
+            <a:pPr algn="l"/>
+            <a:r>
+              <a:rPr sz="2800" b="1">
+                <a:solidFill>
+                  <a:srgbClr val="F8FAFC"/>
+                </a:solidFill>
+                <a:latin typeface="Aptos"/>
+              </a:rPr>
+              <a:t>From raw data to validated insight</a:t>
+            </a:r>
+          </a:p>
+        </p:txBody>
+      </p:sp>
+      <p:sp>
+        <p:nvSpPr>
+          <p:cNvPr id="5" name="TextBox 4"/>
+          <p:cNvSpPr txBox="1"/>
+          <p:nvPr/>
+        </p:nvSpPr>
+        <p:spPr>
+          <a:xfrm>
+            <a:off x="612648" y="1280160"/>
+            <a:ext cx="10698480" cy="365760"/>
+          </a:xfrm>
+          <a:prstGeom prst="rect">
+            <a:avLst/>
+          </a:prstGeom>
+          <a:noFill/>
+        </p:spPr>
+        <p:txBody>
+          <a:bodyPr wrap="none" anchor="ctr">
+            <a:spAutoFit/>
+          </a:bodyPr>
+          <a:lstStyle/>
+          <a:p>
+            <a:pPr algn="l"/>
+            <a:r>
+              <a:rPr sz="1100" b="0">
+                <a:solidFill>
+                  <a:srgbClr val="A0AEC0"/>
+                </a:solidFill>
+                <a:latin typeface="Aptos"/>
+              </a:rPr>
+              <a:t>Task 4 completes the analytical workflow built across the internship.</a:t>
+            </a:r>
+          </a:p>
+        </p:txBody>
+      </p:sp>
+      <p:sp>
+        <p:nvSpPr>
+          <p:cNvPr id="6" name="TextBox 5"/>
+          <p:cNvSpPr txBox="1"/>
+          <p:nvPr/>
+        </p:nvSpPr>
+        <p:spPr>
+          <a:xfrm>
+            <a:off x="594360" y="6473952"/>
+            <a:ext cx="5029200" cy="182880"/>
+          </a:xfrm>
+          <a:prstGeom prst="rect">
+            <a:avLst/>
+          </a:prstGeom>
+          <a:noFill/>
+        </p:spPr>
+        <p:txBody>
+          <a:bodyPr wrap="none" anchor="ctr">
+            <a:spAutoFit/>
+          </a:bodyPr>
+          <a:lstStyle/>
+          <a:p>
+            <a:pPr algn="l"/>
+            <a:r>
+              <a:rPr sz="800" b="1">
+                <a:solidFill>
+                  <a:srgbClr val="A0AEC0"/>
+                </a:solidFill>
+                <a:latin typeface="Aptos"/>
+              </a:rPr>
+              <a:t>APEXPLANET • DATA ANALYTICS INTERNSHIP</a:t>
+            </a:r>
+          </a:p>
+        </p:txBody>
+      </p:sp>
+      <p:sp>
+        <p:nvSpPr>
+          <p:cNvPr id="7" name="TextBox 6"/>
+          <p:cNvSpPr txBox="1"/>
+          <p:nvPr/>
+        </p:nvSpPr>
+        <p:spPr>
+          <a:xfrm>
+            <a:off x="11018520" y="6446520"/>
+            <a:ext cx="548640" cy="228600"/>
+          </a:xfrm>
+          <a:prstGeom prst="rect">
+            <a:avLst/>
+          </a:prstGeom>
+          <a:noFill/>
+        </p:spPr>
+        <p:txBody>
+          <a:bodyPr wrap="none" anchor="ctr">
+            <a:spAutoFit/>
+          </a:bodyPr>
+          <a:lstStyle/>
+          <a:p>
+            <a:pPr algn="r"/>
+            <a:r>
+              <a:rPr sz="900" b="1">
+                <a:solidFill>
+                  <a:srgbClr val="A0AEC0"/>
+                </a:solidFill>
+                <a:latin typeface="Aptos"/>
+              </a:rPr>
+              <a:t>10</a:t>
+            </a:r>
+          </a:p>
+        </p:txBody>
+      </p:sp>
+      <p:sp>
+        <p:nvSpPr>
+          <p:cNvPr id="8" name="Rounded Rectangle 7"/>
+          <p:cNvSpPr/>
+          <p:nvPr/>
+        </p:nvSpPr>
+        <p:spPr>
+          <a:xfrm>
+            <a:off x="594360" y="2011680"/>
+            <a:ext cx="2423160" cy="2148840"/>
+          </a:xfrm>
+          <a:prstGeom prst="roundRect">
+            <a:avLst/>
+          </a:prstGeom>
+          <a:solidFill>
+            <a:srgbClr val="18233A"/>
+          </a:solidFill>
+          <a:ln>
+            <a:solidFill>
+              <a:srgbClr val="366EE6"/>
+            </a:solidFill>
+          </a:ln>
+        </p:spPr>
+        <p:style>
+          <a:lnRef idx="1">
+            <a:schemeClr val="accent1"/>
+          </a:lnRef>
+          <a:fillRef idx="3">
+            <a:schemeClr val="accent1"/>
+          </a:fillRef>
+          <a:effectRef idx="2">
+            <a:schemeClr val="accent1"/>
+          </a:effectRef>
+          <a:fontRef idx="minor">
+            <a:schemeClr val="lt1"/>
+          </a:fontRef>
+        </p:style>
+        <p:txBody>
+          <a:bodyPr rtlCol="0" anchor="ctr"/>
+          <a:lstStyle/>
+          <a:p>
+            <a:pPr algn="ctr"/>
+          </a:p>
+        </p:txBody>
+      </p:sp>
+      <p:sp>
+        <p:nvSpPr>
+          <p:cNvPr id="9" name="TextBox 8"/>
+          <p:cNvSpPr txBox="1"/>
+          <p:nvPr/>
+        </p:nvSpPr>
+        <p:spPr>
+          <a:xfrm>
+            <a:off x="777240" y="2267712"/>
+            <a:ext cx="2057400" cy="274320"/>
+          </a:xfrm>
+          <a:prstGeom prst="rect">
+            <a:avLst/>
+          </a:prstGeom>
+          <a:noFill/>
+        </p:spPr>
+        <p:txBody>
+          <a:bodyPr wrap="none" anchor="ctr">
+            <a:spAutoFit/>
+          </a:bodyPr>
+          <a:lstStyle/>
+          <a:p>
+            <a:pPr algn="ctr"/>
+            <a:r>
+              <a:rPr sz="900" b="1">
+                <a:solidFill>
+                  <a:srgbClr val="366EE6"/>
+                </a:solidFill>
+                <a:latin typeface="Aptos"/>
+              </a:rPr>
+              <a:t>TASK 1</a:t>
+            </a:r>
+          </a:p>
+        </p:txBody>
+      </p:sp>
+      <p:sp>
+        <p:nvSpPr>
+          <p:cNvPr id="10" name="TextBox 9"/>
+          <p:cNvSpPr txBox="1"/>
+          <p:nvPr/>
+        </p:nvSpPr>
+        <p:spPr>
+          <a:xfrm>
+            <a:off x="777240" y="2670048"/>
+            <a:ext cx="2057400" cy="365760"/>
+          </a:xfrm>
+          <a:prstGeom prst="rect">
+            <a:avLst/>
+          </a:prstGeom>
+          <a:noFill/>
+        </p:spPr>
+        <p:txBody>
+          <a:bodyPr wrap="none" anchor="ctr">
+            <a:spAutoFit/>
+          </a:bodyPr>
+          <a:lstStyle/>
+          <a:p>
+            <a:pPr algn="ctr"/>
+            <a:r>
+              <a:rPr sz="1900" b="1">
+                <a:solidFill>
+                  <a:srgbClr val="F8FAFC"/>
+                </a:solidFill>
+                <a:latin typeface="Aptos"/>
+              </a:rPr>
+              <a:t>CLEAN</a:t>
+            </a:r>
+          </a:p>
+        </p:txBody>
+      </p:sp>
+      <p:sp>
+        <p:nvSpPr>
+          <p:cNvPr id="11" name="TextBox 10"/>
+          <p:cNvSpPr txBox="1"/>
+          <p:nvPr/>
+        </p:nvSpPr>
+        <p:spPr>
+          <a:xfrm>
+            <a:off x="822960" y="3310128"/>
+            <a:ext cx="1965960" cy="457200"/>
+          </a:xfrm>
+          <a:prstGeom prst="rect">
+            <a:avLst/>
+          </a:prstGeom>
+          <a:noFill/>
+        </p:spPr>
+        <p:txBody>
+          <a:bodyPr wrap="none" anchor="ctr">
+            <a:spAutoFit/>
+          </a:bodyPr>
+          <a:lstStyle/>
+          <a:p>
+            <a:pPr algn="ctr"/>
+            <a:r>
+              <a:rPr sz="1100" b="0">
+                <a:solidFill>
+                  <a:srgbClr val="DCE4F0"/>
+                </a:solidFill>
+                <a:latin typeface="Aptos"/>
+              </a:rPr>
+              <a:t>Quality + transformations</a:t>
+            </a:r>
+          </a:p>
+        </p:txBody>
+      </p:sp>
+      <p:sp>
+        <p:nvSpPr>
+          <p:cNvPr id="12" name="TextBox 11"/>
+          <p:cNvSpPr txBox="1"/>
+          <p:nvPr/>
+        </p:nvSpPr>
+        <p:spPr>
+          <a:xfrm>
+            <a:off x="3063240" y="2816352"/>
+            <a:ext cx="365760" cy="365760"/>
+          </a:xfrm>
+          <a:prstGeom prst="rect">
+            <a:avLst/>
+          </a:prstGeom>
+          <a:noFill/>
+        </p:spPr>
+        <p:txBody>
+          <a:bodyPr wrap="none" anchor="ctr">
+            <a:spAutoFit/>
+          </a:bodyPr>
+          <a:lstStyle/>
+          <a:p>
+            <a:pPr algn="ctr"/>
+            <a:r>
+              <a:rPr sz="2100" b="1">
+                <a:solidFill>
+                  <a:srgbClr val="A0AEC0"/>
+                </a:solidFill>
+                <a:latin typeface="Aptos"/>
+              </a:rPr>
+              <a:t>→</a:t>
+            </a:r>
+          </a:p>
+        </p:txBody>
+      </p:sp>
+      <p:sp>
+        <p:nvSpPr>
+          <p:cNvPr id="13" name="Rounded Rectangle 12"/>
+          <p:cNvSpPr/>
+          <p:nvPr/>
+        </p:nvSpPr>
+        <p:spPr>
+          <a:xfrm>
+            <a:off x="3474720" y="2011680"/>
+            <a:ext cx="2423160" cy="2148840"/>
+          </a:xfrm>
+          <a:prstGeom prst="roundRect">
+            <a:avLst/>
+          </a:prstGeom>
+          <a:solidFill>
+            <a:srgbClr val="18233A"/>
+          </a:solidFill>
+          <a:ln>
+            <a:solidFill>
+              <a:srgbClr val="26BED2"/>
+            </a:solidFill>
+          </a:ln>
+        </p:spPr>
+        <p:style>
+          <a:lnRef idx="1">
+            <a:schemeClr val="accent1"/>
+          </a:lnRef>
+          <a:fillRef idx="3">
+            <a:schemeClr val="accent1"/>
+          </a:fillRef>
+          <a:effectRef idx="2">
+            <a:schemeClr val="accent1"/>
+          </a:effectRef>
+          <a:fontRef idx="minor">
+            <a:schemeClr val="lt1"/>
+          </a:fontRef>
+        </p:style>
+        <p:txBody>
+          <a:bodyPr rtlCol="0" anchor="ctr"/>
+          <a:lstStyle/>
+          <a:p>
+            <a:pPr algn="ctr"/>
+          </a:p>
+        </p:txBody>
+      </p:sp>
+      <p:sp>
+        <p:nvSpPr>
+          <p:cNvPr id="14" name="TextBox 13"/>
+          <p:cNvSpPr txBox="1"/>
+          <p:nvPr/>
+        </p:nvSpPr>
+        <p:spPr>
+          <a:xfrm>
+            <a:off x="3657600" y="2267712"/>
+            <a:ext cx="2057400" cy="274320"/>
+          </a:xfrm>
+          <a:prstGeom prst="rect">
+            <a:avLst/>
+          </a:prstGeom>
+          <a:noFill/>
+        </p:spPr>
+        <p:txBody>
+          <a:bodyPr wrap="none" anchor="ctr">
+            <a:spAutoFit/>
+          </a:bodyPr>
+          <a:lstStyle/>
+          <a:p>
+            <a:pPr algn="ctr"/>
+            <a:r>
+              <a:rPr sz="900" b="1">
+                <a:solidFill>
+                  <a:srgbClr val="26BED2"/>
+                </a:solidFill>
+                <a:latin typeface="Aptos"/>
+              </a:rPr>
+              <a:t>TASK 2</a:t>
+            </a:r>
+          </a:p>
+        </p:txBody>
+      </p:sp>
+      <p:sp>
+        <p:nvSpPr>
+          <p:cNvPr id="15" name="TextBox 14"/>
+          <p:cNvSpPr txBox="1"/>
+          <p:nvPr/>
+        </p:nvSpPr>
+        <p:spPr>
+          <a:xfrm>
+            <a:off x="3657600" y="2670048"/>
+            <a:ext cx="2057400" cy="365760"/>
+          </a:xfrm>
+          <a:prstGeom prst="rect">
+            <a:avLst/>
+          </a:prstGeom>
+          <a:noFill/>
+        </p:spPr>
+        <p:txBody>
+          <a:bodyPr wrap="none" anchor="ctr">
+            <a:spAutoFit/>
+          </a:bodyPr>
+          <a:lstStyle/>
+          <a:p>
+            <a:pPr algn="ctr"/>
+            <a:r>
+              <a:rPr sz="1900" b="1">
+                <a:solidFill>
+                  <a:srgbClr val="F8FAFC"/>
+                </a:solidFill>
+                <a:latin typeface="Aptos"/>
+              </a:rPr>
+              <a:t>EXPLORE</a:t>
+            </a:r>
+          </a:p>
+        </p:txBody>
+      </p:sp>
+      <p:sp>
+        <p:nvSpPr>
+          <p:cNvPr id="16" name="TextBox 15"/>
+          <p:cNvSpPr txBox="1"/>
+          <p:nvPr/>
+        </p:nvSpPr>
+        <p:spPr>
+          <a:xfrm>
+            <a:off x="3703320" y="3310128"/>
+            <a:ext cx="1965960" cy="457200"/>
+          </a:xfrm>
+          <a:prstGeom prst="rect">
+            <a:avLst/>
+          </a:prstGeom>
+          <a:noFill/>
+        </p:spPr>
+        <p:txBody>
+          <a:bodyPr wrap="none" anchor="ctr">
+            <a:spAutoFit/>
+          </a:bodyPr>
+          <a:lstStyle/>
+          <a:p>
+            <a:pPr algn="ctr"/>
+            <a:r>
+              <a:rPr sz="1100" b="0">
+                <a:solidFill>
+                  <a:srgbClr val="DCE4F0"/>
+                </a:solidFill>
+                <a:latin typeface="Aptos"/>
+              </a:rPr>
+              <a:t>EDA + SQL + BI</a:t>
+            </a:r>
+          </a:p>
+        </p:txBody>
+      </p:sp>
+      <p:sp>
+        <p:nvSpPr>
+          <p:cNvPr id="17" name="TextBox 16"/>
+          <p:cNvSpPr txBox="1"/>
+          <p:nvPr/>
+        </p:nvSpPr>
+        <p:spPr>
+          <a:xfrm>
+            <a:off x="5943600" y="2816352"/>
+            <a:ext cx="365760" cy="365760"/>
+          </a:xfrm>
+          <a:prstGeom prst="rect">
+            <a:avLst/>
+          </a:prstGeom>
+          <a:noFill/>
+        </p:spPr>
+        <p:txBody>
+          <a:bodyPr wrap="none" anchor="ctr">
+            <a:spAutoFit/>
+          </a:bodyPr>
+          <a:lstStyle/>
+          <a:p>
+            <a:pPr algn="ctr"/>
+            <a:r>
+              <a:rPr sz="2100" b="1">
+                <a:solidFill>
+                  <a:srgbClr val="A0AEC0"/>
+                </a:solidFill>
+                <a:latin typeface="Aptos"/>
+              </a:rPr>
+              <a:t>→</a:t>
+            </a:r>
+          </a:p>
+        </p:txBody>
+      </p:sp>
+      <p:sp>
+        <p:nvSpPr>
+          <p:cNvPr id="18" name="Rounded Rectangle 17"/>
+          <p:cNvSpPr/>
+          <p:nvPr/>
+        </p:nvSpPr>
+        <p:spPr>
+          <a:xfrm>
+            <a:off x="6355080" y="2011680"/>
+            <a:ext cx="2423160" cy="2148840"/>
+          </a:xfrm>
+          <a:prstGeom prst="roundRect">
+            <a:avLst/>
+          </a:prstGeom>
+          <a:solidFill>
+            <a:srgbClr val="18233A"/>
+          </a:solidFill>
+          <a:ln>
+            <a:solidFill>
+              <a:srgbClr val="28BE87"/>
+            </a:solidFill>
+          </a:ln>
+        </p:spPr>
+        <p:style>
+          <a:lnRef idx="1">
+            <a:schemeClr val="accent1"/>
+          </a:lnRef>
+          <a:fillRef idx="3">
+            <a:schemeClr val="accent1"/>
+          </a:fillRef>
+          <a:effectRef idx="2">
+            <a:schemeClr val="accent1"/>
+          </a:effectRef>
+          <a:fontRef idx="minor">
+            <a:schemeClr val="lt1"/>
+          </a:fontRef>
+        </p:style>
+        <p:txBody>
+          <a:bodyPr rtlCol="0" anchor="ctr"/>
+          <a:lstStyle/>
+          <a:p>
+            <a:pPr algn="ctr"/>
+          </a:p>
+        </p:txBody>
+      </p:sp>
+      <p:sp>
+        <p:nvSpPr>
+          <p:cNvPr id="19" name="TextBox 18"/>
+          <p:cNvSpPr txBox="1"/>
+          <p:nvPr/>
+        </p:nvSpPr>
+        <p:spPr>
+          <a:xfrm>
+            <a:off x="6537960" y="2267712"/>
+            <a:ext cx="2057400" cy="274320"/>
+          </a:xfrm>
+          <a:prstGeom prst="rect">
+            <a:avLst/>
+          </a:prstGeom>
+          <a:noFill/>
+        </p:spPr>
+        <p:txBody>
+          <a:bodyPr wrap="none" anchor="ctr">
+            <a:spAutoFit/>
+          </a:bodyPr>
+          <a:lstStyle/>
+          <a:p>
+            <a:pPr algn="ctr"/>
+            <a:r>
+              <a:rPr sz="900" b="1">
+                <a:solidFill>
+                  <a:srgbClr val="28BE87"/>
+                </a:solidFill>
+                <a:latin typeface="Aptos"/>
+              </a:rPr>
+              <a:t>TASK 3</a:t>
+            </a:r>
+          </a:p>
+        </p:txBody>
+      </p:sp>
+      <p:sp>
+        <p:nvSpPr>
+          <p:cNvPr id="20" name="TextBox 19"/>
+          <p:cNvSpPr txBox="1"/>
+          <p:nvPr/>
+        </p:nvSpPr>
+        <p:spPr>
+          <a:xfrm>
+            <a:off x="6537960" y="2670048"/>
+            <a:ext cx="2057400" cy="365760"/>
+          </a:xfrm>
+          <a:prstGeom prst="rect">
+            <a:avLst/>
+          </a:prstGeom>
+          <a:noFill/>
+        </p:spPr>
+        <p:txBody>
+          <a:bodyPr wrap="none" anchor="ctr">
+            <a:spAutoFit/>
+          </a:bodyPr>
+          <a:lstStyle/>
+          <a:p>
+            <a:pPr algn="ctr"/>
+            <a:r>
+              <a:rPr sz="1900" b="1">
+                <a:solidFill>
+                  <a:srgbClr val="F8FAFC"/>
+                </a:solidFill>
+                <a:latin typeface="Aptos"/>
+              </a:rPr>
+              <a:t>DEEP DIVE</a:t>
+            </a:r>
+          </a:p>
+        </p:txBody>
+      </p:sp>
+      <p:sp>
+        <p:nvSpPr>
+          <p:cNvPr id="21" name="TextBox 20"/>
+          <p:cNvSpPr txBox="1"/>
+          <p:nvPr/>
+        </p:nvSpPr>
+        <p:spPr>
+          <a:xfrm>
+            <a:off x="6583680" y="3310128"/>
+            <a:ext cx="1965960" cy="457200"/>
+          </a:xfrm>
+          <a:prstGeom prst="rect">
+            <a:avLst/>
+          </a:prstGeom>
+          <a:noFill/>
+        </p:spPr>
+        <p:txBody>
+          <a:bodyPr wrap="none" anchor="ctr">
+            <a:spAutoFit/>
+          </a:bodyPr>
+          <a:lstStyle/>
+          <a:p>
+            <a:pPr algn="ctr"/>
+            <a:r>
+              <a:rPr sz="1100" b="0">
+                <a:solidFill>
+                  <a:srgbClr val="DCE4F0"/>
+                </a:solidFill>
+                <a:latin typeface="Aptos"/>
+              </a:rPr>
+              <a:t>KPIs + dashboard</a:t>
+            </a:r>
+          </a:p>
+        </p:txBody>
+      </p:sp>
+      <p:sp>
+        <p:nvSpPr>
+          <p:cNvPr id="22" name="TextBox 21"/>
+          <p:cNvSpPr txBox="1"/>
+          <p:nvPr/>
+        </p:nvSpPr>
+        <p:spPr>
+          <a:xfrm>
+            <a:off x="8823960" y="2816352"/>
+            <a:ext cx="365760" cy="365760"/>
+          </a:xfrm>
+          <a:prstGeom prst="rect">
+            <a:avLst/>
+          </a:prstGeom>
+          <a:noFill/>
+        </p:spPr>
+        <p:txBody>
+          <a:bodyPr wrap="none" anchor="ctr">
+            <a:spAutoFit/>
+          </a:bodyPr>
+          <a:lstStyle/>
+          <a:p>
+            <a:pPr algn="ctr"/>
+            <a:r>
+              <a:rPr sz="2100" b="1">
+                <a:solidFill>
+                  <a:srgbClr val="A0AEC0"/>
+                </a:solidFill>
+                <a:latin typeface="Aptos"/>
+              </a:rPr>
+              <a:t>→</a:t>
+            </a:r>
+          </a:p>
+        </p:txBody>
+      </p:sp>
+      <p:sp>
+        <p:nvSpPr>
+          <p:cNvPr id="23" name="Rounded Rectangle 22"/>
+          <p:cNvSpPr/>
+          <p:nvPr/>
+        </p:nvSpPr>
+        <p:spPr>
+          <a:xfrm>
+            <a:off x="9235440" y="2011680"/>
+            <a:ext cx="2423160" cy="2148840"/>
+          </a:xfrm>
+          <a:prstGeom prst="roundRect">
+            <a:avLst/>
+          </a:prstGeom>
+          <a:solidFill>
+            <a:srgbClr val="18233A"/>
+          </a:solidFill>
+          <a:ln>
+            <a:solidFill>
+              <a:srgbClr val="F5AA37"/>
+            </a:solidFill>
+          </a:ln>
+        </p:spPr>
+        <p:style>
+          <a:lnRef idx="1">
+            <a:schemeClr val="accent1"/>
+          </a:lnRef>
+          <a:fillRef idx="3">
+            <a:schemeClr val="accent1"/>
+          </a:fillRef>
+          <a:effectRef idx="2">
+            <a:schemeClr val="accent1"/>
+          </a:effectRef>
+          <a:fontRef idx="minor">
+            <a:schemeClr val="lt1"/>
+          </a:fontRef>
+        </p:style>
+        <p:txBody>
+          <a:bodyPr rtlCol="0" anchor="ctr"/>
+          <a:lstStyle/>
+          <a:p>
+            <a:pPr algn="ctr"/>
+          </a:p>
+        </p:txBody>
+      </p:sp>
+      <p:sp>
+        <p:nvSpPr>
+          <p:cNvPr id="24" name="TextBox 23"/>
+          <p:cNvSpPr txBox="1"/>
+          <p:nvPr/>
+        </p:nvSpPr>
+        <p:spPr>
+          <a:xfrm>
+            <a:off x="9418319" y="2267712"/>
+            <a:ext cx="2057400" cy="274320"/>
+          </a:xfrm>
+          <a:prstGeom prst="rect">
+            <a:avLst/>
+          </a:prstGeom>
+          <a:noFill/>
+        </p:spPr>
+        <p:txBody>
+          <a:bodyPr wrap="none" anchor="ctr">
+            <a:spAutoFit/>
+          </a:bodyPr>
+          <a:lstStyle/>
+          <a:p>
+            <a:pPr algn="ctr"/>
+            <a:r>
+              <a:rPr sz="900" b="1">
+                <a:solidFill>
+                  <a:srgbClr val="F5AA37"/>
+                </a:solidFill>
+                <a:latin typeface="Aptos"/>
+              </a:rPr>
+              <a:t>TASK 4</a:t>
+            </a:r>
+          </a:p>
+        </p:txBody>
+      </p:sp>
+      <p:sp>
+        <p:nvSpPr>
+          <p:cNvPr id="25" name="TextBox 24"/>
+          <p:cNvSpPr txBox="1"/>
+          <p:nvPr/>
+        </p:nvSpPr>
+        <p:spPr>
+          <a:xfrm>
+            <a:off x="9418319" y="2670048"/>
+            <a:ext cx="2057400" cy="365760"/>
+          </a:xfrm>
+          <a:prstGeom prst="rect">
+            <a:avLst/>
+          </a:prstGeom>
+          <a:noFill/>
+        </p:spPr>
+        <p:txBody>
+          <a:bodyPr wrap="none" anchor="ctr">
+            <a:spAutoFit/>
+          </a:bodyPr>
+          <a:lstStyle/>
+          <a:p>
+            <a:pPr algn="ctr"/>
+            <a:r>
+              <a:rPr sz="1900" b="1">
+                <a:solidFill>
+                  <a:srgbClr val="F8FAFC"/>
+                </a:solidFill>
+                <a:latin typeface="Aptos"/>
+              </a:rPr>
+              <a:t>VALIDATE</a:t>
+            </a:r>
+          </a:p>
+        </p:txBody>
+      </p:sp>
+      <p:sp>
+        <p:nvSpPr>
+          <p:cNvPr id="26" name="TextBox 25"/>
+          <p:cNvSpPr txBox="1"/>
+          <p:nvPr/>
+        </p:nvSpPr>
+        <p:spPr>
+          <a:xfrm>
+            <a:off x="9464040" y="3310128"/>
+            <a:ext cx="1965960" cy="457200"/>
+          </a:xfrm>
+          <a:prstGeom prst="rect">
+            <a:avLst/>
+          </a:prstGeom>
+          <a:noFill/>
+        </p:spPr>
+        <p:txBody>
+          <a:bodyPr wrap="none" anchor="ctr">
+            <a:spAutoFit/>
+          </a:bodyPr>
+          <a:lstStyle/>
+          <a:p>
+            <a:pPr algn="ctr"/>
+            <a:r>
+              <a:rPr sz="1100" b="0">
+                <a:solidFill>
+                  <a:srgbClr val="DCE4F0"/>
+                </a:solidFill>
+                <a:latin typeface="Aptos"/>
+              </a:rPr>
+              <a:t>Hypothesis + statistics</a:t>
+            </a:r>
+          </a:p>
+        </p:txBody>
+      </p:sp>
+      <p:sp>
+        <p:nvSpPr>
+          <p:cNvPr id="27" name="TextBox 26"/>
+          <p:cNvSpPr txBox="1"/>
+          <p:nvPr/>
+        </p:nvSpPr>
+        <p:spPr>
+          <a:xfrm>
+            <a:off x="731520" y="4709160"/>
+            <a:ext cx="1371600" cy="274320"/>
+          </a:xfrm>
+          <a:prstGeom prst="rect">
+            <a:avLst/>
+          </a:prstGeom>
+          <a:noFill/>
+        </p:spPr>
+        <p:txBody>
+          <a:bodyPr wrap="none" anchor="ctr">
+            <a:spAutoFit/>
+          </a:bodyPr>
+          <a:lstStyle/>
+          <a:p>
+            <a:pPr algn="l"/>
+            <a:r>
+              <a:rPr sz="1000" b="1">
+                <a:solidFill>
+                  <a:srgbClr val="26BED2"/>
+                </a:solidFill>
+                <a:latin typeface="Aptos"/>
+              </a:rPr>
+              <a:t>FINAL MESSAGE</a:t>
+            </a:r>
+          </a:p>
+        </p:txBody>
+      </p:sp>
+      <p:sp>
+        <p:nvSpPr>
+          <p:cNvPr id="28" name="TextBox 27"/>
+          <p:cNvSpPr txBox="1"/>
+          <p:nvPr/>
+        </p:nvSpPr>
+        <p:spPr>
+          <a:xfrm>
+            <a:off x="731520" y="5074920"/>
+            <a:ext cx="10607040" cy="502920"/>
+          </a:xfrm>
+          <a:prstGeom prst="rect">
+            <a:avLst/>
+          </a:prstGeom>
+          <a:noFill/>
+        </p:spPr>
+        <p:txBody>
+          <a:bodyPr wrap="none" anchor="ctr">
+            <a:spAutoFit/>
+          </a:bodyPr>
+          <a:lstStyle/>
+          <a:p>
+            <a:pPr algn="ctr"/>
+            <a:r>
+              <a:rPr sz="1700" b="1">
+                <a:solidFill>
+                  <a:srgbClr val="F8FAFC"/>
+                </a:solidFill>
+                <a:latin typeface="Aptos"/>
+              </a:rPr>
+              <a:t>The portfolio moves from data quality and descriptive analysis to dashboard-driven insight and statistical validation.</a:t>
+            </a:r>
+          </a:p>
+        </p:txBody>
+      </p:sp>
+      <p:sp>
+        <p:nvSpPr>
+          <p:cNvPr id="29" name="TextBox 28"/>
+          <p:cNvSpPr txBox="1"/>
+          <p:nvPr/>
+        </p:nvSpPr>
+        <p:spPr>
+          <a:xfrm>
+            <a:off x="2103120" y="5989320"/>
+            <a:ext cx="7955279" cy="274320"/>
+          </a:xfrm>
+          <a:prstGeom prst="rect">
+            <a:avLst/>
+          </a:prstGeom>
+          <a:noFill/>
+        </p:spPr>
+        <p:txBody>
+          <a:bodyPr wrap="none" anchor="ctr">
+            <a:spAutoFit/>
+          </a:bodyPr>
+          <a:lstStyle/>
+          <a:p>
+            <a:pPr algn="ctr"/>
+            <a:r>
+              <a:rPr sz="1000" b="1">
+                <a:solidFill>
+                  <a:srgbClr val="A0AEC0"/>
+                </a:solidFill>
+                <a:latin typeface="Aptos"/>
+              </a:rPr>
+              <a:t>GitHub • ApexPlanet Data Analytics Internship Portfolio</a:t>
             </a:r>
           </a:p>
         </p:txBody>
@@ -3242,32 +4960,44 @@
       <p:grpSpPr/>
       <p:sp>
         <p:nvSpPr>
-          <p:cNvPr id="2" name="TextBox 1"/>
-          <p:cNvSpPr txBox="1"/>
-          <p:nvPr/>
-        </p:nvSpPr>
-        <p:spPr>
-          <a:xfrm>
-            <a:off x="548640" y="320040"/>
-            <a:ext cx="10972800" cy="731520"/>
-          </a:xfrm>
-          <a:prstGeom prst="rect">
-            <a:avLst/>
-          </a:prstGeom>
-          <a:noFill/>
-        </p:spPr>
-        <p:txBody>
-          <a:bodyPr wrap="none">
-            <a:spAutoFit/>
-          </a:bodyPr>
-          <a:lstStyle/>
-          <a:p>
-            <a:pPr>
-              <a:defRPr sz="2800" b="1"/>
-            </a:pPr>
-            <a:r>
-              <a:t>Task 1 — Data Immersion &amp; Wrangling</a:t>
-            </a:r>
+          <p:cNvPr id="2" name="Rectangle 1"/>
+          <p:cNvSpPr/>
+          <p:nvPr/>
+        </p:nvSpPr>
+        <p:spPr>
+          <a:xfrm>
+            <a:off x="0" y="0"/>
+            <a:ext cx="12191695" cy="6858000"/>
+          </a:xfrm>
+          <a:prstGeom prst="rect">
+            <a:avLst/>
+          </a:prstGeom>
+          <a:solidFill>
+            <a:srgbClr val="0C1426"/>
+          </a:solidFill>
+          <a:ln>
+            <a:noFill/>
+          </a:ln>
+        </p:spPr>
+        <p:style>
+          <a:lnRef idx="1">
+            <a:schemeClr val="accent1"/>
+          </a:lnRef>
+          <a:fillRef idx="3">
+            <a:schemeClr val="accent1"/>
+          </a:fillRef>
+          <a:effectRef idx="2">
+            <a:schemeClr val="accent1"/>
+          </a:effectRef>
+          <a:fontRef idx="minor">
+            <a:schemeClr val="lt1"/>
+          </a:fontRef>
+        </p:style>
+        <p:txBody>
+          <a:bodyPr rtlCol="0" anchor="ctr"/>
+          <a:lstStyle/>
+          <a:p>
+            <a:pPr algn="ctr"/>
           </a:p>
         </p:txBody>
       </p:sp>
@@ -3279,72 +5009,944 @@
         </p:nvSpPr>
         <p:spPr>
           <a:xfrm>
-            <a:off x="731520" y="1463040"/>
-            <a:ext cx="10789920" cy="4754880"/>
-          </a:xfrm>
-          <a:prstGeom prst="rect">
-            <a:avLst/>
-          </a:prstGeom>
-          <a:noFill/>
-        </p:spPr>
-        <p:txBody>
-          <a:bodyPr wrap="none">
-            <a:spAutoFit/>
-          </a:bodyPr>
-          <a:lstStyle/>
-          <a:p>
-            <a:pPr>
-              <a:spcAft>
-                <a:spcPts val="1200"/>
-              </a:spcAft>
-              <a:defRPr sz="1800"/>
-            </a:pPr>
-            <a:r>
-              <a:t>Profiled missing values, duplicates, formats and outliers</a:t>
-            </a:r>
-          </a:p>
-          <a:p>
-            <a:pPr>
-              <a:spcAft>
-                <a:spcPts val="1200"/>
-              </a:spcAft>
-              <a:defRPr sz="1800"/>
-            </a:pPr>
-            <a:r>
-              <a:t>20 missing Age values → median imputation (41)</a:t>
-            </a:r>
-          </a:p>
-          <a:p>
-            <a:pPr>
-              <a:spcAft>
-                <a:spcPts val="1200"/>
-              </a:spcAft>
-              <a:defRPr sz="1800"/>
-            </a:pPr>
-            <a:r>
-              <a:t>13 missing City values → Unknown</a:t>
-            </a:r>
-          </a:p>
-          <a:p>
-            <a:pPr>
-              <a:spcAft>
-                <a:spcPts val="1200"/>
-              </a:spcAft>
-              <a:defRPr sz="1800"/>
-            </a:pPr>
-            <a:r>
-              <a:t>Repeated source Order_ID values retained and flagged; Transaction_ID created for row-level uniqueness</a:t>
-            </a:r>
-          </a:p>
-          <a:p>
-            <a:pPr>
-              <a:spcAft>
-                <a:spcPts val="1200"/>
-              </a:spcAft>
-              <a:defRPr sz="1800"/>
-            </a:pPr>
-            <a:r>
-              <a:t>Validated Quantity × Unit_Price against Total_Sales</a:t>
+            <a:off x="594360" y="320040"/>
+            <a:ext cx="5486400" cy="274320"/>
+          </a:xfrm>
+          <a:prstGeom prst="rect">
+            <a:avLst/>
+          </a:prstGeom>
+          <a:noFill/>
+        </p:spPr>
+        <p:txBody>
+          <a:bodyPr wrap="none" anchor="ctr">
+            <a:spAutoFit/>
+          </a:bodyPr>
+          <a:lstStyle/>
+          <a:p>
+            <a:pPr algn="l"/>
+            <a:r>
+              <a:rPr sz="1000" b="1">
+                <a:solidFill>
+                  <a:srgbClr val="26BED2"/>
+                </a:solidFill>
+                <a:latin typeface="Aptos"/>
+              </a:rPr>
+              <a:t>EXECUTIVE VIEW</a:t>
+            </a:r>
+          </a:p>
+        </p:txBody>
+      </p:sp>
+      <p:sp>
+        <p:nvSpPr>
+          <p:cNvPr id="4" name="TextBox 3"/>
+          <p:cNvSpPr txBox="1"/>
+          <p:nvPr/>
+        </p:nvSpPr>
+        <p:spPr>
+          <a:xfrm>
+            <a:off x="594360" y="658368"/>
+            <a:ext cx="10881360" cy="594360"/>
+          </a:xfrm>
+          <a:prstGeom prst="rect">
+            <a:avLst/>
+          </a:prstGeom>
+          <a:noFill/>
+        </p:spPr>
+        <p:txBody>
+          <a:bodyPr wrap="none" anchor="ctr">
+            <a:spAutoFit/>
+          </a:bodyPr>
+          <a:lstStyle/>
+          <a:p>
+            <a:pPr algn="l"/>
+            <a:r>
+              <a:rPr sz="2800" b="1">
+                <a:solidFill>
+                  <a:srgbClr val="F8FAFC"/>
+                </a:solidFill>
+                <a:latin typeface="Aptos"/>
+              </a:rPr>
+              <a:t>One business question drives Task 4</a:t>
+            </a:r>
+          </a:p>
+        </p:txBody>
+      </p:sp>
+      <p:sp>
+        <p:nvSpPr>
+          <p:cNvPr id="5" name="TextBox 4"/>
+          <p:cNvSpPr txBox="1"/>
+          <p:nvPr/>
+        </p:nvSpPr>
+        <p:spPr>
+          <a:xfrm>
+            <a:off x="612648" y="1280160"/>
+            <a:ext cx="10698480" cy="365760"/>
+          </a:xfrm>
+          <a:prstGeom prst="rect">
+            <a:avLst/>
+          </a:prstGeom>
+          <a:noFill/>
+        </p:spPr>
+        <p:txBody>
+          <a:bodyPr wrap="none" anchor="ctr">
+            <a:spAutoFit/>
+          </a:bodyPr>
+          <a:lstStyle/>
+          <a:p>
+            <a:pPr algn="l"/>
+            <a:r>
+              <a:rPr sz="1100" b="0">
+                <a:solidFill>
+                  <a:srgbClr val="A0AEC0"/>
+                </a:solidFill>
+                <a:latin typeface="Aptos"/>
+              </a:rPr>
+              <a:t>Task 4 turns the descriptive gender comparison into a formal statistical test.</a:t>
+            </a:r>
+          </a:p>
+        </p:txBody>
+      </p:sp>
+      <p:sp>
+        <p:nvSpPr>
+          <p:cNvPr id="6" name="TextBox 5"/>
+          <p:cNvSpPr txBox="1"/>
+          <p:nvPr/>
+        </p:nvSpPr>
+        <p:spPr>
+          <a:xfrm>
+            <a:off x="594360" y="6473952"/>
+            <a:ext cx="5029200" cy="182880"/>
+          </a:xfrm>
+          <a:prstGeom prst="rect">
+            <a:avLst/>
+          </a:prstGeom>
+          <a:noFill/>
+        </p:spPr>
+        <p:txBody>
+          <a:bodyPr wrap="none" anchor="ctr">
+            <a:spAutoFit/>
+          </a:bodyPr>
+          <a:lstStyle/>
+          <a:p>
+            <a:pPr algn="l"/>
+            <a:r>
+              <a:rPr sz="800" b="1">
+                <a:solidFill>
+                  <a:srgbClr val="A0AEC0"/>
+                </a:solidFill>
+                <a:latin typeface="Aptos"/>
+              </a:rPr>
+              <a:t>APEXPLANET • DATA ANALYTICS INTERNSHIP</a:t>
+            </a:r>
+          </a:p>
+        </p:txBody>
+      </p:sp>
+      <p:sp>
+        <p:nvSpPr>
+          <p:cNvPr id="7" name="TextBox 6"/>
+          <p:cNvSpPr txBox="1"/>
+          <p:nvPr/>
+        </p:nvSpPr>
+        <p:spPr>
+          <a:xfrm>
+            <a:off x="11018520" y="6446520"/>
+            <a:ext cx="548640" cy="228600"/>
+          </a:xfrm>
+          <a:prstGeom prst="rect">
+            <a:avLst/>
+          </a:prstGeom>
+          <a:noFill/>
+        </p:spPr>
+        <p:txBody>
+          <a:bodyPr wrap="none" anchor="ctr">
+            <a:spAutoFit/>
+          </a:bodyPr>
+          <a:lstStyle/>
+          <a:p>
+            <a:pPr algn="r"/>
+            <a:r>
+              <a:rPr sz="900" b="1">
+                <a:solidFill>
+                  <a:srgbClr val="A0AEC0"/>
+                </a:solidFill>
+                <a:latin typeface="Aptos"/>
+              </a:rPr>
+              <a:t>02</a:t>
+            </a:r>
+          </a:p>
+        </p:txBody>
+      </p:sp>
+      <p:sp>
+        <p:nvSpPr>
+          <p:cNvPr id="8" name="Rounded Rectangle 7"/>
+          <p:cNvSpPr/>
+          <p:nvPr/>
+        </p:nvSpPr>
+        <p:spPr>
+          <a:xfrm>
+            <a:off x="594360" y="2057400"/>
+            <a:ext cx="2423160" cy="1828800"/>
+          </a:xfrm>
+          <a:prstGeom prst="roundRect">
+            <a:avLst/>
+          </a:prstGeom>
+          <a:solidFill>
+            <a:srgbClr val="18233A"/>
+          </a:solidFill>
+          <a:ln>
+            <a:solidFill>
+              <a:srgbClr val="374660"/>
+            </a:solidFill>
+          </a:ln>
+        </p:spPr>
+        <p:style>
+          <a:lnRef idx="1">
+            <a:schemeClr val="accent1"/>
+          </a:lnRef>
+          <a:fillRef idx="3">
+            <a:schemeClr val="accent1"/>
+          </a:fillRef>
+          <a:effectRef idx="2">
+            <a:schemeClr val="accent1"/>
+          </a:effectRef>
+          <a:fontRef idx="minor">
+            <a:schemeClr val="lt1"/>
+          </a:fontRef>
+        </p:style>
+        <p:txBody>
+          <a:bodyPr rtlCol="0" anchor="ctr"/>
+          <a:lstStyle/>
+          <a:p>
+            <a:pPr algn="ctr"/>
+          </a:p>
+        </p:txBody>
+      </p:sp>
+      <p:sp>
+        <p:nvSpPr>
+          <p:cNvPr id="9" name="TextBox 8"/>
+          <p:cNvSpPr txBox="1"/>
+          <p:nvPr/>
+        </p:nvSpPr>
+        <p:spPr>
+          <a:xfrm>
+            <a:off x="758952" y="2240280"/>
+            <a:ext cx="365760" cy="228600"/>
+          </a:xfrm>
+          <a:prstGeom prst="rect">
+            <a:avLst/>
+          </a:prstGeom>
+          <a:noFill/>
+        </p:spPr>
+        <p:txBody>
+          <a:bodyPr wrap="none" anchor="ctr">
+            <a:spAutoFit/>
+          </a:bodyPr>
+          <a:lstStyle/>
+          <a:p>
+            <a:pPr algn="l"/>
+            <a:r>
+              <a:rPr sz="900" b="1">
+                <a:solidFill>
+                  <a:srgbClr val="26BED2"/>
+                </a:solidFill>
+                <a:latin typeface="Aptos"/>
+              </a:rPr>
+              <a:t>01</a:t>
+            </a:r>
+          </a:p>
+        </p:txBody>
+      </p:sp>
+      <p:sp>
+        <p:nvSpPr>
+          <p:cNvPr id="10" name="TextBox 9"/>
+          <p:cNvSpPr txBox="1"/>
+          <p:nvPr/>
+        </p:nvSpPr>
+        <p:spPr>
+          <a:xfrm>
+            <a:off x="758952" y="2633472"/>
+            <a:ext cx="2057400" cy="320040"/>
+          </a:xfrm>
+          <a:prstGeom prst="rect">
+            <a:avLst/>
+          </a:prstGeom>
+          <a:noFill/>
+        </p:spPr>
+        <p:txBody>
+          <a:bodyPr wrap="none" anchor="ctr">
+            <a:spAutoFit/>
+          </a:bodyPr>
+          <a:lstStyle/>
+          <a:p>
+            <a:pPr algn="ctr"/>
+            <a:r>
+              <a:rPr sz="1500" b="1">
+                <a:solidFill>
+                  <a:srgbClr val="F8FAFC"/>
+                </a:solidFill>
+                <a:latin typeface="Aptos"/>
+              </a:rPr>
+              <a:t>DESCRIBE</a:t>
+            </a:r>
+          </a:p>
+        </p:txBody>
+      </p:sp>
+      <p:sp>
+        <p:nvSpPr>
+          <p:cNvPr id="11" name="TextBox 10"/>
+          <p:cNvSpPr txBox="1"/>
+          <p:nvPr/>
+        </p:nvSpPr>
+        <p:spPr>
+          <a:xfrm>
+            <a:off x="777240" y="3182112"/>
+            <a:ext cx="2011680" cy="438912"/>
+          </a:xfrm>
+          <a:prstGeom prst="rect">
+            <a:avLst/>
+          </a:prstGeom>
+          <a:noFill/>
+        </p:spPr>
+        <p:txBody>
+          <a:bodyPr wrap="none" anchor="ctr">
+            <a:spAutoFit/>
+          </a:bodyPr>
+          <a:lstStyle/>
+          <a:p>
+            <a:pPr algn="ctr"/>
+            <a:r>
+              <a:rPr sz="1100" b="0">
+                <a:solidFill>
+                  <a:srgbClr val="DCE4F0"/>
+                </a:solidFill>
+                <a:latin typeface="Aptos"/>
+              </a:rPr>
+              <a:t>Gender sales totals</a:t>
+            </a:r>
+          </a:p>
+        </p:txBody>
+      </p:sp>
+      <p:sp>
+        <p:nvSpPr>
+          <p:cNvPr id="12" name="TextBox 11"/>
+          <p:cNvSpPr txBox="1"/>
+          <p:nvPr/>
+        </p:nvSpPr>
+        <p:spPr>
+          <a:xfrm>
+            <a:off x="3044952" y="2743200"/>
+            <a:ext cx="365760" cy="320040"/>
+          </a:xfrm>
+          <a:prstGeom prst="rect">
+            <a:avLst/>
+          </a:prstGeom>
+          <a:noFill/>
+        </p:spPr>
+        <p:txBody>
+          <a:bodyPr wrap="none" anchor="ctr">
+            <a:spAutoFit/>
+          </a:bodyPr>
+          <a:lstStyle/>
+          <a:p>
+            <a:pPr algn="ctr"/>
+            <a:r>
+              <a:rPr sz="2000" b="1">
+                <a:solidFill>
+                  <a:srgbClr val="A0AEC0"/>
+                </a:solidFill>
+                <a:latin typeface="Aptos"/>
+              </a:rPr>
+              <a:t>→</a:t>
+            </a:r>
+          </a:p>
+        </p:txBody>
+      </p:sp>
+      <p:sp>
+        <p:nvSpPr>
+          <p:cNvPr id="13" name="Rounded Rectangle 12"/>
+          <p:cNvSpPr/>
+          <p:nvPr/>
+        </p:nvSpPr>
+        <p:spPr>
+          <a:xfrm>
+            <a:off x="3474720" y="2057400"/>
+            <a:ext cx="2423160" cy="1828800"/>
+          </a:xfrm>
+          <a:prstGeom prst="roundRect">
+            <a:avLst/>
+          </a:prstGeom>
+          <a:solidFill>
+            <a:srgbClr val="18233A"/>
+          </a:solidFill>
+          <a:ln>
+            <a:solidFill>
+              <a:srgbClr val="374660"/>
+            </a:solidFill>
+          </a:ln>
+        </p:spPr>
+        <p:style>
+          <a:lnRef idx="1">
+            <a:schemeClr val="accent1"/>
+          </a:lnRef>
+          <a:fillRef idx="3">
+            <a:schemeClr val="accent1"/>
+          </a:fillRef>
+          <a:effectRef idx="2">
+            <a:schemeClr val="accent1"/>
+          </a:effectRef>
+          <a:fontRef idx="minor">
+            <a:schemeClr val="lt1"/>
+          </a:fontRef>
+        </p:style>
+        <p:txBody>
+          <a:bodyPr rtlCol="0" anchor="ctr"/>
+          <a:lstStyle/>
+          <a:p>
+            <a:pPr algn="ctr"/>
+          </a:p>
+        </p:txBody>
+      </p:sp>
+      <p:sp>
+        <p:nvSpPr>
+          <p:cNvPr id="14" name="TextBox 13"/>
+          <p:cNvSpPr txBox="1"/>
+          <p:nvPr/>
+        </p:nvSpPr>
+        <p:spPr>
+          <a:xfrm>
+            <a:off x="3639312" y="2240280"/>
+            <a:ext cx="365760" cy="228600"/>
+          </a:xfrm>
+          <a:prstGeom prst="rect">
+            <a:avLst/>
+          </a:prstGeom>
+          <a:noFill/>
+        </p:spPr>
+        <p:txBody>
+          <a:bodyPr wrap="none" anchor="ctr">
+            <a:spAutoFit/>
+          </a:bodyPr>
+          <a:lstStyle/>
+          <a:p>
+            <a:pPr algn="l"/>
+            <a:r>
+              <a:rPr sz="900" b="1">
+                <a:solidFill>
+                  <a:srgbClr val="26BED2"/>
+                </a:solidFill>
+                <a:latin typeface="Aptos"/>
+              </a:rPr>
+              <a:t>02</a:t>
+            </a:r>
+          </a:p>
+        </p:txBody>
+      </p:sp>
+      <p:sp>
+        <p:nvSpPr>
+          <p:cNvPr id="15" name="TextBox 14"/>
+          <p:cNvSpPr txBox="1"/>
+          <p:nvPr/>
+        </p:nvSpPr>
+        <p:spPr>
+          <a:xfrm>
+            <a:off x="3639312" y="2633472"/>
+            <a:ext cx="2057400" cy="320040"/>
+          </a:xfrm>
+          <a:prstGeom prst="rect">
+            <a:avLst/>
+          </a:prstGeom>
+          <a:noFill/>
+        </p:spPr>
+        <p:txBody>
+          <a:bodyPr wrap="none" anchor="ctr">
+            <a:spAutoFit/>
+          </a:bodyPr>
+          <a:lstStyle/>
+          <a:p>
+            <a:pPr algn="ctr"/>
+            <a:r>
+              <a:rPr sz="1500" b="1">
+                <a:solidFill>
+                  <a:srgbClr val="F8FAFC"/>
+                </a:solidFill>
+                <a:latin typeface="Aptos"/>
+              </a:rPr>
+              <a:t>QUESTION</a:t>
+            </a:r>
+          </a:p>
+        </p:txBody>
+      </p:sp>
+      <p:sp>
+        <p:nvSpPr>
+          <p:cNvPr id="16" name="TextBox 15"/>
+          <p:cNvSpPr txBox="1"/>
+          <p:nvPr/>
+        </p:nvSpPr>
+        <p:spPr>
+          <a:xfrm>
+            <a:off x="3657600" y="3182112"/>
+            <a:ext cx="2011680" cy="438912"/>
+          </a:xfrm>
+          <a:prstGeom prst="rect">
+            <a:avLst/>
+          </a:prstGeom>
+          <a:noFill/>
+        </p:spPr>
+        <p:txBody>
+          <a:bodyPr wrap="none" anchor="ctr">
+            <a:spAutoFit/>
+          </a:bodyPr>
+          <a:lstStyle/>
+          <a:p>
+            <a:pPr algn="ctr"/>
+            <a:r>
+              <a:rPr sz="1100" b="0">
+                <a:solidFill>
+                  <a:srgbClr val="DCE4F0"/>
+                </a:solidFill>
+                <a:latin typeface="Aptos"/>
+              </a:rPr>
+              <a:t>Do mean transaction values differ?</a:t>
+            </a:r>
+          </a:p>
+        </p:txBody>
+      </p:sp>
+      <p:sp>
+        <p:nvSpPr>
+          <p:cNvPr id="17" name="TextBox 16"/>
+          <p:cNvSpPr txBox="1"/>
+          <p:nvPr/>
+        </p:nvSpPr>
+        <p:spPr>
+          <a:xfrm>
+            <a:off x="5925312" y="2743200"/>
+            <a:ext cx="365760" cy="320040"/>
+          </a:xfrm>
+          <a:prstGeom prst="rect">
+            <a:avLst/>
+          </a:prstGeom>
+          <a:noFill/>
+        </p:spPr>
+        <p:txBody>
+          <a:bodyPr wrap="none" anchor="ctr">
+            <a:spAutoFit/>
+          </a:bodyPr>
+          <a:lstStyle/>
+          <a:p>
+            <a:pPr algn="ctr"/>
+            <a:r>
+              <a:rPr sz="2000" b="1">
+                <a:solidFill>
+                  <a:srgbClr val="A0AEC0"/>
+                </a:solidFill>
+                <a:latin typeface="Aptos"/>
+              </a:rPr>
+              <a:t>→</a:t>
+            </a:r>
+          </a:p>
+        </p:txBody>
+      </p:sp>
+      <p:sp>
+        <p:nvSpPr>
+          <p:cNvPr id="18" name="Rounded Rectangle 17"/>
+          <p:cNvSpPr/>
+          <p:nvPr/>
+        </p:nvSpPr>
+        <p:spPr>
+          <a:xfrm>
+            <a:off x="6355080" y="2057400"/>
+            <a:ext cx="2423160" cy="1828800"/>
+          </a:xfrm>
+          <a:prstGeom prst="roundRect">
+            <a:avLst/>
+          </a:prstGeom>
+          <a:solidFill>
+            <a:srgbClr val="18233A"/>
+          </a:solidFill>
+          <a:ln>
+            <a:solidFill>
+              <a:srgbClr val="374660"/>
+            </a:solidFill>
+          </a:ln>
+        </p:spPr>
+        <p:style>
+          <a:lnRef idx="1">
+            <a:schemeClr val="accent1"/>
+          </a:lnRef>
+          <a:fillRef idx="3">
+            <a:schemeClr val="accent1"/>
+          </a:fillRef>
+          <a:effectRef idx="2">
+            <a:schemeClr val="accent1"/>
+          </a:effectRef>
+          <a:fontRef idx="minor">
+            <a:schemeClr val="lt1"/>
+          </a:fontRef>
+        </p:style>
+        <p:txBody>
+          <a:bodyPr rtlCol="0" anchor="ctr"/>
+          <a:lstStyle/>
+          <a:p>
+            <a:pPr algn="ctr"/>
+          </a:p>
+        </p:txBody>
+      </p:sp>
+      <p:sp>
+        <p:nvSpPr>
+          <p:cNvPr id="19" name="TextBox 18"/>
+          <p:cNvSpPr txBox="1"/>
+          <p:nvPr/>
+        </p:nvSpPr>
+        <p:spPr>
+          <a:xfrm>
+            <a:off x="6519672" y="2240280"/>
+            <a:ext cx="365760" cy="228600"/>
+          </a:xfrm>
+          <a:prstGeom prst="rect">
+            <a:avLst/>
+          </a:prstGeom>
+          <a:noFill/>
+        </p:spPr>
+        <p:txBody>
+          <a:bodyPr wrap="none" anchor="ctr">
+            <a:spAutoFit/>
+          </a:bodyPr>
+          <a:lstStyle/>
+          <a:p>
+            <a:pPr algn="l"/>
+            <a:r>
+              <a:rPr sz="900" b="1">
+                <a:solidFill>
+                  <a:srgbClr val="26BED2"/>
+                </a:solidFill>
+                <a:latin typeface="Aptos"/>
+              </a:rPr>
+              <a:t>03</a:t>
+            </a:r>
+          </a:p>
+        </p:txBody>
+      </p:sp>
+      <p:sp>
+        <p:nvSpPr>
+          <p:cNvPr id="20" name="TextBox 19"/>
+          <p:cNvSpPr txBox="1"/>
+          <p:nvPr/>
+        </p:nvSpPr>
+        <p:spPr>
+          <a:xfrm>
+            <a:off x="6519672" y="2633472"/>
+            <a:ext cx="2057400" cy="320040"/>
+          </a:xfrm>
+          <a:prstGeom prst="rect">
+            <a:avLst/>
+          </a:prstGeom>
+          <a:noFill/>
+        </p:spPr>
+        <p:txBody>
+          <a:bodyPr wrap="none" anchor="ctr">
+            <a:spAutoFit/>
+          </a:bodyPr>
+          <a:lstStyle/>
+          <a:p>
+            <a:pPr algn="ctr"/>
+            <a:r>
+              <a:rPr sz="1500" b="1">
+                <a:solidFill>
+                  <a:srgbClr val="F8FAFC"/>
+                </a:solidFill>
+                <a:latin typeface="Aptos"/>
+              </a:rPr>
+              <a:t>TEST</a:t>
+            </a:r>
+          </a:p>
+        </p:txBody>
+      </p:sp>
+      <p:sp>
+        <p:nvSpPr>
+          <p:cNvPr id="21" name="TextBox 20"/>
+          <p:cNvSpPr txBox="1"/>
+          <p:nvPr/>
+        </p:nvSpPr>
+        <p:spPr>
+          <a:xfrm>
+            <a:off x="6537960" y="3182112"/>
+            <a:ext cx="2011680" cy="438912"/>
+          </a:xfrm>
+          <a:prstGeom prst="rect">
+            <a:avLst/>
+          </a:prstGeom>
+          <a:noFill/>
+        </p:spPr>
+        <p:txBody>
+          <a:bodyPr wrap="none" anchor="ctr">
+            <a:spAutoFit/>
+          </a:bodyPr>
+          <a:lstStyle/>
+          <a:p>
+            <a:pPr algn="ctr"/>
+            <a:r>
+              <a:rPr sz="1100" b="0">
+                <a:solidFill>
+                  <a:srgbClr val="DCE4F0"/>
+                </a:solidFill>
+                <a:latin typeface="Aptos"/>
+              </a:rPr>
+              <a:t>Welch independent t-test</a:t>
+            </a:r>
+          </a:p>
+        </p:txBody>
+      </p:sp>
+      <p:sp>
+        <p:nvSpPr>
+          <p:cNvPr id="22" name="TextBox 21"/>
+          <p:cNvSpPr txBox="1"/>
+          <p:nvPr/>
+        </p:nvSpPr>
+        <p:spPr>
+          <a:xfrm>
+            <a:off x="8805672" y="2743200"/>
+            <a:ext cx="365760" cy="320040"/>
+          </a:xfrm>
+          <a:prstGeom prst="rect">
+            <a:avLst/>
+          </a:prstGeom>
+          <a:noFill/>
+        </p:spPr>
+        <p:txBody>
+          <a:bodyPr wrap="none" anchor="ctr">
+            <a:spAutoFit/>
+          </a:bodyPr>
+          <a:lstStyle/>
+          <a:p>
+            <a:pPr algn="ctr"/>
+            <a:r>
+              <a:rPr sz="2000" b="1">
+                <a:solidFill>
+                  <a:srgbClr val="A0AEC0"/>
+                </a:solidFill>
+                <a:latin typeface="Aptos"/>
+              </a:rPr>
+              <a:t>→</a:t>
+            </a:r>
+          </a:p>
+        </p:txBody>
+      </p:sp>
+      <p:sp>
+        <p:nvSpPr>
+          <p:cNvPr id="23" name="Rounded Rectangle 22"/>
+          <p:cNvSpPr/>
+          <p:nvPr/>
+        </p:nvSpPr>
+        <p:spPr>
+          <a:xfrm>
+            <a:off x="9235440" y="2057400"/>
+            <a:ext cx="2423160" cy="1828800"/>
+          </a:xfrm>
+          <a:prstGeom prst="roundRect">
+            <a:avLst/>
+          </a:prstGeom>
+          <a:solidFill>
+            <a:srgbClr val="18233A"/>
+          </a:solidFill>
+          <a:ln>
+            <a:solidFill>
+              <a:srgbClr val="374660"/>
+            </a:solidFill>
+          </a:ln>
+        </p:spPr>
+        <p:style>
+          <a:lnRef idx="1">
+            <a:schemeClr val="accent1"/>
+          </a:lnRef>
+          <a:fillRef idx="3">
+            <a:schemeClr val="accent1"/>
+          </a:fillRef>
+          <a:effectRef idx="2">
+            <a:schemeClr val="accent1"/>
+          </a:effectRef>
+          <a:fontRef idx="minor">
+            <a:schemeClr val="lt1"/>
+          </a:fontRef>
+        </p:style>
+        <p:txBody>
+          <a:bodyPr rtlCol="0" anchor="ctr"/>
+          <a:lstStyle/>
+          <a:p>
+            <a:pPr algn="ctr"/>
+          </a:p>
+        </p:txBody>
+      </p:sp>
+      <p:sp>
+        <p:nvSpPr>
+          <p:cNvPr id="24" name="TextBox 23"/>
+          <p:cNvSpPr txBox="1"/>
+          <p:nvPr/>
+        </p:nvSpPr>
+        <p:spPr>
+          <a:xfrm>
+            <a:off x="9400032" y="2240280"/>
+            <a:ext cx="365760" cy="228600"/>
+          </a:xfrm>
+          <a:prstGeom prst="rect">
+            <a:avLst/>
+          </a:prstGeom>
+          <a:noFill/>
+        </p:spPr>
+        <p:txBody>
+          <a:bodyPr wrap="none" anchor="ctr">
+            <a:spAutoFit/>
+          </a:bodyPr>
+          <a:lstStyle/>
+          <a:p>
+            <a:pPr algn="l"/>
+            <a:r>
+              <a:rPr sz="900" b="1">
+                <a:solidFill>
+                  <a:srgbClr val="26BED2"/>
+                </a:solidFill>
+                <a:latin typeface="Aptos"/>
+              </a:rPr>
+              <a:t>04</a:t>
+            </a:r>
+          </a:p>
+        </p:txBody>
+      </p:sp>
+      <p:sp>
+        <p:nvSpPr>
+          <p:cNvPr id="25" name="TextBox 24"/>
+          <p:cNvSpPr txBox="1"/>
+          <p:nvPr/>
+        </p:nvSpPr>
+        <p:spPr>
+          <a:xfrm>
+            <a:off x="9400032" y="2633472"/>
+            <a:ext cx="2057400" cy="320040"/>
+          </a:xfrm>
+          <a:prstGeom prst="rect">
+            <a:avLst/>
+          </a:prstGeom>
+          <a:noFill/>
+        </p:spPr>
+        <p:txBody>
+          <a:bodyPr wrap="none" anchor="ctr">
+            <a:spAutoFit/>
+          </a:bodyPr>
+          <a:lstStyle/>
+          <a:p>
+            <a:pPr algn="ctr"/>
+            <a:r>
+              <a:rPr sz="1500" b="1">
+                <a:solidFill>
+                  <a:srgbClr val="F8FAFC"/>
+                </a:solidFill>
+                <a:latin typeface="Aptos"/>
+              </a:rPr>
+              <a:t>DECIDE</a:t>
+            </a:r>
+          </a:p>
+        </p:txBody>
+      </p:sp>
+      <p:sp>
+        <p:nvSpPr>
+          <p:cNvPr id="26" name="TextBox 25"/>
+          <p:cNvSpPr txBox="1"/>
+          <p:nvPr/>
+        </p:nvSpPr>
+        <p:spPr>
+          <a:xfrm>
+            <a:off x="9418319" y="3182112"/>
+            <a:ext cx="2011680" cy="438912"/>
+          </a:xfrm>
+          <a:prstGeom prst="rect">
+            <a:avLst/>
+          </a:prstGeom>
+          <a:noFill/>
+        </p:spPr>
+        <p:txBody>
+          <a:bodyPr wrap="none" anchor="ctr">
+            <a:spAutoFit/>
+          </a:bodyPr>
+          <a:lstStyle/>
+          <a:p>
+            <a:pPr algn="ctr"/>
+            <a:r>
+              <a:rPr sz="1100" b="0">
+                <a:solidFill>
+                  <a:srgbClr val="DCE4F0"/>
+                </a:solidFill>
+                <a:latin typeface="Aptos"/>
+              </a:rPr>
+              <a:t>Compare p-value with α</a:t>
+            </a:r>
+          </a:p>
+        </p:txBody>
+      </p:sp>
+      <p:sp>
+        <p:nvSpPr>
+          <p:cNvPr id="27" name="TextBox 26"/>
+          <p:cNvSpPr txBox="1"/>
+          <p:nvPr/>
+        </p:nvSpPr>
+        <p:spPr>
+          <a:xfrm>
+            <a:off x="685800" y="4572000"/>
+            <a:ext cx="1097280" cy="228600"/>
+          </a:xfrm>
+          <a:prstGeom prst="rect">
+            <a:avLst/>
+          </a:prstGeom>
+          <a:noFill/>
+        </p:spPr>
+        <p:txBody>
+          <a:bodyPr wrap="none" anchor="ctr">
+            <a:spAutoFit/>
+          </a:bodyPr>
+          <a:lstStyle/>
+          <a:p>
+            <a:pPr algn="l"/>
+            <a:r>
+              <a:rPr sz="900" b="1">
+                <a:solidFill>
+                  <a:srgbClr val="26BED2"/>
+                </a:solidFill>
+                <a:latin typeface="Aptos"/>
+              </a:rPr>
+              <a:t>Objective</a:t>
+            </a:r>
+          </a:p>
+        </p:txBody>
+      </p:sp>
+      <p:sp>
+        <p:nvSpPr>
+          <p:cNvPr id="28" name="TextBox 27"/>
+          <p:cNvSpPr txBox="1"/>
+          <p:nvPr/>
+        </p:nvSpPr>
+        <p:spPr>
+          <a:xfrm>
+            <a:off x="685800" y="4919472"/>
+            <a:ext cx="10515600" cy="502920"/>
+          </a:xfrm>
+          <a:prstGeom prst="rect">
+            <a:avLst/>
+          </a:prstGeom>
+          <a:noFill/>
+        </p:spPr>
+        <p:txBody>
+          <a:bodyPr wrap="none" anchor="ctr">
+            <a:spAutoFit/>
+          </a:bodyPr>
+          <a:lstStyle/>
+          <a:p>
+            <a:pPr algn="l"/>
+            <a:r>
+              <a:rPr sz="1600" b="1">
+                <a:solidFill>
+                  <a:srgbClr val="F8FAFC"/>
+                </a:solidFill>
+                <a:latin typeface="Aptos"/>
+              </a:rPr>
+              <a:t>Assess whether the observed difference in mean transaction sales is statistically supported at α = 0.05.</a:t>
             </a:r>
           </a:p>
         </p:txBody>
@@ -3369,32 +5971,44 @@
       <p:grpSpPr/>
       <p:sp>
         <p:nvSpPr>
-          <p:cNvPr id="2" name="TextBox 1"/>
-          <p:cNvSpPr txBox="1"/>
-          <p:nvPr/>
-        </p:nvSpPr>
-        <p:spPr>
-          <a:xfrm>
-            <a:off x="548640" y="320040"/>
-            <a:ext cx="10972800" cy="731520"/>
-          </a:xfrm>
-          <a:prstGeom prst="rect">
-            <a:avLst/>
-          </a:prstGeom>
-          <a:noFill/>
-        </p:spPr>
-        <p:txBody>
-          <a:bodyPr wrap="none">
-            <a:spAutoFit/>
-          </a:bodyPr>
-          <a:lstStyle/>
-          <a:p>
-            <a:pPr>
-              <a:defRPr sz="2800" b="1"/>
-            </a:pPr>
-            <a:r>
-              <a:t>Task 2 — EDA &amp; Business Intelligence</a:t>
-            </a:r>
+          <p:cNvPr id="2" name="Rectangle 1"/>
+          <p:cNvSpPr/>
+          <p:nvPr/>
+        </p:nvSpPr>
+        <p:spPr>
+          <a:xfrm>
+            <a:off x="0" y="0"/>
+            <a:ext cx="12191695" cy="6858000"/>
+          </a:xfrm>
+          <a:prstGeom prst="rect">
+            <a:avLst/>
+          </a:prstGeom>
+          <a:solidFill>
+            <a:srgbClr val="0C1426"/>
+          </a:solidFill>
+          <a:ln>
+            <a:noFill/>
+          </a:ln>
+        </p:spPr>
+        <p:style>
+          <a:lnRef idx="1">
+            <a:schemeClr val="accent1"/>
+          </a:lnRef>
+          <a:fillRef idx="3">
+            <a:schemeClr val="accent1"/>
+          </a:fillRef>
+          <a:effectRef idx="2">
+            <a:schemeClr val="accent1"/>
+          </a:effectRef>
+          <a:fontRef idx="minor">
+            <a:schemeClr val="lt1"/>
+          </a:fontRef>
+        </p:style>
+        <p:txBody>
+          <a:bodyPr rtlCol="0" anchor="ctr"/>
+          <a:lstStyle/>
+          <a:p>
+            <a:pPr algn="ctr"/>
           </a:p>
         </p:txBody>
       </p:sp>
@@ -3406,72 +6020,939 @@
         </p:nvSpPr>
         <p:spPr>
           <a:xfrm>
-            <a:off x="731520" y="1463040"/>
-            <a:ext cx="10789920" cy="4754880"/>
-          </a:xfrm>
-          <a:prstGeom prst="rect">
-            <a:avLst/>
-          </a:prstGeom>
-          <a:noFill/>
-        </p:spPr>
-        <p:txBody>
-          <a:bodyPr wrap="none">
-            <a:spAutoFit/>
-          </a:bodyPr>
-          <a:lstStyle/>
-          <a:p>
-            <a:pPr>
-              <a:spcAft>
-                <a:spcPts val="1200"/>
-              </a:spcAft>
-              <a:defRPr sz="1800"/>
-            </a:pPr>
-            <a:r>
-              <a:t>Top category: Electronics (50,778,581.70)</a:t>
-            </a:r>
-          </a:p>
-          <a:p>
-            <a:pPr>
-              <a:spcAft>
-                <a:spcPts val="1200"/>
-              </a:spcAft>
-              <a:defRPr sz="1800"/>
-            </a:pPr>
-            <a:r>
-              <a:t>Top product: Laptop (25,443,008.51)</a:t>
-            </a:r>
-          </a:p>
-          <a:p>
-            <a:pPr>
-              <a:spcAft>
-                <a:spcPts val="1200"/>
-              </a:spcAft>
-              <a:defRPr sz="1800"/>
-            </a:pPr>
-            <a:r>
-              <a:t>Top city: Patna (19,285,966.89)</a:t>
-            </a:r>
-          </a:p>
-          <a:p>
-            <a:pPr>
-              <a:spcAft>
-                <a:spcPts val="1200"/>
-              </a:spcAft>
-              <a:defRPr sz="1800"/>
-            </a:pPr>
-            <a:r>
-              <a:t>Highest-sales month: Mar 2025 (13,059,899.94)</a:t>
-            </a:r>
-          </a:p>
-          <a:p>
-            <a:pPr>
-              <a:spcAft>
-                <a:spcPts val="1200"/>
-              </a:spcAft>
-              <a:defRPr sz="1800"/>
-            </a:pPr>
-            <a:r>
-              <a:t>Unit Price ↔ Total Sales correlation: 0.6863</a:t>
+            <a:off x="594360" y="320040"/>
+            <a:ext cx="5486400" cy="274320"/>
+          </a:xfrm>
+          <a:prstGeom prst="rect">
+            <a:avLst/>
+          </a:prstGeom>
+          <a:noFill/>
+        </p:spPr>
+        <p:txBody>
+          <a:bodyPr wrap="none" anchor="ctr">
+            <a:spAutoFit/>
+          </a:bodyPr>
+          <a:lstStyle/>
+          <a:p>
+            <a:pPr algn="l"/>
+            <a:r>
+              <a:rPr sz="1000" b="1">
+                <a:solidFill>
+                  <a:srgbClr val="26BED2"/>
+                </a:solidFill>
+                <a:latin typeface="Aptos"/>
+              </a:rPr>
+              <a:t>BUSINESS CONTEXT</a:t>
+            </a:r>
+          </a:p>
+        </p:txBody>
+      </p:sp>
+      <p:sp>
+        <p:nvSpPr>
+          <p:cNvPr id="4" name="TextBox 3"/>
+          <p:cNvSpPr txBox="1"/>
+          <p:nvPr/>
+        </p:nvSpPr>
+        <p:spPr>
+          <a:xfrm>
+            <a:off x="594360" y="658368"/>
+            <a:ext cx="10881360" cy="594360"/>
+          </a:xfrm>
+          <a:prstGeom prst="rect">
+            <a:avLst/>
+          </a:prstGeom>
+          <a:noFill/>
+        </p:spPr>
+        <p:txBody>
+          <a:bodyPr wrap="none" anchor="ctr">
+            <a:spAutoFit/>
+          </a:bodyPr>
+          <a:lstStyle/>
+          <a:p>
+            <a:pPr algn="l"/>
+            <a:r>
+              <a:rPr sz="2800" b="1">
+                <a:solidFill>
+                  <a:srgbClr val="F8FAFC"/>
+                </a:solidFill>
+                <a:latin typeface="Aptos"/>
+              </a:rPr>
+              <a:t>The descriptive signal</a:t>
+            </a:r>
+          </a:p>
+        </p:txBody>
+      </p:sp>
+      <p:sp>
+        <p:nvSpPr>
+          <p:cNvPr id="5" name="TextBox 4"/>
+          <p:cNvSpPr txBox="1"/>
+          <p:nvPr/>
+        </p:nvSpPr>
+        <p:spPr>
+          <a:xfrm>
+            <a:off x="612648" y="1280160"/>
+            <a:ext cx="10698480" cy="365760"/>
+          </a:xfrm>
+          <a:prstGeom prst="rect">
+            <a:avLst/>
+          </a:prstGeom>
+          <a:noFill/>
+        </p:spPr>
+        <p:txBody>
+          <a:bodyPr wrap="none" anchor="ctr">
+            <a:spAutoFit/>
+          </a:bodyPr>
+          <a:lstStyle/>
+          <a:p>
+            <a:pPr algn="l"/>
+            <a:r>
+              <a:rPr sz="1100" b="0">
+                <a:solidFill>
+                  <a:srgbClr val="A0AEC0"/>
+                </a:solidFill>
+                <a:latin typeface="Aptos"/>
+              </a:rPr>
+              <a:t>Total sales differ by gender, but totals alone do not establish a statistically significant difference in average transaction value.</a:t>
+            </a:r>
+          </a:p>
+        </p:txBody>
+      </p:sp>
+      <p:sp>
+        <p:nvSpPr>
+          <p:cNvPr id="6" name="TextBox 5"/>
+          <p:cNvSpPr txBox="1"/>
+          <p:nvPr/>
+        </p:nvSpPr>
+        <p:spPr>
+          <a:xfrm>
+            <a:off x="594360" y="6473952"/>
+            <a:ext cx="5029200" cy="182880"/>
+          </a:xfrm>
+          <a:prstGeom prst="rect">
+            <a:avLst/>
+          </a:prstGeom>
+          <a:noFill/>
+        </p:spPr>
+        <p:txBody>
+          <a:bodyPr wrap="none" anchor="ctr">
+            <a:spAutoFit/>
+          </a:bodyPr>
+          <a:lstStyle/>
+          <a:p>
+            <a:pPr algn="l"/>
+            <a:r>
+              <a:rPr sz="800" b="1">
+                <a:solidFill>
+                  <a:srgbClr val="A0AEC0"/>
+                </a:solidFill>
+                <a:latin typeface="Aptos"/>
+              </a:rPr>
+              <a:t>APEXPLANET • DATA ANALYTICS INTERNSHIP</a:t>
+            </a:r>
+          </a:p>
+        </p:txBody>
+      </p:sp>
+      <p:sp>
+        <p:nvSpPr>
+          <p:cNvPr id="7" name="TextBox 6"/>
+          <p:cNvSpPr txBox="1"/>
+          <p:nvPr/>
+        </p:nvSpPr>
+        <p:spPr>
+          <a:xfrm>
+            <a:off x="11018520" y="6446520"/>
+            <a:ext cx="548640" cy="228600"/>
+          </a:xfrm>
+          <a:prstGeom prst="rect">
+            <a:avLst/>
+          </a:prstGeom>
+          <a:noFill/>
+        </p:spPr>
+        <p:txBody>
+          <a:bodyPr wrap="none" anchor="ctr">
+            <a:spAutoFit/>
+          </a:bodyPr>
+          <a:lstStyle/>
+          <a:p>
+            <a:pPr algn="r"/>
+            <a:r>
+              <a:rPr sz="900" b="1">
+                <a:solidFill>
+                  <a:srgbClr val="A0AEC0"/>
+                </a:solidFill>
+                <a:latin typeface="Aptos"/>
+              </a:rPr>
+              <a:t>03</a:t>
+            </a:r>
+          </a:p>
+        </p:txBody>
+      </p:sp>
+      <p:sp>
+        <p:nvSpPr>
+          <p:cNvPr id="8" name="Rounded Rectangle 7"/>
+          <p:cNvSpPr/>
+          <p:nvPr/>
+        </p:nvSpPr>
+        <p:spPr>
+          <a:xfrm>
+            <a:off x="685800" y="1874519"/>
+            <a:ext cx="3246120" cy="1508760"/>
+          </a:xfrm>
+          <a:prstGeom prst="roundRect">
+            <a:avLst/>
+          </a:prstGeom>
+          <a:solidFill>
+            <a:srgbClr val="18233A"/>
+          </a:solidFill>
+          <a:ln>
+            <a:solidFill>
+              <a:srgbClr val="374660"/>
+            </a:solidFill>
+          </a:ln>
+        </p:spPr>
+        <p:style>
+          <a:lnRef idx="1">
+            <a:schemeClr val="accent1"/>
+          </a:lnRef>
+          <a:fillRef idx="3">
+            <a:schemeClr val="accent1"/>
+          </a:fillRef>
+          <a:effectRef idx="2">
+            <a:schemeClr val="accent1"/>
+          </a:effectRef>
+          <a:fontRef idx="minor">
+            <a:schemeClr val="lt1"/>
+          </a:fontRef>
+        </p:style>
+        <p:txBody>
+          <a:bodyPr rtlCol="0" anchor="ctr"/>
+          <a:lstStyle/>
+          <a:p>
+            <a:pPr algn="ctr"/>
+          </a:p>
+        </p:txBody>
+      </p:sp>
+      <p:sp>
+        <p:nvSpPr>
+          <p:cNvPr id="9" name="TextBox 8"/>
+          <p:cNvSpPr txBox="1"/>
+          <p:nvPr/>
+        </p:nvSpPr>
+        <p:spPr>
+          <a:xfrm>
+            <a:off x="868680" y="2039112"/>
+            <a:ext cx="2880360" cy="438912"/>
+          </a:xfrm>
+          <a:prstGeom prst="rect">
+            <a:avLst/>
+          </a:prstGeom>
+          <a:noFill/>
+        </p:spPr>
+        <p:txBody>
+          <a:bodyPr wrap="none" anchor="ctr">
+            <a:spAutoFit/>
+          </a:bodyPr>
+          <a:lstStyle/>
+          <a:p>
+            <a:pPr algn="l"/>
+            <a:r>
+              <a:rPr sz="2300" b="1">
+                <a:solidFill>
+                  <a:srgbClr val="F8FAFC"/>
+                </a:solidFill>
+                <a:latin typeface="Aptos"/>
+              </a:rPr>
+              <a:t>₹72.46M</a:t>
+            </a:r>
+          </a:p>
+        </p:txBody>
+      </p:sp>
+      <p:sp>
+        <p:nvSpPr>
+          <p:cNvPr id="10" name="TextBox 9"/>
+          <p:cNvSpPr txBox="1"/>
+          <p:nvPr/>
+        </p:nvSpPr>
+        <p:spPr>
+          <a:xfrm>
+            <a:off x="868680" y="2587752"/>
+            <a:ext cx="2880360" cy="228600"/>
+          </a:xfrm>
+          <a:prstGeom prst="rect">
+            <a:avLst/>
+          </a:prstGeom>
+          <a:noFill/>
+        </p:spPr>
+        <p:txBody>
+          <a:bodyPr wrap="none" anchor="ctr">
+            <a:spAutoFit/>
+          </a:bodyPr>
+          <a:lstStyle/>
+          <a:p>
+            <a:pPr algn="l"/>
+            <a:r>
+              <a:rPr sz="800" b="1">
+                <a:solidFill>
+                  <a:srgbClr val="A0AEC0"/>
+                </a:solidFill>
+                <a:latin typeface="Aptos"/>
+              </a:rPr>
+              <a:t>MALE TOTAL SALES</a:t>
+            </a:r>
+          </a:p>
+        </p:txBody>
+      </p:sp>
+      <p:sp>
+        <p:nvSpPr>
+          <p:cNvPr id="11" name="Rectangle 10"/>
+          <p:cNvSpPr/>
+          <p:nvPr/>
+        </p:nvSpPr>
+        <p:spPr>
+          <a:xfrm>
+            <a:off x="685800" y="1874519"/>
+            <a:ext cx="50292" cy="1508760"/>
+          </a:xfrm>
+          <a:prstGeom prst="rect">
+            <a:avLst/>
+          </a:prstGeom>
+          <a:solidFill>
+            <a:srgbClr val="366EE6"/>
+          </a:solidFill>
+          <a:ln>
+            <a:noFill/>
+          </a:ln>
+        </p:spPr>
+        <p:style>
+          <a:lnRef idx="1">
+            <a:schemeClr val="accent1"/>
+          </a:lnRef>
+          <a:fillRef idx="3">
+            <a:schemeClr val="accent1"/>
+          </a:fillRef>
+          <a:effectRef idx="2">
+            <a:schemeClr val="accent1"/>
+          </a:effectRef>
+          <a:fontRef idx="minor">
+            <a:schemeClr val="lt1"/>
+          </a:fontRef>
+        </p:style>
+        <p:txBody>
+          <a:bodyPr rtlCol="0" anchor="ctr"/>
+          <a:lstStyle/>
+          <a:p>
+            <a:pPr algn="ctr"/>
+          </a:p>
+        </p:txBody>
+      </p:sp>
+      <p:sp>
+        <p:nvSpPr>
+          <p:cNvPr id="12" name="Rounded Rectangle 11"/>
+          <p:cNvSpPr/>
+          <p:nvPr/>
+        </p:nvSpPr>
+        <p:spPr>
+          <a:xfrm>
+            <a:off x="4480560" y="1874519"/>
+            <a:ext cx="3246120" cy="1508760"/>
+          </a:xfrm>
+          <a:prstGeom prst="roundRect">
+            <a:avLst/>
+          </a:prstGeom>
+          <a:solidFill>
+            <a:srgbClr val="18233A"/>
+          </a:solidFill>
+          <a:ln>
+            <a:solidFill>
+              <a:srgbClr val="374660"/>
+            </a:solidFill>
+          </a:ln>
+        </p:spPr>
+        <p:style>
+          <a:lnRef idx="1">
+            <a:schemeClr val="accent1"/>
+          </a:lnRef>
+          <a:fillRef idx="3">
+            <a:schemeClr val="accent1"/>
+          </a:fillRef>
+          <a:effectRef idx="2">
+            <a:schemeClr val="accent1"/>
+          </a:effectRef>
+          <a:fontRef idx="minor">
+            <a:schemeClr val="lt1"/>
+          </a:fontRef>
+        </p:style>
+        <p:txBody>
+          <a:bodyPr rtlCol="0" anchor="ctr"/>
+          <a:lstStyle/>
+          <a:p>
+            <a:pPr algn="ctr"/>
+          </a:p>
+        </p:txBody>
+      </p:sp>
+      <p:sp>
+        <p:nvSpPr>
+          <p:cNvPr id="13" name="TextBox 12"/>
+          <p:cNvSpPr txBox="1"/>
+          <p:nvPr/>
+        </p:nvSpPr>
+        <p:spPr>
+          <a:xfrm>
+            <a:off x="4663440" y="2039112"/>
+            <a:ext cx="2880360" cy="438912"/>
+          </a:xfrm>
+          <a:prstGeom prst="rect">
+            <a:avLst/>
+          </a:prstGeom>
+          <a:noFill/>
+        </p:spPr>
+        <p:txBody>
+          <a:bodyPr wrap="none" anchor="ctr">
+            <a:spAutoFit/>
+          </a:bodyPr>
+          <a:lstStyle/>
+          <a:p>
+            <a:pPr algn="l"/>
+            <a:r>
+              <a:rPr sz="2300" b="1">
+                <a:solidFill>
+                  <a:srgbClr val="F8FAFC"/>
+                </a:solidFill>
+                <a:latin typeface="Aptos"/>
+              </a:rPr>
+              <a:t>₹66.94M</a:t>
+            </a:r>
+          </a:p>
+        </p:txBody>
+      </p:sp>
+      <p:sp>
+        <p:nvSpPr>
+          <p:cNvPr id="14" name="TextBox 13"/>
+          <p:cNvSpPr txBox="1"/>
+          <p:nvPr/>
+        </p:nvSpPr>
+        <p:spPr>
+          <a:xfrm>
+            <a:off x="4663440" y="2587752"/>
+            <a:ext cx="2880360" cy="228600"/>
+          </a:xfrm>
+          <a:prstGeom prst="rect">
+            <a:avLst/>
+          </a:prstGeom>
+          <a:noFill/>
+        </p:spPr>
+        <p:txBody>
+          <a:bodyPr wrap="none" anchor="ctr">
+            <a:spAutoFit/>
+          </a:bodyPr>
+          <a:lstStyle/>
+          <a:p>
+            <a:pPr algn="l"/>
+            <a:r>
+              <a:rPr sz="800" b="1">
+                <a:solidFill>
+                  <a:srgbClr val="A0AEC0"/>
+                </a:solidFill>
+                <a:latin typeface="Aptos"/>
+              </a:rPr>
+              <a:t>FEMALE TOTAL SALES</a:t>
+            </a:r>
+          </a:p>
+        </p:txBody>
+      </p:sp>
+      <p:sp>
+        <p:nvSpPr>
+          <p:cNvPr id="15" name="Rectangle 14"/>
+          <p:cNvSpPr/>
+          <p:nvPr/>
+        </p:nvSpPr>
+        <p:spPr>
+          <a:xfrm>
+            <a:off x="4480560" y="1874519"/>
+            <a:ext cx="50292" cy="1508760"/>
+          </a:xfrm>
+          <a:prstGeom prst="rect">
+            <a:avLst/>
+          </a:prstGeom>
+          <a:solidFill>
+            <a:srgbClr val="26BED2"/>
+          </a:solidFill>
+          <a:ln>
+            <a:noFill/>
+          </a:ln>
+        </p:spPr>
+        <p:style>
+          <a:lnRef idx="1">
+            <a:schemeClr val="accent1"/>
+          </a:lnRef>
+          <a:fillRef idx="3">
+            <a:schemeClr val="accent1"/>
+          </a:fillRef>
+          <a:effectRef idx="2">
+            <a:schemeClr val="accent1"/>
+          </a:effectRef>
+          <a:fontRef idx="minor">
+            <a:schemeClr val="lt1"/>
+          </a:fontRef>
+        </p:style>
+        <p:txBody>
+          <a:bodyPr rtlCol="0" anchor="ctr"/>
+          <a:lstStyle/>
+          <a:p>
+            <a:pPr algn="ctr"/>
+          </a:p>
+        </p:txBody>
+      </p:sp>
+      <p:sp>
+        <p:nvSpPr>
+          <p:cNvPr id="16" name="Rounded Rectangle 15"/>
+          <p:cNvSpPr/>
+          <p:nvPr/>
+        </p:nvSpPr>
+        <p:spPr>
+          <a:xfrm>
+            <a:off x="8275320" y="1874519"/>
+            <a:ext cx="3246120" cy="1508760"/>
+          </a:xfrm>
+          <a:prstGeom prst="roundRect">
+            <a:avLst/>
+          </a:prstGeom>
+          <a:solidFill>
+            <a:srgbClr val="18233A"/>
+          </a:solidFill>
+          <a:ln>
+            <a:solidFill>
+              <a:srgbClr val="374660"/>
+            </a:solidFill>
+          </a:ln>
+        </p:spPr>
+        <p:style>
+          <a:lnRef idx="1">
+            <a:schemeClr val="accent1"/>
+          </a:lnRef>
+          <a:fillRef idx="3">
+            <a:schemeClr val="accent1"/>
+          </a:fillRef>
+          <a:effectRef idx="2">
+            <a:schemeClr val="accent1"/>
+          </a:effectRef>
+          <a:fontRef idx="minor">
+            <a:schemeClr val="lt1"/>
+          </a:fontRef>
+        </p:style>
+        <p:txBody>
+          <a:bodyPr rtlCol="0" anchor="ctr"/>
+          <a:lstStyle/>
+          <a:p>
+            <a:pPr algn="ctr"/>
+          </a:p>
+        </p:txBody>
+      </p:sp>
+      <p:sp>
+        <p:nvSpPr>
+          <p:cNvPr id="17" name="TextBox 16"/>
+          <p:cNvSpPr txBox="1"/>
+          <p:nvPr/>
+        </p:nvSpPr>
+        <p:spPr>
+          <a:xfrm>
+            <a:off x="8458200" y="2039112"/>
+            <a:ext cx="2880360" cy="438912"/>
+          </a:xfrm>
+          <a:prstGeom prst="rect">
+            <a:avLst/>
+          </a:prstGeom>
+          <a:noFill/>
+        </p:spPr>
+        <p:txBody>
+          <a:bodyPr wrap="none" anchor="ctr">
+            <a:spAutoFit/>
+          </a:bodyPr>
+          <a:lstStyle/>
+          <a:p>
+            <a:pPr algn="l"/>
+            <a:r>
+              <a:rPr sz="2300" b="1">
+                <a:solidFill>
+                  <a:srgbClr val="F8FAFC"/>
+                </a:solidFill>
+                <a:latin typeface="Aptos"/>
+              </a:rPr>
+              <a:t>₹5.53M</a:t>
+            </a:r>
+          </a:p>
+        </p:txBody>
+      </p:sp>
+      <p:sp>
+        <p:nvSpPr>
+          <p:cNvPr id="18" name="TextBox 17"/>
+          <p:cNvSpPr txBox="1"/>
+          <p:nvPr/>
+        </p:nvSpPr>
+        <p:spPr>
+          <a:xfrm>
+            <a:off x="8458200" y="2587752"/>
+            <a:ext cx="2880360" cy="228600"/>
+          </a:xfrm>
+          <a:prstGeom prst="rect">
+            <a:avLst/>
+          </a:prstGeom>
+          <a:noFill/>
+        </p:spPr>
+        <p:txBody>
+          <a:bodyPr wrap="none" anchor="ctr">
+            <a:spAutoFit/>
+          </a:bodyPr>
+          <a:lstStyle/>
+          <a:p>
+            <a:pPr algn="l"/>
+            <a:r>
+              <a:rPr sz="800" b="1">
+                <a:solidFill>
+                  <a:srgbClr val="A0AEC0"/>
+                </a:solidFill>
+                <a:latin typeface="Aptos"/>
+              </a:rPr>
+              <a:t>TOTAL SALES GAP</a:t>
+            </a:r>
+          </a:p>
+        </p:txBody>
+      </p:sp>
+      <p:sp>
+        <p:nvSpPr>
+          <p:cNvPr id="19" name="Rectangle 18"/>
+          <p:cNvSpPr/>
+          <p:nvPr/>
+        </p:nvSpPr>
+        <p:spPr>
+          <a:xfrm>
+            <a:off x="8275320" y="1874519"/>
+            <a:ext cx="50292" cy="1508760"/>
+          </a:xfrm>
+          <a:prstGeom prst="rect">
+            <a:avLst/>
+          </a:prstGeom>
+          <a:solidFill>
+            <a:srgbClr val="F5AA37"/>
+          </a:solidFill>
+          <a:ln>
+            <a:noFill/>
+          </a:ln>
+        </p:spPr>
+        <p:style>
+          <a:lnRef idx="1">
+            <a:schemeClr val="accent1"/>
+          </a:lnRef>
+          <a:fillRef idx="3">
+            <a:schemeClr val="accent1"/>
+          </a:fillRef>
+          <a:effectRef idx="2">
+            <a:schemeClr val="accent1"/>
+          </a:effectRef>
+          <a:fontRef idx="minor">
+            <a:schemeClr val="lt1"/>
+          </a:fontRef>
+        </p:style>
+        <p:txBody>
+          <a:bodyPr rtlCol="0" anchor="ctr"/>
+          <a:lstStyle/>
+          <a:p>
+            <a:pPr algn="ctr"/>
+          </a:p>
+        </p:txBody>
+      </p:sp>
+      <p:sp>
+        <p:nvSpPr>
+          <p:cNvPr id="20" name="TextBox 19"/>
+          <p:cNvSpPr txBox="1"/>
+          <p:nvPr/>
+        </p:nvSpPr>
+        <p:spPr>
+          <a:xfrm>
+            <a:off x="731520" y="4114800"/>
+            <a:ext cx="914400" cy="274320"/>
+          </a:xfrm>
+          <a:prstGeom prst="rect">
+            <a:avLst/>
+          </a:prstGeom>
+          <a:noFill/>
+        </p:spPr>
+        <p:txBody>
+          <a:bodyPr wrap="none" anchor="ctr">
+            <a:spAutoFit/>
+          </a:bodyPr>
+          <a:lstStyle/>
+          <a:p>
+            <a:pPr algn="l"/>
+            <a:r>
+              <a:rPr sz="1200" b="1">
+                <a:solidFill>
+                  <a:srgbClr val="DCE4F0"/>
+                </a:solidFill>
+                <a:latin typeface="Aptos"/>
+              </a:rPr>
+              <a:t>Male</a:t>
+            </a:r>
+          </a:p>
+        </p:txBody>
+      </p:sp>
+      <p:sp>
+        <p:nvSpPr>
+          <p:cNvPr id="21" name="Rounded Rectangle 20"/>
+          <p:cNvSpPr/>
+          <p:nvPr/>
+        </p:nvSpPr>
+        <p:spPr>
+          <a:xfrm>
+            <a:off x="1645920" y="4160520"/>
+            <a:ext cx="8686800" cy="310896"/>
+          </a:xfrm>
+          <a:prstGeom prst="roundRect">
+            <a:avLst/>
+          </a:prstGeom>
+          <a:solidFill>
+            <a:srgbClr val="366EE6"/>
+          </a:solidFill>
+          <a:ln>
+            <a:noFill/>
+          </a:ln>
+        </p:spPr>
+        <p:style>
+          <a:lnRef idx="1">
+            <a:schemeClr val="accent1"/>
+          </a:lnRef>
+          <a:fillRef idx="3">
+            <a:schemeClr val="accent1"/>
+          </a:fillRef>
+          <a:effectRef idx="2">
+            <a:schemeClr val="accent1"/>
+          </a:effectRef>
+          <a:fontRef idx="minor">
+            <a:schemeClr val="lt1"/>
+          </a:fontRef>
+        </p:style>
+        <p:txBody>
+          <a:bodyPr rtlCol="0" anchor="ctr"/>
+          <a:lstStyle/>
+          <a:p>
+            <a:pPr algn="ctr"/>
+          </a:p>
+        </p:txBody>
+      </p:sp>
+      <p:sp>
+        <p:nvSpPr>
+          <p:cNvPr id="22" name="TextBox 21"/>
+          <p:cNvSpPr txBox="1"/>
+          <p:nvPr/>
+        </p:nvSpPr>
+        <p:spPr>
+          <a:xfrm>
+            <a:off x="10424160" y="4105656"/>
+            <a:ext cx="1188720" cy="320040"/>
+          </a:xfrm>
+          <a:prstGeom prst="rect">
+            <a:avLst/>
+          </a:prstGeom>
+          <a:noFill/>
+        </p:spPr>
+        <p:txBody>
+          <a:bodyPr wrap="none" anchor="ctr">
+            <a:spAutoFit/>
+          </a:bodyPr>
+          <a:lstStyle/>
+          <a:p>
+            <a:pPr algn="l"/>
+            <a:r>
+              <a:rPr sz="1100" b="1">
+                <a:solidFill>
+                  <a:srgbClr val="F8FAFC"/>
+                </a:solidFill>
+                <a:latin typeface="Aptos"/>
+              </a:rPr>
+              <a:t>₹72.46M</a:t>
+            </a:r>
+          </a:p>
+        </p:txBody>
+      </p:sp>
+      <p:sp>
+        <p:nvSpPr>
+          <p:cNvPr id="23" name="TextBox 22"/>
+          <p:cNvSpPr txBox="1"/>
+          <p:nvPr/>
+        </p:nvSpPr>
+        <p:spPr>
+          <a:xfrm>
+            <a:off x="731520" y="4846320"/>
+            <a:ext cx="914400" cy="274320"/>
+          </a:xfrm>
+          <a:prstGeom prst="rect">
+            <a:avLst/>
+          </a:prstGeom>
+          <a:noFill/>
+        </p:spPr>
+        <p:txBody>
+          <a:bodyPr wrap="none" anchor="ctr">
+            <a:spAutoFit/>
+          </a:bodyPr>
+          <a:lstStyle/>
+          <a:p>
+            <a:pPr algn="l"/>
+            <a:r>
+              <a:rPr sz="1200" b="1">
+                <a:solidFill>
+                  <a:srgbClr val="DCE4F0"/>
+                </a:solidFill>
+                <a:latin typeface="Aptos"/>
+              </a:rPr>
+              <a:t>Female</a:t>
+            </a:r>
+          </a:p>
+        </p:txBody>
+      </p:sp>
+      <p:sp>
+        <p:nvSpPr>
+          <p:cNvPr id="24" name="Rounded Rectangle 23"/>
+          <p:cNvSpPr/>
+          <p:nvPr/>
+        </p:nvSpPr>
+        <p:spPr>
+          <a:xfrm>
+            <a:off x="1645920" y="4892040"/>
+            <a:ext cx="8024153" cy="310896"/>
+          </a:xfrm>
+          <a:prstGeom prst="roundRect">
+            <a:avLst/>
+          </a:prstGeom>
+          <a:solidFill>
+            <a:srgbClr val="26BED2"/>
+          </a:solidFill>
+          <a:ln>
+            <a:noFill/>
+          </a:ln>
+        </p:spPr>
+        <p:style>
+          <a:lnRef idx="1">
+            <a:schemeClr val="accent1"/>
+          </a:lnRef>
+          <a:fillRef idx="3">
+            <a:schemeClr val="accent1"/>
+          </a:fillRef>
+          <a:effectRef idx="2">
+            <a:schemeClr val="accent1"/>
+          </a:effectRef>
+          <a:fontRef idx="minor">
+            <a:schemeClr val="lt1"/>
+          </a:fontRef>
+        </p:style>
+        <p:txBody>
+          <a:bodyPr rtlCol="0" anchor="ctr"/>
+          <a:lstStyle/>
+          <a:p>
+            <a:pPr algn="ctr"/>
+          </a:p>
+        </p:txBody>
+      </p:sp>
+      <p:sp>
+        <p:nvSpPr>
+          <p:cNvPr id="25" name="TextBox 24"/>
+          <p:cNvSpPr txBox="1"/>
+          <p:nvPr/>
+        </p:nvSpPr>
+        <p:spPr>
+          <a:xfrm>
+            <a:off x="9761513" y="4837176"/>
+            <a:ext cx="1188720" cy="320040"/>
+          </a:xfrm>
+          <a:prstGeom prst="rect">
+            <a:avLst/>
+          </a:prstGeom>
+          <a:noFill/>
+        </p:spPr>
+        <p:txBody>
+          <a:bodyPr wrap="none" anchor="ctr">
+            <a:spAutoFit/>
+          </a:bodyPr>
+          <a:lstStyle/>
+          <a:p>
+            <a:pPr algn="l"/>
+            <a:r>
+              <a:rPr sz="1100" b="1">
+                <a:solidFill>
+                  <a:srgbClr val="F8FAFC"/>
+                </a:solidFill>
+                <a:latin typeface="Aptos"/>
+              </a:rPr>
+              <a:t>₹66.94M</a:t>
+            </a:r>
+          </a:p>
+        </p:txBody>
+      </p:sp>
+      <p:sp>
+        <p:nvSpPr>
+          <p:cNvPr id="26" name="TextBox 25"/>
+          <p:cNvSpPr txBox="1"/>
+          <p:nvPr/>
+        </p:nvSpPr>
+        <p:spPr>
+          <a:xfrm>
+            <a:off x="731520" y="5623560"/>
+            <a:ext cx="1188720" cy="228600"/>
+          </a:xfrm>
+          <a:prstGeom prst="rect">
+            <a:avLst/>
+          </a:prstGeom>
+          <a:noFill/>
+        </p:spPr>
+        <p:txBody>
+          <a:bodyPr wrap="none" anchor="ctr">
+            <a:spAutoFit/>
+          </a:bodyPr>
+          <a:lstStyle/>
+          <a:p>
+            <a:pPr algn="l"/>
+            <a:r>
+              <a:rPr sz="900" b="1">
+                <a:solidFill>
+                  <a:srgbClr val="26BED2"/>
+                </a:solidFill>
+                <a:latin typeface="Aptos"/>
+              </a:rPr>
+              <a:t>Key distinction</a:t>
+            </a:r>
+          </a:p>
+        </p:txBody>
+      </p:sp>
+      <p:sp>
+        <p:nvSpPr>
+          <p:cNvPr id="27" name="TextBox 26"/>
+          <p:cNvSpPr txBox="1"/>
+          <p:nvPr/>
+        </p:nvSpPr>
+        <p:spPr>
+          <a:xfrm>
+            <a:off x="1874519" y="5559552"/>
+            <a:ext cx="9235440" cy="384048"/>
+          </a:xfrm>
+          <a:prstGeom prst="rect">
+            <a:avLst/>
+          </a:prstGeom>
+          <a:noFill/>
+        </p:spPr>
+        <p:txBody>
+          <a:bodyPr wrap="none" anchor="ctr">
+            <a:spAutoFit/>
+          </a:bodyPr>
+          <a:lstStyle/>
+          <a:p>
+            <a:pPr algn="l"/>
+            <a:r>
+              <a:rPr sz="1300" b="0">
+                <a:solidFill>
+                  <a:srgbClr val="DCE4F0"/>
+                </a:solidFill>
+                <a:latin typeface="Aptos"/>
+              </a:rPr>
+              <a:t>A larger total does not automatically imply a statistically significant difference in means.</a:t>
             </a:r>
           </a:p>
         </p:txBody>
@@ -3496,32 +6977,44 @@
       <p:grpSpPr/>
       <p:sp>
         <p:nvSpPr>
-          <p:cNvPr id="2" name="TextBox 1"/>
-          <p:cNvSpPr txBox="1"/>
-          <p:nvPr/>
-        </p:nvSpPr>
-        <p:spPr>
-          <a:xfrm>
-            <a:off x="548640" y="320040"/>
-            <a:ext cx="10972800" cy="731520"/>
-          </a:xfrm>
-          <a:prstGeom prst="rect">
-            <a:avLst/>
-          </a:prstGeom>
-          <a:noFill/>
-        </p:spPr>
-        <p:txBody>
-          <a:bodyPr wrap="none">
-            <a:spAutoFit/>
-          </a:bodyPr>
-          <a:lstStyle/>
-          <a:p>
-            <a:pPr>
-              <a:defRPr sz="2800" b="1"/>
-            </a:pPr>
-            <a:r>
-              <a:t>Task 3 — Deep Dive &amp; Dashboard</a:t>
-            </a:r>
+          <p:cNvPr id="2" name="Rectangle 1"/>
+          <p:cNvSpPr/>
+          <p:nvPr/>
+        </p:nvSpPr>
+        <p:spPr>
+          <a:xfrm>
+            <a:off x="0" y="0"/>
+            <a:ext cx="12191695" cy="6858000"/>
+          </a:xfrm>
+          <a:prstGeom prst="rect">
+            <a:avLst/>
+          </a:prstGeom>
+          <a:solidFill>
+            <a:srgbClr val="0C1426"/>
+          </a:solidFill>
+          <a:ln>
+            <a:noFill/>
+          </a:ln>
+        </p:spPr>
+        <p:style>
+          <a:lnRef idx="1">
+            <a:schemeClr val="accent1"/>
+          </a:lnRef>
+          <a:fillRef idx="3">
+            <a:schemeClr val="accent1"/>
+          </a:fillRef>
+          <a:effectRef idx="2">
+            <a:schemeClr val="accent1"/>
+          </a:effectRef>
+          <a:fontRef idx="minor">
+            <a:schemeClr val="lt1"/>
+          </a:fontRef>
+        </p:style>
+        <p:txBody>
+          <a:bodyPr rtlCol="0" anchor="ctr"/>
+          <a:lstStyle/>
+          <a:p>
+            <a:pPr algn="ctr"/>
           </a:p>
         </p:txBody>
       </p:sp>
@@ -3533,62 +7026,960 @@
         </p:nvSpPr>
         <p:spPr>
           <a:xfrm>
-            <a:off x="731520" y="1463040"/>
-            <a:ext cx="10789920" cy="4754880"/>
-          </a:xfrm>
-          <a:prstGeom prst="rect">
-            <a:avLst/>
-          </a:prstGeom>
-          <a:noFill/>
-        </p:spPr>
-        <p:txBody>
-          <a:bodyPr wrap="none">
-            <a:spAutoFit/>
-          </a:bodyPr>
-          <a:lstStyle/>
-          <a:p>
-            <a:pPr>
-              <a:spcAft>
-                <a:spcPts val="1200"/>
-              </a:spcAft>
-              <a:defRPr sz="1800"/>
-            </a:pPr>
-            <a:r>
-              <a:t>Deep-dive area: Category and product performance</a:t>
-            </a:r>
-          </a:p>
-          <a:p>
-            <a:pPr>
-              <a:spcAft>
-                <a:spcPts val="1200"/>
-              </a:spcAft>
-              <a:defRPr sz="1800"/>
-            </a:pPr>
-            <a:r>
-              <a:t>Core KPIs: Total Sales, AOV, Transactions, Unique Customers, Units Sold</a:t>
-            </a:r>
-          </a:p>
-          <a:p>
-            <a:pPr>
-              <a:spcAft>
-                <a:spcPts val="1200"/>
-              </a:spcAft>
-              <a:defRPr sz="1800"/>
-            </a:pPr>
-            <a:r>
-              <a:t>Interactive HTML dashboard prepared with monthly, category and product views</a:t>
-            </a:r>
-          </a:p>
-          <a:p>
-            <a:pPr>
-              <a:spcAft>
-                <a:spcPts val="1200"/>
-              </a:spcAft>
-              <a:defRPr sz="1800"/>
-            </a:pPr>
-            <a:r>
-              <a:t>Recommended filters: date, category, product, city, gender</a:t>
-            </a:r>
+            <a:off x="594360" y="320040"/>
+            <a:ext cx="5486400" cy="274320"/>
+          </a:xfrm>
+          <a:prstGeom prst="rect">
+            <a:avLst/>
+          </a:prstGeom>
+          <a:noFill/>
+        </p:spPr>
+        <p:txBody>
+          <a:bodyPr wrap="none" anchor="ctr">
+            <a:spAutoFit/>
+          </a:bodyPr>
+          <a:lstStyle/>
+          <a:p>
+            <a:pPr algn="l"/>
+            <a:r>
+              <a:rPr sz="1000" b="1">
+                <a:solidFill>
+                  <a:srgbClr val="26BED2"/>
+                </a:solidFill>
+                <a:latin typeface="Aptos"/>
+              </a:rPr>
+              <a:t>HYPOTHESIS</a:t>
+            </a:r>
+          </a:p>
+        </p:txBody>
+      </p:sp>
+      <p:sp>
+        <p:nvSpPr>
+          <p:cNvPr id="4" name="TextBox 3"/>
+          <p:cNvSpPr txBox="1"/>
+          <p:nvPr/>
+        </p:nvSpPr>
+        <p:spPr>
+          <a:xfrm>
+            <a:off x="594360" y="658368"/>
+            <a:ext cx="10881360" cy="594360"/>
+          </a:xfrm>
+          <a:prstGeom prst="rect">
+            <a:avLst/>
+          </a:prstGeom>
+          <a:noFill/>
+        </p:spPr>
+        <p:txBody>
+          <a:bodyPr wrap="none" anchor="ctr">
+            <a:spAutoFit/>
+          </a:bodyPr>
+          <a:lstStyle/>
+          <a:p>
+            <a:pPr algn="l"/>
+            <a:r>
+              <a:rPr sz="2800" b="1">
+                <a:solidFill>
+                  <a:srgbClr val="F8FAFC"/>
+                </a:solidFill>
+                <a:latin typeface="Aptos"/>
+              </a:rPr>
+              <a:t>A testable business statement</a:t>
+            </a:r>
+          </a:p>
+        </p:txBody>
+      </p:sp>
+      <p:sp>
+        <p:nvSpPr>
+          <p:cNvPr id="5" name="TextBox 4"/>
+          <p:cNvSpPr txBox="1"/>
+          <p:nvPr/>
+        </p:nvSpPr>
+        <p:spPr>
+          <a:xfrm>
+            <a:off x="612648" y="1280160"/>
+            <a:ext cx="10698480" cy="365760"/>
+          </a:xfrm>
+          <a:prstGeom prst="rect">
+            <a:avLst/>
+          </a:prstGeom>
+          <a:noFill/>
+        </p:spPr>
+        <p:txBody>
+          <a:bodyPr wrap="none" anchor="ctr">
+            <a:spAutoFit/>
+          </a:bodyPr>
+          <a:lstStyle/>
+          <a:p>
+            <a:pPr algn="l"/>
+            <a:r>
+              <a:rPr sz="1100" b="0">
+                <a:solidFill>
+                  <a:srgbClr val="A0AEC0"/>
+                </a:solidFill>
+                <a:latin typeface="Aptos"/>
+              </a:rPr>
+              <a:t>The hypothesis is evaluated using transaction-level sales values.</a:t>
+            </a:r>
+          </a:p>
+        </p:txBody>
+      </p:sp>
+      <p:sp>
+        <p:nvSpPr>
+          <p:cNvPr id="6" name="TextBox 5"/>
+          <p:cNvSpPr txBox="1"/>
+          <p:nvPr/>
+        </p:nvSpPr>
+        <p:spPr>
+          <a:xfrm>
+            <a:off x="594360" y="6473952"/>
+            <a:ext cx="5029200" cy="182880"/>
+          </a:xfrm>
+          <a:prstGeom prst="rect">
+            <a:avLst/>
+          </a:prstGeom>
+          <a:noFill/>
+        </p:spPr>
+        <p:txBody>
+          <a:bodyPr wrap="none" anchor="ctr">
+            <a:spAutoFit/>
+          </a:bodyPr>
+          <a:lstStyle/>
+          <a:p>
+            <a:pPr algn="l"/>
+            <a:r>
+              <a:rPr sz="800" b="1">
+                <a:solidFill>
+                  <a:srgbClr val="A0AEC0"/>
+                </a:solidFill>
+                <a:latin typeface="Aptos"/>
+              </a:rPr>
+              <a:t>APEXPLANET • DATA ANALYTICS INTERNSHIP</a:t>
+            </a:r>
+          </a:p>
+        </p:txBody>
+      </p:sp>
+      <p:sp>
+        <p:nvSpPr>
+          <p:cNvPr id="7" name="TextBox 6"/>
+          <p:cNvSpPr txBox="1"/>
+          <p:nvPr/>
+        </p:nvSpPr>
+        <p:spPr>
+          <a:xfrm>
+            <a:off x="11018520" y="6446520"/>
+            <a:ext cx="548640" cy="228600"/>
+          </a:xfrm>
+          <a:prstGeom prst="rect">
+            <a:avLst/>
+          </a:prstGeom>
+          <a:noFill/>
+        </p:spPr>
+        <p:txBody>
+          <a:bodyPr wrap="none" anchor="ctr">
+            <a:spAutoFit/>
+          </a:bodyPr>
+          <a:lstStyle/>
+          <a:p>
+            <a:pPr algn="r"/>
+            <a:r>
+              <a:rPr sz="900" b="1">
+                <a:solidFill>
+                  <a:srgbClr val="A0AEC0"/>
+                </a:solidFill>
+                <a:latin typeface="Aptos"/>
+              </a:rPr>
+              <a:t>04</a:t>
+            </a:r>
+          </a:p>
+        </p:txBody>
+      </p:sp>
+      <p:sp>
+        <p:nvSpPr>
+          <p:cNvPr id="8" name="Rounded Rectangle 7"/>
+          <p:cNvSpPr/>
+          <p:nvPr/>
+        </p:nvSpPr>
+        <p:spPr>
+          <a:xfrm>
+            <a:off x="685800" y="1828800"/>
+            <a:ext cx="5303520" cy="1874519"/>
+          </a:xfrm>
+          <a:prstGeom prst="roundRect">
+            <a:avLst/>
+          </a:prstGeom>
+          <a:solidFill>
+            <a:srgbClr val="18233A"/>
+          </a:solidFill>
+          <a:ln>
+            <a:solidFill>
+              <a:srgbClr val="374660"/>
+            </a:solidFill>
+          </a:ln>
+        </p:spPr>
+        <p:style>
+          <a:lnRef idx="1">
+            <a:schemeClr val="accent1"/>
+          </a:lnRef>
+          <a:fillRef idx="3">
+            <a:schemeClr val="accent1"/>
+          </a:fillRef>
+          <a:effectRef idx="2">
+            <a:schemeClr val="accent1"/>
+          </a:effectRef>
+          <a:fontRef idx="minor">
+            <a:schemeClr val="lt1"/>
+          </a:fontRef>
+        </p:style>
+        <p:txBody>
+          <a:bodyPr rtlCol="0" anchor="ctr"/>
+          <a:lstStyle/>
+          <a:p>
+            <a:pPr algn="ctr"/>
+          </a:p>
+        </p:txBody>
+      </p:sp>
+      <p:sp>
+        <p:nvSpPr>
+          <p:cNvPr id="9" name="TextBox 8"/>
+          <p:cNvSpPr txBox="1"/>
+          <p:nvPr/>
+        </p:nvSpPr>
+        <p:spPr>
+          <a:xfrm>
+            <a:off x="868680" y="1993392"/>
+            <a:ext cx="4937759" cy="438912"/>
+          </a:xfrm>
+          <a:prstGeom prst="rect">
+            <a:avLst/>
+          </a:prstGeom>
+          <a:noFill/>
+        </p:spPr>
+        <p:txBody>
+          <a:bodyPr wrap="none" anchor="ctr">
+            <a:spAutoFit/>
+          </a:bodyPr>
+          <a:lstStyle/>
+          <a:p>
+            <a:pPr algn="l"/>
+            <a:r>
+              <a:rPr sz="2900" b="1">
+                <a:solidFill>
+                  <a:srgbClr val="F8FAFC"/>
+                </a:solidFill>
+                <a:latin typeface="Aptos"/>
+              </a:rPr>
+              <a:t>H₀</a:t>
+            </a:r>
+          </a:p>
+        </p:txBody>
+      </p:sp>
+      <p:sp>
+        <p:nvSpPr>
+          <p:cNvPr id="10" name="TextBox 9"/>
+          <p:cNvSpPr txBox="1"/>
+          <p:nvPr/>
+        </p:nvSpPr>
+        <p:spPr>
+          <a:xfrm>
+            <a:off x="868680" y="2542032"/>
+            <a:ext cx="4937759" cy="228600"/>
+          </a:xfrm>
+          <a:prstGeom prst="rect">
+            <a:avLst/>
+          </a:prstGeom>
+          <a:noFill/>
+        </p:spPr>
+        <p:txBody>
+          <a:bodyPr wrap="none" anchor="ctr">
+            <a:spAutoFit/>
+          </a:bodyPr>
+          <a:lstStyle/>
+          <a:p>
+            <a:pPr algn="l"/>
+            <a:r>
+              <a:rPr sz="800" b="1">
+                <a:solidFill>
+                  <a:srgbClr val="A0AEC0"/>
+                </a:solidFill>
+                <a:latin typeface="Aptos"/>
+              </a:rPr>
+              <a:t>FEMALE AND MALE MEAN TRANSACTION SALES ARE EQUAL</a:t>
+            </a:r>
+          </a:p>
+        </p:txBody>
+      </p:sp>
+      <p:sp>
+        <p:nvSpPr>
+          <p:cNvPr id="11" name="Rectangle 10"/>
+          <p:cNvSpPr/>
+          <p:nvPr/>
+        </p:nvSpPr>
+        <p:spPr>
+          <a:xfrm>
+            <a:off x="685800" y="1828800"/>
+            <a:ext cx="50292" cy="1874519"/>
+          </a:xfrm>
+          <a:prstGeom prst="rect">
+            <a:avLst/>
+          </a:prstGeom>
+          <a:solidFill>
+            <a:srgbClr val="366EE6"/>
+          </a:solidFill>
+          <a:ln>
+            <a:noFill/>
+          </a:ln>
+        </p:spPr>
+        <p:style>
+          <a:lnRef idx="1">
+            <a:schemeClr val="accent1"/>
+          </a:lnRef>
+          <a:fillRef idx="3">
+            <a:schemeClr val="accent1"/>
+          </a:fillRef>
+          <a:effectRef idx="2">
+            <a:schemeClr val="accent1"/>
+          </a:effectRef>
+          <a:fontRef idx="minor">
+            <a:schemeClr val="lt1"/>
+          </a:fontRef>
+        </p:style>
+        <p:txBody>
+          <a:bodyPr rtlCol="0" anchor="ctr"/>
+          <a:lstStyle/>
+          <a:p>
+            <a:pPr algn="ctr"/>
+          </a:p>
+        </p:txBody>
+      </p:sp>
+      <p:sp>
+        <p:nvSpPr>
+          <p:cNvPr id="12" name="Rounded Rectangle 11"/>
+          <p:cNvSpPr/>
+          <p:nvPr/>
+        </p:nvSpPr>
+        <p:spPr>
+          <a:xfrm>
+            <a:off x="6217920" y="1828800"/>
+            <a:ext cx="5303520" cy="1874519"/>
+          </a:xfrm>
+          <a:prstGeom prst="roundRect">
+            <a:avLst/>
+          </a:prstGeom>
+          <a:solidFill>
+            <a:srgbClr val="18233A"/>
+          </a:solidFill>
+          <a:ln>
+            <a:solidFill>
+              <a:srgbClr val="374660"/>
+            </a:solidFill>
+          </a:ln>
+        </p:spPr>
+        <p:style>
+          <a:lnRef idx="1">
+            <a:schemeClr val="accent1"/>
+          </a:lnRef>
+          <a:fillRef idx="3">
+            <a:schemeClr val="accent1"/>
+          </a:fillRef>
+          <a:effectRef idx="2">
+            <a:schemeClr val="accent1"/>
+          </a:effectRef>
+          <a:fontRef idx="minor">
+            <a:schemeClr val="lt1"/>
+          </a:fontRef>
+        </p:style>
+        <p:txBody>
+          <a:bodyPr rtlCol="0" anchor="ctr"/>
+          <a:lstStyle/>
+          <a:p>
+            <a:pPr algn="ctr"/>
+          </a:p>
+        </p:txBody>
+      </p:sp>
+      <p:sp>
+        <p:nvSpPr>
+          <p:cNvPr id="13" name="TextBox 12"/>
+          <p:cNvSpPr txBox="1"/>
+          <p:nvPr/>
+        </p:nvSpPr>
+        <p:spPr>
+          <a:xfrm>
+            <a:off x="6400800" y="1993392"/>
+            <a:ext cx="4937759" cy="438912"/>
+          </a:xfrm>
+          <a:prstGeom prst="rect">
+            <a:avLst/>
+          </a:prstGeom>
+          <a:noFill/>
+        </p:spPr>
+        <p:txBody>
+          <a:bodyPr wrap="none" anchor="ctr">
+            <a:spAutoFit/>
+          </a:bodyPr>
+          <a:lstStyle/>
+          <a:p>
+            <a:pPr algn="l"/>
+            <a:r>
+              <a:rPr sz="2900" b="1">
+                <a:solidFill>
+                  <a:srgbClr val="F8FAFC"/>
+                </a:solidFill>
+                <a:latin typeface="Aptos"/>
+              </a:rPr>
+              <a:t>H₁</a:t>
+            </a:r>
+          </a:p>
+        </p:txBody>
+      </p:sp>
+      <p:sp>
+        <p:nvSpPr>
+          <p:cNvPr id="14" name="TextBox 13"/>
+          <p:cNvSpPr txBox="1"/>
+          <p:nvPr/>
+        </p:nvSpPr>
+        <p:spPr>
+          <a:xfrm>
+            <a:off x="6400800" y="2542032"/>
+            <a:ext cx="4937759" cy="228600"/>
+          </a:xfrm>
+          <a:prstGeom prst="rect">
+            <a:avLst/>
+          </a:prstGeom>
+          <a:noFill/>
+        </p:spPr>
+        <p:txBody>
+          <a:bodyPr wrap="none" anchor="ctr">
+            <a:spAutoFit/>
+          </a:bodyPr>
+          <a:lstStyle/>
+          <a:p>
+            <a:pPr algn="l"/>
+            <a:r>
+              <a:rPr sz="800" b="1">
+                <a:solidFill>
+                  <a:srgbClr val="A0AEC0"/>
+                </a:solidFill>
+                <a:latin typeface="Aptos"/>
+              </a:rPr>
+              <a:t>FEMALE AND MALE MEAN TRANSACTION SALES ARE DIFFERENT</a:t>
+            </a:r>
+          </a:p>
+        </p:txBody>
+      </p:sp>
+      <p:sp>
+        <p:nvSpPr>
+          <p:cNvPr id="15" name="Rectangle 14"/>
+          <p:cNvSpPr/>
+          <p:nvPr/>
+        </p:nvSpPr>
+        <p:spPr>
+          <a:xfrm>
+            <a:off x="6217920" y="1828800"/>
+            <a:ext cx="50292" cy="1874519"/>
+          </a:xfrm>
+          <a:prstGeom prst="rect">
+            <a:avLst/>
+          </a:prstGeom>
+          <a:solidFill>
+            <a:srgbClr val="26BED2"/>
+          </a:solidFill>
+          <a:ln>
+            <a:noFill/>
+          </a:ln>
+        </p:spPr>
+        <p:style>
+          <a:lnRef idx="1">
+            <a:schemeClr val="accent1"/>
+          </a:lnRef>
+          <a:fillRef idx="3">
+            <a:schemeClr val="accent1"/>
+          </a:fillRef>
+          <a:effectRef idx="2">
+            <a:schemeClr val="accent1"/>
+          </a:effectRef>
+          <a:fontRef idx="minor">
+            <a:schemeClr val="lt1"/>
+          </a:fontRef>
+        </p:style>
+        <p:txBody>
+          <a:bodyPr rtlCol="0" anchor="ctr"/>
+          <a:lstStyle/>
+          <a:p>
+            <a:pPr algn="ctr"/>
+          </a:p>
+        </p:txBody>
+      </p:sp>
+      <p:sp>
+        <p:nvSpPr>
+          <p:cNvPr id="16" name="Rounded Rectangle 15"/>
+          <p:cNvSpPr/>
+          <p:nvPr/>
+        </p:nvSpPr>
+        <p:spPr>
+          <a:xfrm>
+            <a:off x="685800" y="4160520"/>
+            <a:ext cx="3383280" cy="1234440"/>
+          </a:xfrm>
+          <a:prstGeom prst="roundRect">
+            <a:avLst/>
+          </a:prstGeom>
+          <a:solidFill>
+            <a:srgbClr val="18233A"/>
+          </a:solidFill>
+          <a:ln>
+            <a:solidFill>
+              <a:srgbClr val="374660"/>
+            </a:solidFill>
+          </a:ln>
+        </p:spPr>
+        <p:style>
+          <a:lnRef idx="1">
+            <a:schemeClr val="accent1"/>
+          </a:lnRef>
+          <a:fillRef idx="3">
+            <a:schemeClr val="accent1"/>
+          </a:fillRef>
+          <a:effectRef idx="2">
+            <a:schemeClr val="accent1"/>
+          </a:effectRef>
+          <a:fontRef idx="minor">
+            <a:schemeClr val="lt1"/>
+          </a:fontRef>
+        </p:style>
+        <p:txBody>
+          <a:bodyPr rtlCol="0" anchor="ctr"/>
+          <a:lstStyle/>
+          <a:p>
+            <a:pPr algn="ctr"/>
+          </a:p>
+        </p:txBody>
+      </p:sp>
+      <p:sp>
+        <p:nvSpPr>
+          <p:cNvPr id="17" name="TextBox 16"/>
+          <p:cNvSpPr txBox="1"/>
+          <p:nvPr/>
+        </p:nvSpPr>
+        <p:spPr>
+          <a:xfrm>
+            <a:off x="868680" y="4325112"/>
+            <a:ext cx="3017520" cy="438912"/>
+          </a:xfrm>
+          <a:prstGeom prst="rect">
+            <a:avLst/>
+          </a:prstGeom>
+          <a:noFill/>
+        </p:spPr>
+        <p:txBody>
+          <a:bodyPr wrap="none" anchor="ctr">
+            <a:spAutoFit/>
+          </a:bodyPr>
+          <a:lstStyle/>
+          <a:p>
+            <a:pPr algn="l"/>
+            <a:r>
+              <a:rPr sz="2500" b="1">
+                <a:solidFill>
+                  <a:srgbClr val="F8FAFC"/>
+                </a:solidFill>
+                <a:latin typeface="Aptos"/>
+              </a:rPr>
+              <a:t>0.05</a:t>
+            </a:r>
+          </a:p>
+        </p:txBody>
+      </p:sp>
+      <p:sp>
+        <p:nvSpPr>
+          <p:cNvPr id="18" name="TextBox 17"/>
+          <p:cNvSpPr txBox="1"/>
+          <p:nvPr/>
+        </p:nvSpPr>
+        <p:spPr>
+          <a:xfrm>
+            <a:off x="868680" y="4873752"/>
+            <a:ext cx="3017520" cy="228600"/>
+          </a:xfrm>
+          <a:prstGeom prst="rect">
+            <a:avLst/>
+          </a:prstGeom>
+          <a:noFill/>
+        </p:spPr>
+        <p:txBody>
+          <a:bodyPr wrap="none" anchor="ctr">
+            <a:spAutoFit/>
+          </a:bodyPr>
+          <a:lstStyle/>
+          <a:p>
+            <a:pPr algn="l"/>
+            <a:r>
+              <a:rPr sz="800" b="1">
+                <a:solidFill>
+                  <a:srgbClr val="A0AEC0"/>
+                </a:solidFill>
+                <a:latin typeface="Aptos"/>
+              </a:rPr>
+              <a:t>SIGNIFICANCE LEVEL Α</a:t>
+            </a:r>
+          </a:p>
+        </p:txBody>
+      </p:sp>
+      <p:sp>
+        <p:nvSpPr>
+          <p:cNvPr id="19" name="Rectangle 18"/>
+          <p:cNvSpPr/>
+          <p:nvPr/>
+        </p:nvSpPr>
+        <p:spPr>
+          <a:xfrm>
+            <a:off x="685800" y="4160520"/>
+            <a:ext cx="50292" cy="1234440"/>
+          </a:xfrm>
+          <a:prstGeom prst="rect">
+            <a:avLst/>
+          </a:prstGeom>
+          <a:solidFill>
+            <a:srgbClr val="F5AA37"/>
+          </a:solidFill>
+          <a:ln>
+            <a:noFill/>
+          </a:ln>
+        </p:spPr>
+        <p:style>
+          <a:lnRef idx="1">
+            <a:schemeClr val="accent1"/>
+          </a:lnRef>
+          <a:fillRef idx="3">
+            <a:schemeClr val="accent1"/>
+          </a:fillRef>
+          <a:effectRef idx="2">
+            <a:schemeClr val="accent1"/>
+          </a:effectRef>
+          <a:fontRef idx="minor">
+            <a:schemeClr val="lt1"/>
+          </a:fontRef>
+        </p:style>
+        <p:txBody>
+          <a:bodyPr rtlCol="0" anchor="ctr"/>
+          <a:lstStyle/>
+          <a:p>
+            <a:pPr algn="ctr"/>
+          </a:p>
+        </p:txBody>
+      </p:sp>
+      <p:sp>
+        <p:nvSpPr>
+          <p:cNvPr id="20" name="Rounded Rectangle 19"/>
+          <p:cNvSpPr/>
+          <p:nvPr/>
+        </p:nvSpPr>
+        <p:spPr>
+          <a:xfrm>
+            <a:off x="4407408" y="4160520"/>
+            <a:ext cx="3383280" cy="1234440"/>
+          </a:xfrm>
+          <a:prstGeom prst="roundRect">
+            <a:avLst/>
+          </a:prstGeom>
+          <a:solidFill>
+            <a:srgbClr val="18233A"/>
+          </a:solidFill>
+          <a:ln>
+            <a:solidFill>
+              <a:srgbClr val="374660"/>
+            </a:solidFill>
+          </a:ln>
+        </p:spPr>
+        <p:style>
+          <a:lnRef idx="1">
+            <a:schemeClr val="accent1"/>
+          </a:lnRef>
+          <a:fillRef idx="3">
+            <a:schemeClr val="accent1"/>
+          </a:fillRef>
+          <a:effectRef idx="2">
+            <a:schemeClr val="accent1"/>
+          </a:effectRef>
+          <a:fontRef idx="minor">
+            <a:schemeClr val="lt1"/>
+          </a:fontRef>
+        </p:style>
+        <p:txBody>
+          <a:bodyPr rtlCol="0" anchor="ctr"/>
+          <a:lstStyle/>
+          <a:p>
+            <a:pPr algn="ctr"/>
+          </a:p>
+        </p:txBody>
+      </p:sp>
+      <p:sp>
+        <p:nvSpPr>
+          <p:cNvPr id="21" name="TextBox 20"/>
+          <p:cNvSpPr txBox="1"/>
+          <p:nvPr/>
+        </p:nvSpPr>
+        <p:spPr>
+          <a:xfrm>
+            <a:off x="4590288" y="4325112"/>
+            <a:ext cx="3017520" cy="438912"/>
+          </a:xfrm>
+          <a:prstGeom prst="rect">
+            <a:avLst/>
+          </a:prstGeom>
+          <a:noFill/>
+        </p:spPr>
+        <p:txBody>
+          <a:bodyPr wrap="none" anchor="ctr">
+            <a:spAutoFit/>
+          </a:bodyPr>
+          <a:lstStyle/>
+          <a:p>
+            <a:pPr algn="l"/>
+            <a:r>
+              <a:rPr sz="2000" b="1">
+                <a:solidFill>
+                  <a:srgbClr val="F8FAFC"/>
+                </a:solidFill>
+                <a:latin typeface="Aptos"/>
+              </a:rPr>
+              <a:t>TWO-SIDED</a:t>
+            </a:r>
+          </a:p>
+        </p:txBody>
+      </p:sp>
+      <p:sp>
+        <p:nvSpPr>
+          <p:cNvPr id="22" name="TextBox 21"/>
+          <p:cNvSpPr txBox="1"/>
+          <p:nvPr/>
+        </p:nvSpPr>
+        <p:spPr>
+          <a:xfrm>
+            <a:off x="4590288" y="4873752"/>
+            <a:ext cx="3017520" cy="228600"/>
+          </a:xfrm>
+          <a:prstGeom prst="rect">
+            <a:avLst/>
+          </a:prstGeom>
+          <a:noFill/>
+        </p:spPr>
+        <p:txBody>
+          <a:bodyPr wrap="none" anchor="ctr">
+            <a:spAutoFit/>
+          </a:bodyPr>
+          <a:lstStyle/>
+          <a:p>
+            <a:pPr algn="l"/>
+            <a:r>
+              <a:rPr sz="800" b="1">
+                <a:solidFill>
+                  <a:srgbClr val="A0AEC0"/>
+                </a:solidFill>
+                <a:latin typeface="Aptos"/>
+              </a:rPr>
+              <a:t>TEST DIRECTION</a:t>
+            </a:r>
+          </a:p>
+        </p:txBody>
+      </p:sp>
+      <p:sp>
+        <p:nvSpPr>
+          <p:cNvPr id="23" name="Rectangle 22"/>
+          <p:cNvSpPr/>
+          <p:nvPr/>
+        </p:nvSpPr>
+        <p:spPr>
+          <a:xfrm>
+            <a:off x="4407408" y="4160520"/>
+            <a:ext cx="50292" cy="1234440"/>
+          </a:xfrm>
+          <a:prstGeom prst="rect">
+            <a:avLst/>
+          </a:prstGeom>
+          <a:solidFill>
+            <a:srgbClr val="28BE87"/>
+          </a:solidFill>
+          <a:ln>
+            <a:noFill/>
+          </a:ln>
+        </p:spPr>
+        <p:style>
+          <a:lnRef idx="1">
+            <a:schemeClr val="accent1"/>
+          </a:lnRef>
+          <a:fillRef idx="3">
+            <a:schemeClr val="accent1"/>
+          </a:fillRef>
+          <a:effectRef idx="2">
+            <a:schemeClr val="accent1"/>
+          </a:effectRef>
+          <a:fontRef idx="minor">
+            <a:schemeClr val="lt1"/>
+          </a:fontRef>
+        </p:style>
+        <p:txBody>
+          <a:bodyPr rtlCol="0" anchor="ctr"/>
+          <a:lstStyle/>
+          <a:p>
+            <a:pPr algn="ctr"/>
+          </a:p>
+        </p:txBody>
+      </p:sp>
+      <p:sp>
+        <p:nvSpPr>
+          <p:cNvPr id="24" name="Rounded Rectangle 23"/>
+          <p:cNvSpPr/>
+          <p:nvPr/>
+        </p:nvSpPr>
+        <p:spPr>
+          <a:xfrm>
+            <a:off x="8138160" y="4160520"/>
+            <a:ext cx="3383280" cy="1234440"/>
+          </a:xfrm>
+          <a:prstGeom prst="roundRect">
+            <a:avLst/>
+          </a:prstGeom>
+          <a:solidFill>
+            <a:srgbClr val="18233A"/>
+          </a:solidFill>
+          <a:ln>
+            <a:solidFill>
+              <a:srgbClr val="374660"/>
+            </a:solidFill>
+          </a:ln>
+        </p:spPr>
+        <p:style>
+          <a:lnRef idx="1">
+            <a:schemeClr val="accent1"/>
+          </a:lnRef>
+          <a:fillRef idx="3">
+            <a:schemeClr val="accent1"/>
+          </a:fillRef>
+          <a:effectRef idx="2">
+            <a:schemeClr val="accent1"/>
+          </a:effectRef>
+          <a:fontRef idx="minor">
+            <a:schemeClr val="lt1"/>
+          </a:fontRef>
+        </p:style>
+        <p:txBody>
+          <a:bodyPr rtlCol="0" anchor="ctr"/>
+          <a:lstStyle/>
+          <a:p>
+            <a:pPr algn="ctr"/>
+          </a:p>
+        </p:txBody>
+      </p:sp>
+      <p:sp>
+        <p:nvSpPr>
+          <p:cNvPr id="25" name="TextBox 24"/>
+          <p:cNvSpPr txBox="1"/>
+          <p:nvPr/>
+        </p:nvSpPr>
+        <p:spPr>
+          <a:xfrm>
+            <a:off x="8321040" y="4325112"/>
+            <a:ext cx="3017520" cy="438912"/>
+          </a:xfrm>
+          <a:prstGeom prst="rect">
+            <a:avLst/>
+          </a:prstGeom>
+          <a:noFill/>
+        </p:spPr>
+        <p:txBody>
+          <a:bodyPr wrap="none" anchor="ctr">
+            <a:spAutoFit/>
+          </a:bodyPr>
+          <a:lstStyle/>
+          <a:p>
+            <a:pPr algn="l"/>
+            <a:r>
+              <a:rPr sz="2100" b="1">
+                <a:solidFill>
+                  <a:srgbClr val="F8FAFC"/>
+                </a:solidFill>
+                <a:latin typeface="Aptos"/>
+              </a:rPr>
+              <a:t>WELCH</a:t>
+            </a:r>
+          </a:p>
+        </p:txBody>
+      </p:sp>
+      <p:sp>
+        <p:nvSpPr>
+          <p:cNvPr id="26" name="TextBox 25"/>
+          <p:cNvSpPr txBox="1"/>
+          <p:nvPr/>
+        </p:nvSpPr>
+        <p:spPr>
+          <a:xfrm>
+            <a:off x="8321040" y="4873752"/>
+            <a:ext cx="3017520" cy="228600"/>
+          </a:xfrm>
+          <a:prstGeom prst="rect">
+            <a:avLst/>
+          </a:prstGeom>
+          <a:noFill/>
+        </p:spPr>
+        <p:txBody>
+          <a:bodyPr wrap="none" anchor="ctr">
+            <a:spAutoFit/>
+          </a:bodyPr>
+          <a:lstStyle/>
+          <a:p>
+            <a:pPr algn="l"/>
+            <a:r>
+              <a:rPr sz="800" b="1">
+                <a:solidFill>
+                  <a:srgbClr val="A0AEC0"/>
+                </a:solidFill>
+                <a:latin typeface="Aptos"/>
+              </a:rPr>
+              <a:t>INDEPENDENT T-TEST</a:t>
+            </a:r>
+          </a:p>
+        </p:txBody>
+      </p:sp>
+      <p:sp>
+        <p:nvSpPr>
+          <p:cNvPr id="27" name="Rectangle 26"/>
+          <p:cNvSpPr/>
+          <p:nvPr/>
+        </p:nvSpPr>
+        <p:spPr>
+          <a:xfrm>
+            <a:off x="8138160" y="4160520"/>
+            <a:ext cx="50292" cy="1234440"/>
+          </a:xfrm>
+          <a:prstGeom prst="rect">
+            <a:avLst/>
+          </a:prstGeom>
+          <a:solidFill>
+            <a:srgbClr val="366EE6"/>
+          </a:solidFill>
+          <a:ln>
+            <a:noFill/>
+          </a:ln>
+        </p:spPr>
+        <p:style>
+          <a:lnRef idx="1">
+            <a:schemeClr val="accent1"/>
+          </a:lnRef>
+          <a:fillRef idx="3">
+            <a:schemeClr val="accent1"/>
+          </a:fillRef>
+          <a:effectRef idx="2">
+            <a:schemeClr val="accent1"/>
+          </a:effectRef>
+          <a:fontRef idx="minor">
+            <a:schemeClr val="lt1"/>
+          </a:fontRef>
+        </p:style>
+        <p:txBody>
+          <a:bodyPr rtlCol="0" anchor="ctr"/>
+          <a:lstStyle/>
+          <a:p>
+            <a:pPr algn="ctr"/>
           </a:p>
         </p:txBody>
       </p:sp>
@@ -3612,32 +8003,44 @@
       <p:grpSpPr/>
       <p:sp>
         <p:nvSpPr>
-          <p:cNvPr id="2" name="TextBox 1"/>
-          <p:cNvSpPr txBox="1"/>
-          <p:nvPr/>
-        </p:nvSpPr>
-        <p:spPr>
-          <a:xfrm>
-            <a:off x="548640" y="320040"/>
-            <a:ext cx="10972800" cy="731520"/>
-          </a:xfrm>
-          <a:prstGeom prst="rect">
-            <a:avLst/>
-          </a:prstGeom>
-          <a:noFill/>
-        </p:spPr>
-        <p:txBody>
-          <a:bodyPr wrap="none">
-            <a:spAutoFit/>
-          </a:bodyPr>
-          <a:lstStyle/>
-          <a:p>
-            <a:pPr>
-              <a:defRPr sz="2800" b="1"/>
-            </a:pPr>
-            <a:r>
-              <a:t>Task 4 — Statistical Validation</a:t>
-            </a:r>
+          <p:cNvPr id="2" name="Rectangle 1"/>
+          <p:cNvSpPr/>
+          <p:nvPr/>
+        </p:nvSpPr>
+        <p:spPr>
+          <a:xfrm>
+            <a:off x="0" y="0"/>
+            <a:ext cx="12191695" cy="6858000"/>
+          </a:xfrm>
+          <a:prstGeom prst="rect">
+            <a:avLst/>
+          </a:prstGeom>
+          <a:solidFill>
+            <a:srgbClr val="0C1426"/>
+          </a:solidFill>
+          <a:ln>
+            <a:noFill/>
+          </a:ln>
+        </p:spPr>
+        <p:style>
+          <a:lnRef idx="1">
+            <a:schemeClr val="accent1"/>
+          </a:lnRef>
+          <a:fillRef idx="3">
+            <a:schemeClr val="accent1"/>
+          </a:fillRef>
+          <a:effectRef idx="2">
+            <a:schemeClr val="accent1"/>
+          </a:effectRef>
+          <a:fontRef idx="minor">
+            <a:schemeClr val="lt1"/>
+          </a:fontRef>
+        </p:style>
+        <p:txBody>
+          <a:bodyPr rtlCol="0" anchor="ctr"/>
+          <a:lstStyle/>
+          <a:p>
+            <a:pPr algn="ctr"/>
           </a:p>
         </p:txBody>
       </p:sp>
@@ -3649,72 +8052,868 @@
         </p:nvSpPr>
         <p:spPr>
           <a:xfrm>
-            <a:off x="731520" y="1463040"/>
-            <a:ext cx="10789920" cy="4754880"/>
-          </a:xfrm>
-          <a:prstGeom prst="rect">
-            <a:avLst/>
-          </a:prstGeom>
-          <a:noFill/>
-        </p:spPr>
-        <p:txBody>
-          <a:bodyPr wrap="none">
-            <a:spAutoFit/>
-          </a:bodyPr>
-          <a:lstStyle/>
-          <a:p>
-            <a:pPr>
-              <a:spcAft>
-                <a:spcPts val="1200"/>
-              </a:spcAft>
-              <a:defRPr sz="1800"/>
-            </a:pPr>
-            <a:r>
-              <a:t>Test: Welch independent two-sample t-test</a:t>
-            </a:r>
-          </a:p>
-          <a:p>
-            <a:pPr>
-              <a:spcAft>
-                <a:spcPts val="1200"/>
-              </a:spcAft>
-              <a:defRPr sz="1800"/>
-            </a:pPr>
-            <a:r>
-              <a:t>H0: Female and Male mean transaction sales are equal</a:t>
-            </a:r>
-          </a:p>
-          <a:p>
-            <a:pPr>
-              <a:spcAft>
-                <a:spcPts val="1200"/>
-              </a:spcAft>
-              <a:defRPr sz="1800"/>
-            </a:pPr>
-            <a:r>
-              <a:t>p-value: 0.495011</a:t>
-            </a:r>
-          </a:p>
-          <a:p>
-            <a:pPr>
-              <a:spcAft>
-                <a:spcPts val="1200"/>
-              </a:spcAft>
-              <a:defRPr sz="1800"/>
-            </a:pPr>
-            <a:r>
-              <a:t>95% CI for Female − Male mean difference: [-19,079.85, 9,231.58]</a:t>
-            </a:r>
-          </a:p>
-          <a:p>
-            <a:pPr>
-              <a:spcAft>
-                <a:spcPts val="1200"/>
-              </a:spcAft>
-              <a:defRPr sz="1800"/>
-            </a:pPr>
-            <a:r>
-              <a:t>Conclusion: fail to reject H0 at α=0.05.</a:t>
+            <a:off x="594360" y="320040"/>
+            <a:ext cx="5486400" cy="274320"/>
+          </a:xfrm>
+          <a:prstGeom prst="rect">
+            <a:avLst/>
+          </a:prstGeom>
+          <a:noFill/>
+        </p:spPr>
+        <p:txBody>
+          <a:bodyPr wrap="none" anchor="ctr">
+            <a:spAutoFit/>
+          </a:bodyPr>
+          <a:lstStyle/>
+          <a:p>
+            <a:pPr algn="l"/>
+            <a:r>
+              <a:rPr sz="1000" b="1">
+                <a:solidFill>
+                  <a:srgbClr val="26BED2"/>
+                </a:solidFill>
+                <a:latin typeface="Aptos"/>
+              </a:rPr>
+              <a:t>STATISTICAL METHOD</a:t>
+            </a:r>
+          </a:p>
+        </p:txBody>
+      </p:sp>
+      <p:sp>
+        <p:nvSpPr>
+          <p:cNvPr id="4" name="TextBox 3"/>
+          <p:cNvSpPr txBox="1"/>
+          <p:nvPr/>
+        </p:nvSpPr>
+        <p:spPr>
+          <a:xfrm>
+            <a:off x="594360" y="658368"/>
+            <a:ext cx="10881360" cy="594360"/>
+          </a:xfrm>
+          <a:prstGeom prst="rect">
+            <a:avLst/>
+          </a:prstGeom>
+          <a:noFill/>
+        </p:spPr>
+        <p:txBody>
+          <a:bodyPr wrap="none" anchor="ctr">
+            <a:spAutoFit/>
+          </a:bodyPr>
+          <a:lstStyle/>
+          <a:p>
+            <a:pPr algn="l"/>
+            <a:r>
+              <a:rPr sz="2800" b="1">
+                <a:solidFill>
+                  <a:srgbClr val="F8FAFC"/>
+                </a:solidFill>
+                <a:latin typeface="Aptos"/>
+              </a:rPr>
+              <a:t>Why Welch's independent t-test?</a:t>
+            </a:r>
+          </a:p>
+        </p:txBody>
+      </p:sp>
+      <p:sp>
+        <p:nvSpPr>
+          <p:cNvPr id="5" name="TextBox 4"/>
+          <p:cNvSpPr txBox="1"/>
+          <p:nvPr/>
+        </p:nvSpPr>
+        <p:spPr>
+          <a:xfrm>
+            <a:off x="612648" y="1280160"/>
+            <a:ext cx="10698480" cy="365760"/>
+          </a:xfrm>
+          <a:prstGeom prst="rect">
+            <a:avLst/>
+          </a:prstGeom>
+          <a:noFill/>
+        </p:spPr>
+        <p:txBody>
+          <a:bodyPr wrap="none" anchor="ctr">
+            <a:spAutoFit/>
+          </a:bodyPr>
+          <a:lstStyle/>
+          <a:p>
+            <a:pPr algn="l"/>
+            <a:r>
+              <a:rPr sz="1100" b="0">
+                <a:solidFill>
+                  <a:srgbClr val="A0AEC0"/>
+                </a:solidFill>
+                <a:latin typeface="Aptos"/>
+              </a:rPr>
+              <a:t>A direct comparison of the means of two independent transaction groups.</a:t>
+            </a:r>
+          </a:p>
+        </p:txBody>
+      </p:sp>
+      <p:sp>
+        <p:nvSpPr>
+          <p:cNvPr id="6" name="TextBox 5"/>
+          <p:cNvSpPr txBox="1"/>
+          <p:nvPr/>
+        </p:nvSpPr>
+        <p:spPr>
+          <a:xfrm>
+            <a:off x="594360" y="6473952"/>
+            <a:ext cx="5029200" cy="182880"/>
+          </a:xfrm>
+          <a:prstGeom prst="rect">
+            <a:avLst/>
+          </a:prstGeom>
+          <a:noFill/>
+        </p:spPr>
+        <p:txBody>
+          <a:bodyPr wrap="none" anchor="ctr">
+            <a:spAutoFit/>
+          </a:bodyPr>
+          <a:lstStyle/>
+          <a:p>
+            <a:pPr algn="l"/>
+            <a:r>
+              <a:rPr sz="800" b="1">
+                <a:solidFill>
+                  <a:srgbClr val="A0AEC0"/>
+                </a:solidFill>
+                <a:latin typeface="Aptos"/>
+              </a:rPr>
+              <a:t>APEXPLANET • DATA ANALYTICS INTERNSHIP</a:t>
+            </a:r>
+          </a:p>
+        </p:txBody>
+      </p:sp>
+      <p:sp>
+        <p:nvSpPr>
+          <p:cNvPr id="7" name="TextBox 6"/>
+          <p:cNvSpPr txBox="1"/>
+          <p:nvPr/>
+        </p:nvSpPr>
+        <p:spPr>
+          <a:xfrm>
+            <a:off x="11018520" y="6446520"/>
+            <a:ext cx="548640" cy="228600"/>
+          </a:xfrm>
+          <a:prstGeom prst="rect">
+            <a:avLst/>
+          </a:prstGeom>
+          <a:noFill/>
+        </p:spPr>
+        <p:txBody>
+          <a:bodyPr wrap="none" anchor="ctr">
+            <a:spAutoFit/>
+          </a:bodyPr>
+          <a:lstStyle/>
+          <a:p>
+            <a:pPr algn="r"/>
+            <a:r>
+              <a:rPr sz="900" b="1">
+                <a:solidFill>
+                  <a:srgbClr val="A0AEC0"/>
+                </a:solidFill>
+                <a:latin typeface="Aptos"/>
+              </a:rPr>
+              <a:t>05</a:t>
+            </a:r>
+          </a:p>
+        </p:txBody>
+      </p:sp>
+      <p:sp>
+        <p:nvSpPr>
+          <p:cNvPr id="8" name="TextBox 7"/>
+          <p:cNvSpPr txBox="1"/>
+          <p:nvPr/>
+        </p:nvSpPr>
+        <p:spPr>
+          <a:xfrm>
+            <a:off x="914400" y="2057400"/>
+            <a:ext cx="2331720" cy="274320"/>
+          </a:xfrm>
+          <a:prstGeom prst="rect">
+            <a:avLst/>
+          </a:prstGeom>
+          <a:noFill/>
+        </p:spPr>
+        <p:txBody>
+          <a:bodyPr wrap="none" anchor="ctr">
+            <a:spAutoFit/>
+          </a:bodyPr>
+          <a:lstStyle/>
+          <a:p>
+            <a:pPr algn="ctr"/>
+            <a:r>
+              <a:rPr sz="1100" b="1">
+                <a:solidFill>
+                  <a:srgbClr val="26BED2"/>
+                </a:solidFill>
+                <a:latin typeface="Aptos"/>
+              </a:rPr>
+              <a:t>FEMALE TRANSACTIONS</a:t>
+            </a:r>
+          </a:p>
+        </p:txBody>
+      </p:sp>
+      <p:sp>
+        <p:nvSpPr>
+          <p:cNvPr id="9" name="Rounded Rectangle 8"/>
+          <p:cNvSpPr/>
+          <p:nvPr/>
+        </p:nvSpPr>
+        <p:spPr>
+          <a:xfrm>
+            <a:off x="914400" y="2606040"/>
+            <a:ext cx="2331720" cy="1097280"/>
+          </a:xfrm>
+          <a:prstGeom prst="roundRect">
+            <a:avLst/>
+          </a:prstGeom>
+          <a:solidFill>
+            <a:srgbClr val="18233A"/>
+          </a:solidFill>
+          <a:ln>
+            <a:solidFill>
+              <a:srgbClr val="26BED2"/>
+            </a:solidFill>
+          </a:ln>
+        </p:spPr>
+        <p:style>
+          <a:lnRef idx="1">
+            <a:schemeClr val="accent1"/>
+          </a:lnRef>
+          <a:fillRef idx="3">
+            <a:schemeClr val="accent1"/>
+          </a:fillRef>
+          <a:effectRef idx="2">
+            <a:schemeClr val="accent1"/>
+          </a:effectRef>
+          <a:fontRef idx="minor">
+            <a:schemeClr val="lt1"/>
+          </a:fontRef>
+        </p:style>
+        <p:txBody>
+          <a:bodyPr rtlCol="0" anchor="ctr"/>
+          <a:lstStyle/>
+          <a:p>
+            <a:pPr algn="ctr"/>
+          </a:p>
+        </p:txBody>
+      </p:sp>
+      <p:sp>
+        <p:nvSpPr>
+          <p:cNvPr id="10" name="TextBox 9"/>
+          <p:cNvSpPr txBox="1"/>
+          <p:nvPr/>
+        </p:nvSpPr>
+        <p:spPr>
+          <a:xfrm>
+            <a:off x="1097280" y="2816352"/>
+            <a:ext cx="1965960" cy="548640"/>
+          </a:xfrm>
+          <a:prstGeom prst="rect">
+            <a:avLst/>
+          </a:prstGeom>
+          <a:noFill/>
+        </p:spPr>
+        <p:txBody>
+          <a:bodyPr wrap="none" anchor="ctr">
+            <a:spAutoFit/>
+          </a:bodyPr>
+          <a:lstStyle/>
+          <a:p>
+            <a:pPr algn="ctr"/>
+            <a:r>
+              <a:rPr sz="1500" b="1">
+                <a:solidFill>
+                  <a:srgbClr val="F8FAFC"/>
+                </a:solidFill>
+                <a:latin typeface="Aptos"/>
+              </a:rPr>
+              <a:t>Transaction-level
+sales values</a:t>
+            </a:r>
+          </a:p>
+        </p:txBody>
+      </p:sp>
+      <p:sp>
+        <p:nvSpPr>
+          <p:cNvPr id="11" name="TextBox 10"/>
+          <p:cNvSpPr txBox="1"/>
+          <p:nvPr/>
+        </p:nvSpPr>
+        <p:spPr>
+          <a:xfrm>
+            <a:off x="8915400" y="2057400"/>
+            <a:ext cx="2331720" cy="274320"/>
+          </a:xfrm>
+          <a:prstGeom prst="rect">
+            <a:avLst/>
+          </a:prstGeom>
+          <a:noFill/>
+        </p:spPr>
+        <p:txBody>
+          <a:bodyPr wrap="none" anchor="ctr">
+            <a:spAutoFit/>
+          </a:bodyPr>
+          <a:lstStyle/>
+          <a:p>
+            <a:pPr algn="ctr"/>
+            <a:r>
+              <a:rPr sz="1100" b="1">
+                <a:solidFill>
+                  <a:srgbClr val="366EE6"/>
+                </a:solidFill>
+                <a:latin typeface="Aptos"/>
+              </a:rPr>
+              <a:t>MALE TRANSACTIONS</a:t>
+            </a:r>
+          </a:p>
+        </p:txBody>
+      </p:sp>
+      <p:sp>
+        <p:nvSpPr>
+          <p:cNvPr id="12" name="Rounded Rectangle 11"/>
+          <p:cNvSpPr/>
+          <p:nvPr/>
+        </p:nvSpPr>
+        <p:spPr>
+          <a:xfrm>
+            <a:off x="8915400" y="2606040"/>
+            <a:ext cx="2331720" cy="1097280"/>
+          </a:xfrm>
+          <a:prstGeom prst="roundRect">
+            <a:avLst/>
+          </a:prstGeom>
+          <a:solidFill>
+            <a:srgbClr val="18233A"/>
+          </a:solidFill>
+          <a:ln>
+            <a:solidFill>
+              <a:srgbClr val="366EE6"/>
+            </a:solidFill>
+          </a:ln>
+        </p:spPr>
+        <p:style>
+          <a:lnRef idx="1">
+            <a:schemeClr val="accent1"/>
+          </a:lnRef>
+          <a:fillRef idx="3">
+            <a:schemeClr val="accent1"/>
+          </a:fillRef>
+          <a:effectRef idx="2">
+            <a:schemeClr val="accent1"/>
+          </a:effectRef>
+          <a:fontRef idx="minor">
+            <a:schemeClr val="lt1"/>
+          </a:fontRef>
+        </p:style>
+        <p:txBody>
+          <a:bodyPr rtlCol="0" anchor="ctr"/>
+          <a:lstStyle/>
+          <a:p>
+            <a:pPr algn="ctr"/>
+          </a:p>
+        </p:txBody>
+      </p:sp>
+      <p:sp>
+        <p:nvSpPr>
+          <p:cNvPr id="13" name="TextBox 12"/>
+          <p:cNvSpPr txBox="1"/>
+          <p:nvPr/>
+        </p:nvSpPr>
+        <p:spPr>
+          <a:xfrm>
+            <a:off x="9098280" y="2816352"/>
+            <a:ext cx="1965960" cy="548640"/>
+          </a:xfrm>
+          <a:prstGeom prst="rect">
+            <a:avLst/>
+          </a:prstGeom>
+          <a:noFill/>
+        </p:spPr>
+        <p:txBody>
+          <a:bodyPr wrap="none" anchor="ctr">
+            <a:spAutoFit/>
+          </a:bodyPr>
+          <a:lstStyle/>
+          <a:p>
+            <a:pPr algn="ctr"/>
+            <a:r>
+              <a:rPr sz="1500" b="1">
+                <a:solidFill>
+                  <a:srgbClr val="F8FAFC"/>
+                </a:solidFill>
+                <a:latin typeface="Aptos"/>
+              </a:rPr>
+              <a:t>Transaction-level
+sales values</a:t>
+            </a:r>
+          </a:p>
+        </p:txBody>
+      </p:sp>
+      <p:sp>
+        <p:nvSpPr>
+          <p:cNvPr id="14" name="TextBox 13"/>
+          <p:cNvSpPr txBox="1"/>
+          <p:nvPr/>
+        </p:nvSpPr>
+        <p:spPr>
+          <a:xfrm>
+            <a:off x="3794760" y="2880360"/>
+            <a:ext cx="548640" cy="411480"/>
+          </a:xfrm>
+          <a:prstGeom prst="rect">
+            <a:avLst/>
+          </a:prstGeom>
+          <a:noFill/>
+        </p:spPr>
+        <p:txBody>
+          <a:bodyPr wrap="none" anchor="ctr">
+            <a:spAutoFit/>
+          </a:bodyPr>
+          <a:lstStyle/>
+          <a:p>
+            <a:pPr algn="ctr"/>
+            <a:r>
+              <a:rPr sz="2500" b="1">
+                <a:solidFill>
+                  <a:srgbClr val="A0AEC0"/>
+                </a:solidFill>
+                <a:latin typeface="Aptos"/>
+              </a:rPr>
+              <a:t>→</a:t>
+            </a:r>
+          </a:p>
+        </p:txBody>
+      </p:sp>
+      <p:sp>
+        <p:nvSpPr>
+          <p:cNvPr id="15" name="Rounded Rectangle 14"/>
+          <p:cNvSpPr/>
+          <p:nvPr/>
+        </p:nvSpPr>
+        <p:spPr>
+          <a:xfrm>
+            <a:off x="4526280" y="2468880"/>
+            <a:ext cx="2971800" cy="1371600"/>
+          </a:xfrm>
+          <a:prstGeom prst="roundRect">
+            <a:avLst/>
+          </a:prstGeom>
+          <a:solidFill>
+            <a:srgbClr val="1E4096"/>
+          </a:solidFill>
+          <a:ln>
+            <a:solidFill>
+              <a:srgbClr val="26BED2"/>
+            </a:solidFill>
+          </a:ln>
+        </p:spPr>
+        <p:style>
+          <a:lnRef idx="1">
+            <a:schemeClr val="accent1"/>
+          </a:lnRef>
+          <a:fillRef idx="3">
+            <a:schemeClr val="accent1"/>
+          </a:fillRef>
+          <a:effectRef idx="2">
+            <a:schemeClr val="accent1"/>
+          </a:effectRef>
+          <a:fontRef idx="minor">
+            <a:schemeClr val="lt1"/>
+          </a:fontRef>
+        </p:style>
+        <p:txBody>
+          <a:bodyPr rtlCol="0" anchor="ctr"/>
+          <a:lstStyle/>
+          <a:p>
+            <a:pPr algn="ctr"/>
+          </a:p>
+        </p:txBody>
+      </p:sp>
+      <p:sp>
+        <p:nvSpPr>
+          <p:cNvPr id="16" name="TextBox 15"/>
+          <p:cNvSpPr txBox="1"/>
+          <p:nvPr/>
+        </p:nvSpPr>
+        <p:spPr>
+          <a:xfrm>
+            <a:off x="4681728" y="2724912"/>
+            <a:ext cx="2651760" cy="713232"/>
+          </a:xfrm>
+          <a:prstGeom prst="rect">
+            <a:avLst/>
+          </a:prstGeom>
+          <a:noFill/>
+        </p:spPr>
+        <p:txBody>
+          <a:bodyPr wrap="none" anchor="ctr">
+            <a:spAutoFit/>
+          </a:bodyPr>
+          <a:lstStyle/>
+          <a:p>
+            <a:pPr algn="ctr"/>
+            <a:r>
+              <a:rPr sz="1800" b="1">
+                <a:solidFill>
+                  <a:srgbClr val="F8FAFC"/>
+                </a:solidFill>
+                <a:latin typeface="Aptos"/>
+              </a:rPr>
+              <a:t>WELCH'S
+TWO-SAMPLE T-TEST</a:t>
+            </a:r>
+          </a:p>
+        </p:txBody>
+      </p:sp>
+      <p:sp>
+        <p:nvSpPr>
+          <p:cNvPr id="17" name="TextBox 16"/>
+          <p:cNvSpPr txBox="1"/>
+          <p:nvPr/>
+        </p:nvSpPr>
+        <p:spPr>
+          <a:xfrm>
+            <a:off x="7863840" y="2880360"/>
+            <a:ext cx="548640" cy="411480"/>
+          </a:xfrm>
+          <a:prstGeom prst="rect">
+            <a:avLst/>
+          </a:prstGeom>
+          <a:noFill/>
+        </p:spPr>
+        <p:txBody>
+          <a:bodyPr wrap="none" anchor="ctr">
+            <a:spAutoFit/>
+          </a:bodyPr>
+          <a:lstStyle/>
+          <a:p>
+            <a:pPr algn="ctr"/>
+            <a:r>
+              <a:rPr sz="2500" b="1">
+                <a:solidFill>
+                  <a:srgbClr val="A0AEC0"/>
+                </a:solidFill>
+                <a:latin typeface="Aptos"/>
+              </a:rPr>
+              <a:t>→</a:t>
+            </a:r>
+          </a:p>
+        </p:txBody>
+      </p:sp>
+      <p:sp>
+        <p:nvSpPr>
+          <p:cNvPr id="18" name="TextBox 17"/>
+          <p:cNvSpPr txBox="1"/>
+          <p:nvPr/>
+        </p:nvSpPr>
+        <p:spPr>
+          <a:xfrm>
+            <a:off x="8458200" y="2743200"/>
+            <a:ext cx="2651760" cy="685800"/>
+          </a:xfrm>
+          <a:prstGeom prst="rect">
+            <a:avLst/>
+          </a:prstGeom>
+          <a:noFill/>
+        </p:spPr>
+        <p:txBody>
+          <a:bodyPr wrap="none" anchor="ctr">
+            <a:spAutoFit/>
+          </a:bodyPr>
+          <a:lstStyle/>
+          <a:p>
+            <a:pPr algn="ctr"/>
+            <a:r>
+              <a:rPr sz="1800" b="1">
+                <a:solidFill>
+                  <a:srgbClr val="F8FAFC"/>
+                </a:solidFill>
+                <a:latin typeface="Aptos"/>
+              </a:rPr>
+              <a:t>p-value
++ 95% CI</a:t>
+            </a:r>
+          </a:p>
+        </p:txBody>
+      </p:sp>
+      <p:sp>
+        <p:nvSpPr>
+          <p:cNvPr id="19" name="TextBox 18"/>
+          <p:cNvSpPr txBox="1"/>
+          <p:nvPr/>
+        </p:nvSpPr>
+        <p:spPr>
+          <a:xfrm>
+            <a:off x="777240" y="4572000"/>
+            <a:ext cx="182880" cy="274320"/>
+          </a:xfrm>
+          <a:prstGeom prst="rect">
+            <a:avLst/>
+          </a:prstGeom>
+          <a:noFill/>
+        </p:spPr>
+        <p:txBody>
+          <a:bodyPr wrap="none" anchor="ctr">
+            <a:spAutoFit/>
+          </a:bodyPr>
+          <a:lstStyle/>
+          <a:p>
+            <a:pPr algn="l"/>
+            <a:r>
+              <a:rPr sz="1400" b="1">
+                <a:solidFill>
+                  <a:srgbClr val="26BED2"/>
+                </a:solidFill>
+                <a:latin typeface="Aptos"/>
+              </a:rPr>
+              <a:t>•</a:t>
+            </a:r>
+          </a:p>
+        </p:txBody>
+      </p:sp>
+      <p:sp>
+        <p:nvSpPr>
+          <p:cNvPr id="20" name="TextBox 19"/>
+          <p:cNvSpPr txBox="1"/>
+          <p:nvPr/>
+        </p:nvSpPr>
+        <p:spPr>
+          <a:xfrm>
+            <a:off x="1033271" y="4572000"/>
+            <a:ext cx="4864607" cy="502920"/>
+          </a:xfrm>
+          <a:prstGeom prst="rect">
+            <a:avLst/>
+          </a:prstGeom>
+          <a:noFill/>
+        </p:spPr>
+        <p:txBody>
+          <a:bodyPr wrap="none" anchor="ctr">
+            <a:spAutoFit/>
+          </a:bodyPr>
+          <a:lstStyle/>
+          <a:p>
+            <a:pPr algn="l"/>
+            <a:r>
+              <a:rPr sz="1400" b="0">
+                <a:solidFill>
+                  <a:srgbClr val="F8FAFC"/>
+                </a:solidFill>
+                <a:latin typeface="Aptos"/>
+              </a:rPr>
+              <a:t>Compares the means of two independent groups.</a:t>
+            </a:r>
+          </a:p>
+        </p:txBody>
+      </p:sp>
+      <p:sp>
+        <p:nvSpPr>
+          <p:cNvPr id="21" name="TextBox 20"/>
+          <p:cNvSpPr txBox="1"/>
+          <p:nvPr/>
+        </p:nvSpPr>
+        <p:spPr>
+          <a:xfrm>
+            <a:off x="777240" y="5102352"/>
+            <a:ext cx="182880" cy="274320"/>
+          </a:xfrm>
+          <a:prstGeom prst="rect">
+            <a:avLst/>
+          </a:prstGeom>
+          <a:noFill/>
+        </p:spPr>
+        <p:txBody>
+          <a:bodyPr wrap="none" anchor="ctr">
+            <a:spAutoFit/>
+          </a:bodyPr>
+          <a:lstStyle/>
+          <a:p>
+            <a:pPr algn="l"/>
+            <a:r>
+              <a:rPr sz="1400" b="1">
+                <a:solidFill>
+                  <a:srgbClr val="26BED2"/>
+                </a:solidFill>
+                <a:latin typeface="Aptos"/>
+              </a:rPr>
+              <a:t>•</a:t>
+            </a:r>
+          </a:p>
+        </p:txBody>
+      </p:sp>
+      <p:sp>
+        <p:nvSpPr>
+          <p:cNvPr id="22" name="TextBox 21"/>
+          <p:cNvSpPr txBox="1"/>
+          <p:nvPr/>
+        </p:nvSpPr>
+        <p:spPr>
+          <a:xfrm>
+            <a:off x="1033271" y="5102352"/>
+            <a:ext cx="4864607" cy="502920"/>
+          </a:xfrm>
+          <a:prstGeom prst="rect">
+            <a:avLst/>
+          </a:prstGeom>
+          <a:noFill/>
+        </p:spPr>
+        <p:txBody>
+          <a:bodyPr wrap="none" anchor="ctr">
+            <a:spAutoFit/>
+          </a:bodyPr>
+          <a:lstStyle/>
+          <a:p>
+            <a:pPr algn="l"/>
+            <a:r>
+              <a:rPr sz="1400" b="0">
+                <a:solidFill>
+                  <a:srgbClr val="F8FAFC"/>
+                </a:solidFill>
+                <a:latin typeface="Aptos"/>
+              </a:rPr>
+              <a:t>Welch's test does not assume equal variances.</a:t>
+            </a:r>
+          </a:p>
+        </p:txBody>
+      </p:sp>
+      <p:sp>
+        <p:nvSpPr>
+          <p:cNvPr id="23" name="TextBox 22"/>
+          <p:cNvSpPr txBox="1"/>
+          <p:nvPr/>
+        </p:nvSpPr>
+        <p:spPr>
+          <a:xfrm>
+            <a:off x="5989320" y="4572000"/>
+            <a:ext cx="182880" cy="274320"/>
+          </a:xfrm>
+          <a:prstGeom prst="rect">
+            <a:avLst/>
+          </a:prstGeom>
+          <a:noFill/>
+        </p:spPr>
+        <p:txBody>
+          <a:bodyPr wrap="none" anchor="ctr">
+            <a:spAutoFit/>
+          </a:bodyPr>
+          <a:lstStyle/>
+          <a:p>
+            <a:pPr algn="l"/>
+            <a:r>
+              <a:rPr sz="1400" b="1">
+                <a:solidFill>
+                  <a:srgbClr val="26BED2"/>
+                </a:solidFill>
+                <a:latin typeface="Aptos"/>
+              </a:rPr>
+              <a:t>•</a:t>
+            </a:r>
+          </a:p>
+        </p:txBody>
+      </p:sp>
+      <p:sp>
+        <p:nvSpPr>
+          <p:cNvPr id="24" name="TextBox 23"/>
+          <p:cNvSpPr txBox="1"/>
+          <p:nvPr/>
+        </p:nvSpPr>
+        <p:spPr>
+          <a:xfrm>
+            <a:off x="6245352" y="4572000"/>
+            <a:ext cx="4956048" cy="502920"/>
+          </a:xfrm>
+          <a:prstGeom prst="rect">
+            <a:avLst/>
+          </a:prstGeom>
+          <a:noFill/>
+        </p:spPr>
+        <p:txBody>
+          <a:bodyPr wrap="none" anchor="ctr">
+            <a:spAutoFit/>
+          </a:bodyPr>
+          <a:lstStyle/>
+          <a:p>
+            <a:pPr algn="l"/>
+            <a:r>
+              <a:rPr sz="1400" b="0">
+                <a:solidFill>
+                  <a:srgbClr val="F8FAFC"/>
+                </a:solidFill>
+                <a:latin typeface="Aptos"/>
+              </a:rPr>
+              <a:t>Two-sided testing checks for a difference in either direction.</a:t>
+            </a:r>
+          </a:p>
+        </p:txBody>
+      </p:sp>
+      <p:sp>
+        <p:nvSpPr>
+          <p:cNvPr id="25" name="TextBox 24"/>
+          <p:cNvSpPr txBox="1"/>
+          <p:nvPr/>
+        </p:nvSpPr>
+        <p:spPr>
+          <a:xfrm>
+            <a:off x="5989320" y="5102352"/>
+            <a:ext cx="182880" cy="274320"/>
+          </a:xfrm>
+          <a:prstGeom prst="rect">
+            <a:avLst/>
+          </a:prstGeom>
+          <a:noFill/>
+        </p:spPr>
+        <p:txBody>
+          <a:bodyPr wrap="none" anchor="ctr">
+            <a:spAutoFit/>
+          </a:bodyPr>
+          <a:lstStyle/>
+          <a:p>
+            <a:pPr algn="l"/>
+            <a:r>
+              <a:rPr sz="1400" b="1">
+                <a:solidFill>
+                  <a:srgbClr val="26BED2"/>
+                </a:solidFill>
+                <a:latin typeface="Aptos"/>
+              </a:rPr>
+              <a:t>•</a:t>
+            </a:r>
+          </a:p>
+        </p:txBody>
+      </p:sp>
+      <p:sp>
+        <p:nvSpPr>
+          <p:cNvPr id="26" name="TextBox 25"/>
+          <p:cNvSpPr txBox="1"/>
+          <p:nvPr/>
+        </p:nvSpPr>
+        <p:spPr>
+          <a:xfrm>
+            <a:off x="6245352" y="5102352"/>
+            <a:ext cx="4956048" cy="502920"/>
+          </a:xfrm>
+          <a:prstGeom prst="rect">
+            <a:avLst/>
+          </a:prstGeom>
+          <a:noFill/>
+        </p:spPr>
+        <p:txBody>
+          <a:bodyPr wrap="none" anchor="ctr">
+            <a:spAutoFit/>
+          </a:bodyPr>
+          <a:lstStyle/>
+          <a:p>
+            <a:pPr algn="l"/>
+            <a:r>
+              <a:rPr sz="1400" b="0">
+                <a:solidFill>
+                  <a:srgbClr val="F8FAFC"/>
+                </a:solidFill>
+                <a:latin typeface="Aptos"/>
+              </a:rPr>
+              <a:t>The decision threshold is α = 0.05.</a:t>
             </a:r>
           </a:p>
         </p:txBody>
@@ -3739,32 +8938,44 @@
       <p:grpSpPr/>
       <p:sp>
         <p:nvSpPr>
-          <p:cNvPr id="2" name="TextBox 1"/>
-          <p:cNvSpPr txBox="1"/>
-          <p:nvPr/>
-        </p:nvSpPr>
-        <p:spPr>
-          <a:xfrm>
-            <a:off x="548640" y="320040"/>
-            <a:ext cx="10972800" cy="731520"/>
-          </a:xfrm>
-          <a:prstGeom prst="rect">
-            <a:avLst/>
-          </a:prstGeom>
-          <a:noFill/>
-        </p:spPr>
-        <p:txBody>
-          <a:bodyPr wrap="none">
-            <a:spAutoFit/>
-          </a:bodyPr>
-          <a:lstStyle/>
-          <a:p>
-            <a:pPr>
-              <a:defRPr sz="2800" b="1"/>
-            </a:pPr>
-            <a:r>
-              <a:t>Business Takeaways &amp; Action</a:t>
-            </a:r>
+          <p:cNvPr id="2" name="Rectangle 1"/>
+          <p:cNvSpPr/>
+          <p:nvPr/>
+        </p:nvSpPr>
+        <p:spPr>
+          <a:xfrm>
+            <a:off x="0" y="0"/>
+            <a:ext cx="12191695" cy="6858000"/>
+          </a:xfrm>
+          <a:prstGeom prst="rect">
+            <a:avLst/>
+          </a:prstGeom>
+          <a:solidFill>
+            <a:srgbClr val="0C1426"/>
+          </a:solidFill>
+          <a:ln>
+            <a:noFill/>
+          </a:ln>
+        </p:spPr>
+        <p:style>
+          <a:lnRef idx="1">
+            <a:schemeClr val="accent1"/>
+          </a:lnRef>
+          <a:fillRef idx="3">
+            <a:schemeClr val="accent1"/>
+          </a:fillRef>
+          <a:effectRef idx="2">
+            <a:schemeClr val="accent1"/>
+          </a:effectRef>
+          <a:fontRef idx="minor">
+            <a:schemeClr val="lt1"/>
+          </a:fontRef>
+        </p:style>
+        <p:txBody>
+          <a:bodyPr rtlCol="0" anchor="ctr"/>
+          <a:lstStyle/>
+          <a:p>
+            <a:pPr algn="ctr"/>
           </a:p>
         </p:txBody>
       </p:sp>
@@ -3776,72 +8987,3365 @@
         </p:nvSpPr>
         <p:spPr>
           <a:xfrm>
-            <a:off x="731520" y="1463040"/>
-            <a:ext cx="10789920" cy="4754880"/>
-          </a:xfrm>
-          <a:prstGeom prst="rect">
-            <a:avLst/>
-          </a:prstGeom>
-          <a:noFill/>
-        </p:spPr>
-        <p:txBody>
-          <a:bodyPr wrap="none">
-            <a:spAutoFit/>
-          </a:bodyPr>
-          <a:lstStyle/>
-          <a:p>
-            <a:pPr>
-              <a:spcAft>
-                <a:spcPts val="1200"/>
-              </a:spcAft>
-              <a:defRPr sz="1800"/>
-            </a:pPr>
-            <a:r>
-              <a:t>Use category/product performance to prioritize commercial attention.</a:t>
-            </a:r>
-          </a:p>
-          <a:p>
-            <a:pPr>
-              <a:spcAft>
-                <a:spcPts val="1200"/>
-              </a:spcAft>
-              <a:defRPr sz="1800"/>
-            </a:pPr>
-            <a:r>
+            <a:off x="594360" y="320040"/>
+            <a:ext cx="5486400" cy="274320"/>
+          </a:xfrm>
+          <a:prstGeom prst="rect">
+            <a:avLst/>
+          </a:prstGeom>
+          <a:noFill/>
+        </p:spPr>
+        <p:txBody>
+          <a:bodyPr wrap="none" anchor="ctr">
+            <a:spAutoFit/>
+          </a:bodyPr>
+          <a:lstStyle/>
+          <a:p>
+            <a:pPr algn="l"/>
+            <a:r>
+              <a:rPr sz="1000" b="1">
+                <a:solidFill>
+                  <a:srgbClr val="26BED2"/>
+                </a:solidFill>
+                <a:latin typeface="Aptos"/>
+              </a:rPr>
+              <a:t>RESULTS</a:t>
+            </a:r>
+          </a:p>
+        </p:txBody>
+      </p:sp>
+      <p:sp>
+        <p:nvSpPr>
+          <p:cNvPr id="4" name="TextBox 3"/>
+          <p:cNvSpPr txBox="1"/>
+          <p:nvPr/>
+        </p:nvSpPr>
+        <p:spPr>
+          <a:xfrm>
+            <a:off x="594360" y="658368"/>
+            <a:ext cx="10881360" cy="594360"/>
+          </a:xfrm>
+          <a:prstGeom prst="rect">
+            <a:avLst/>
+          </a:prstGeom>
+          <a:noFill/>
+        </p:spPr>
+        <p:txBody>
+          <a:bodyPr wrap="none" anchor="ctr">
+            <a:spAutoFit/>
+          </a:bodyPr>
+          <a:lstStyle/>
+          <a:p>
+            <a:pPr algn="l"/>
+            <a:r>
+              <a:rPr sz="2800" b="1">
+                <a:solidFill>
+                  <a:srgbClr val="F8FAFC"/>
+                </a:solidFill>
+                <a:latin typeface="Aptos"/>
+              </a:rPr>
+              <a:t>The statistical evidence</a:t>
+            </a:r>
+          </a:p>
+        </p:txBody>
+      </p:sp>
+      <p:sp>
+        <p:nvSpPr>
+          <p:cNvPr id="5" name="TextBox 4"/>
+          <p:cNvSpPr txBox="1"/>
+          <p:nvPr/>
+        </p:nvSpPr>
+        <p:spPr>
+          <a:xfrm>
+            <a:off x="612648" y="1280160"/>
+            <a:ext cx="10698480" cy="365760"/>
+          </a:xfrm>
+          <a:prstGeom prst="rect">
+            <a:avLst/>
+          </a:prstGeom>
+          <a:noFill/>
+        </p:spPr>
+        <p:txBody>
+          <a:bodyPr wrap="none" anchor="ctr">
+            <a:spAutoFit/>
+          </a:bodyPr>
+          <a:lstStyle/>
+          <a:p>
+            <a:pPr algn="l"/>
+            <a:r>
+              <a:rPr sz="1100" b="0">
+                <a:solidFill>
+                  <a:srgbClr val="A0AEC0"/>
+                </a:solidFill>
+                <a:latin typeface="Aptos"/>
+              </a:rPr>
+              <a:t>Exact values reported in the Task 4 presentation.</a:t>
+            </a:r>
+          </a:p>
+        </p:txBody>
+      </p:sp>
+      <p:sp>
+        <p:nvSpPr>
+          <p:cNvPr id="6" name="TextBox 5"/>
+          <p:cNvSpPr txBox="1"/>
+          <p:nvPr/>
+        </p:nvSpPr>
+        <p:spPr>
+          <a:xfrm>
+            <a:off x="594360" y="6473952"/>
+            <a:ext cx="5029200" cy="182880"/>
+          </a:xfrm>
+          <a:prstGeom prst="rect">
+            <a:avLst/>
+          </a:prstGeom>
+          <a:noFill/>
+        </p:spPr>
+        <p:txBody>
+          <a:bodyPr wrap="none" anchor="ctr">
+            <a:spAutoFit/>
+          </a:bodyPr>
+          <a:lstStyle/>
+          <a:p>
+            <a:pPr algn="l"/>
+            <a:r>
+              <a:rPr sz="800" b="1">
+                <a:solidFill>
+                  <a:srgbClr val="A0AEC0"/>
+                </a:solidFill>
+                <a:latin typeface="Aptos"/>
+              </a:rPr>
+              <a:t>APEXPLANET • DATA ANALYTICS INTERNSHIP</a:t>
+            </a:r>
+          </a:p>
+        </p:txBody>
+      </p:sp>
+      <p:sp>
+        <p:nvSpPr>
+          <p:cNvPr id="7" name="TextBox 6"/>
+          <p:cNvSpPr txBox="1"/>
+          <p:nvPr/>
+        </p:nvSpPr>
+        <p:spPr>
+          <a:xfrm>
+            <a:off x="11018520" y="6446520"/>
+            <a:ext cx="548640" cy="228600"/>
+          </a:xfrm>
+          <a:prstGeom prst="rect">
+            <a:avLst/>
+          </a:prstGeom>
+          <a:noFill/>
+        </p:spPr>
+        <p:txBody>
+          <a:bodyPr wrap="none" anchor="ctr">
+            <a:spAutoFit/>
+          </a:bodyPr>
+          <a:lstStyle/>
+          <a:p>
+            <a:pPr algn="r"/>
+            <a:r>
+              <a:rPr sz="900" b="1">
+                <a:solidFill>
+                  <a:srgbClr val="A0AEC0"/>
+                </a:solidFill>
+                <a:latin typeface="Aptos"/>
+              </a:rPr>
+              <a:t>06</a:t>
+            </a:r>
+          </a:p>
+        </p:txBody>
+      </p:sp>
+      <p:sp>
+        <p:nvSpPr>
+          <p:cNvPr id="8" name="Rounded Rectangle 7"/>
+          <p:cNvSpPr/>
+          <p:nvPr/>
+        </p:nvSpPr>
+        <p:spPr>
+          <a:xfrm>
+            <a:off x="685800" y="1828800"/>
+            <a:ext cx="3246120" cy="1554480"/>
+          </a:xfrm>
+          <a:prstGeom prst="roundRect">
+            <a:avLst/>
+          </a:prstGeom>
+          <a:solidFill>
+            <a:srgbClr val="18233A"/>
+          </a:solidFill>
+          <a:ln>
+            <a:solidFill>
+              <a:srgbClr val="374660"/>
+            </a:solidFill>
+          </a:ln>
+        </p:spPr>
+        <p:style>
+          <a:lnRef idx="1">
+            <a:schemeClr val="accent1"/>
+          </a:lnRef>
+          <a:fillRef idx="3">
+            <a:schemeClr val="accent1"/>
+          </a:fillRef>
+          <a:effectRef idx="2">
+            <a:schemeClr val="accent1"/>
+          </a:effectRef>
+          <a:fontRef idx="minor">
+            <a:schemeClr val="lt1"/>
+          </a:fontRef>
+        </p:style>
+        <p:txBody>
+          <a:bodyPr rtlCol="0" anchor="ctr"/>
+          <a:lstStyle/>
+          <a:p>
+            <a:pPr algn="ctr"/>
+          </a:p>
+        </p:txBody>
+      </p:sp>
+      <p:sp>
+        <p:nvSpPr>
+          <p:cNvPr id="9" name="TextBox 8"/>
+          <p:cNvSpPr txBox="1"/>
+          <p:nvPr/>
+        </p:nvSpPr>
+        <p:spPr>
+          <a:xfrm>
+            <a:off x="868680" y="1993392"/>
+            <a:ext cx="2880360" cy="438912"/>
+          </a:xfrm>
+          <a:prstGeom prst="rect">
+            <a:avLst/>
+          </a:prstGeom>
+          <a:noFill/>
+        </p:spPr>
+        <p:txBody>
+          <a:bodyPr wrap="none" anchor="ctr">
+            <a:spAutoFit/>
+          </a:bodyPr>
+          <a:lstStyle/>
+          <a:p>
+            <a:pPr algn="l"/>
+            <a:r>
+              <a:rPr sz="2900" b="1">
+                <a:solidFill>
+                  <a:srgbClr val="F8FAFC"/>
+                </a:solidFill>
+                <a:latin typeface="Aptos"/>
+              </a:rPr>
+              <a:t>0.495011</a:t>
+            </a:r>
+          </a:p>
+        </p:txBody>
+      </p:sp>
+      <p:sp>
+        <p:nvSpPr>
+          <p:cNvPr id="10" name="TextBox 9"/>
+          <p:cNvSpPr txBox="1"/>
+          <p:nvPr/>
+        </p:nvSpPr>
+        <p:spPr>
+          <a:xfrm>
+            <a:off x="868680" y="2542032"/>
+            <a:ext cx="2880360" cy="228600"/>
+          </a:xfrm>
+          <a:prstGeom prst="rect">
+            <a:avLst/>
+          </a:prstGeom>
+          <a:noFill/>
+        </p:spPr>
+        <p:txBody>
+          <a:bodyPr wrap="none" anchor="ctr">
+            <a:spAutoFit/>
+          </a:bodyPr>
+          <a:lstStyle/>
+          <a:p>
+            <a:pPr algn="l"/>
+            <a:r>
+              <a:rPr sz="800" b="1">
+                <a:solidFill>
+                  <a:srgbClr val="A0AEC0"/>
+                </a:solidFill>
+                <a:latin typeface="Aptos"/>
+              </a:rPr>
+              <a:t>P-VALUE</a:t>
+            </a:r>
+          </a:p>
+        </p:txBody>
+      </p:sp>
+      <p:sp>
+        <p:nvSpPr>
+          <p:cNvPr id="11" name="Rectangle 10"/>
+          <p:cNvSpPr/>
+          <p:nvPr/>
+        </p:nvSpPr>
+        <p:spPr>
+          <a:xfrm>
+            <a:off x="685800" y="1828800"/>
+            <a:ext cx="50292" cy="1554480"/>
+          </a:xfrm>
+          <a:prstGeom prst="rect">
+            <a:avLst/>
+          </a:prstGeom>
+          <a:solidFill>
+            <a:srgbClr val="366EE6"/>
+          </a:solidFill>
+          <a:ln>
+            <a:noFill/>
+          </a:ln>
+        </p:spPr>
+        <p:style>
+          <a:lnRef idx="1">
+            <a:schemeClr val="accent1"/>
+          </a:lnRef>
+          <a:fillRef idx="3">
+            <a:schemeClr val="accent1"/>
+          </a:fillRef>
+          <a:effectRef idx="2">
+            <a:schemeClr val="accent1"/>
+          </a:effectRef>
+          <a:fontRef idx="minor">
+            <a:schemeClr val="lt1"/>
+          </a:fontRef>
+        </p:style>
+        <p:txBody>
+          <a:bodyPr rtlCol="0" anchor="ctr"/>
+          <a:lstStyle/>
+          <a:p>
+            <a:pPr algn="ctr"/>
+          </a:p>
+        </p:txBody>
+      </p:sp>
+      <p:sp>
+        <p:nvSpPr>
+          <p:cNvPr id="12" name="Rounded Rectangle 11"/>
+          <p:cNvSpPr/>
+          <p:nvPr/>
+        </p:nvSpPr>
+        <p:spPr>
+          <a:xfrm>
+            <a:off x="4480560" y="1828800"/>
+            <a:ext cx="3246120" cy="1554480"/>
+          </a:xfrm>
+          <a:prstGeom prst="roundRect">
+            <a:avLst/>
+          </a:prstGeom>
+          <a:solidFill>
+            <a:srgbClr val="18233A"/>
+          </a:solidFill>
+          <a:ln>
+            <a:solidFill>
+              <a:srgbClr val="374660"/>
+            </a:solidFill>
+          </a:ln>
+        </p:spPr>
+        <p:style>
+          <a:lnRef idx="1">
+            <a:schemeClr val="accent1"/>
+          </a:lnRef>
+          <a:fillRef idx="3">
+            <a:schemeClr val="accent1"/>
+          </a:fillRef>
+          <a:effectRef idx="2">
+            <a:schemeClr val="accent1"/>
+          </a:effectRef>
+          <a:fontRef idx="minor">
+            <a:schemeClr val="lt1"/>
+          </a:fontRef>
+        </p:style>
+        <p:txBody>
+          <a:bodyPr rtlCol="0" anchor="ctr"/>
+          <a:lstStyle/>
+          <a:p>
+            <a:pPr algn="ctr"/>
+          </a:p>
+        </p:txBody>
+      </p:sp>
+      <p:sp>
+        <p:nvSpPr>
+          <p:cNvPr id="13" name="TextBox 12"/>
+          <p:cNvSpPr txBox="1"/>
+          <p:nvPr/>
+        </p:nvSpPr>
+        <p:spPr>
+          <a:xfrm>
+            <a:off x="4663440" y="1993392"/>
+            <a:ext cx="2880360" cy="438912"/>
+          </a:xfrm>
+          <a:prstGeom prst="rect">
+            <a:avLst/>
+          </a:prstGeom>
+          <a:noFill/>
+        </p:spPr>
+        <p:txBody>
+          <a:bodyPr wrap="none" anchor="ctr">
+            <a:spAutoFit/>
+          </a:bodyPr>
+          <a:lstStyle/>
+          <a:p>
+            <a:pPr algn="l"/>
+            <a:r>
+              <a:rPr sz="2900" b="1">
+                <a:solidFill>
+                  <a:srgbClr val="F8FAFC"/>
+                </a:solidFill>
+                <a:latin typeface="Aptos"/>
+              </a:rPr>
+              <a:t>0.05</a:t>
+            </a:r>
+          </a:p>
+        </p:txBody>
+      </p:sp>
+      <p:sp>
+        <p:nvSpPr>
+          <p:cNvPr id="14" name="TextBox 13"/>
+          <p:cNvSpPr txBox="1"/>
+          <p:nvPr/>
+        </p:nvSpPr>
+        <p:spPr>
+          <a:xfrm>
+            <a:off x="4663440" y="2542032"/>
+            <a:ext cx="2880360" cy="228600"/>
+          </a:xfrm>
+          <a:prstGeom prst="rect">
+            <a:avLst/>
+          </a:prstGeom>
+          <a:noFill/>
+        </p:spPr>
+        <p:txBody>
+          <a:bodyPr wrap="none" anchor="ctr">
+            <a:spAutoFit/>
+          </a:bodyPr>
+          <a:lstStyle/>
+          <a:p>
+            <a:pPr algn="l"/>
+            <a:r>
+              <a:rPr sz="800" b="1">
+                <a:solidFill>
+                  <a:srgbClr val="A0AEC0"/>
+                </a:solidFill>
+                <a:latin typeface="Aptos"/>
+              </a:rPr>
+              <a:t>ALPHA</a:t>
+            </a:r>
+          </a:p>
+        </p:txBody>
+      </p:sp>
+      <p:sp>
+        <p:nvSpPr>
+          <p:cNvPr id="15" name="Rectangle 14"/>
+          <p:cNvSpPr/>
+          <p:nvPr/>
+        </p:nvSpPr>
+        <p:spPr>
+          <a:xfrm>
+            <a:off x="4480560" y="1828800"/>
+            <a:ext cx="50292" cy="1554480"/>
+          </a:xfrm>
+          <a:prstGeom prst="rect">
+            <a:avLst/>
+          </a:prstGeom>
+          <a:solidFill>
+            <a:srgbClr val="F5AA37"/>
+          </a:solidFill>
+          <a:ln>
+            <a:noFill/>
+          </a:ln>
+        </p:spPr>
+        <p:style>
+          <a:lnRef idx="1">
+            <a:schemeClr val="accent1"/>
+          </a:lnRef>
+          <a:fillRef idx="3">
+            <a:schemeClr val="accent1"/>
+          </a:fillRef>
+          <a:effectRef idx="2">
+            <a:schemeClr val="accent1"/>
+          </a:effectRef>
+          <a:fontRef idx="minor">
+            <a:schemeClr val="lt1"/>
+          </a:fontRef>
+        </p:style>
+        <p:txBody>
+          <a:bodyPr rtlCol="0" anchor="ctr"/>
+          <a:lstStyle/>
+          <a:p>
+            <a:pPr algn="ctr"/>
+          </a:p>
+        </p:txBody>
+      </p:sp>
+      <p:sp>
+        <p:nvSpPr>
+          <p:cNvPr id="16" name="Rounded Rectangle 15"/>
+          <p:cNvSpPr/>
+          <p:nvPr/>
+        </p:nvSpPr>
+        <p:spPr>
+          <a:xfrm>
+            <a:off x="8275320" y="1828800"/>
+            <a:ext cx="3246120" cy="1554480"/>
+          </a:xfrm>
+          <a:prstGeom prst="roundRect">
+            <a:avLst/>
+          </a:prstGeom>
+          <a:solidFill>
+            <a:srgbClr val="18233A"/>
+          </a:solidFill>
+          <a:ln>
+            <a:solidFill>
+              <a:srgbClr val="374660"/>
+            </a:solidFill>
+          </a:ln>
+        </p:spPr>
+        <p:style>
+          <a:lnRef idx="1">
+            <a:schemeClr val="accent1"/>
+          </a:lnRef>
+          <a:fillRef idx="3">
+            <a:schemeClr val="accent1"/>
+          </a:fillRef>
+          <a:effectRef idx="2">
+            <a:schemeClr val="accent1"/>
+          </a:effectRef>
+          <a:fontRef idx="minor">
+            <a:schemeClr val="lt1"/>
+          </a:fontRef>
+        </p:style>
+        <p:txBody>
+          <a:bodyPr rtlCol="0" anchor="ctr"/>
+          <a:lstStyle/>
+          <a:p>
+            <a:pPr algn="ctr"/>
+          </a:p>
+        </p:txBody>
+      </p:sp>
+      <p:sp>
+        <p:nvSpPr>
+          <p:cNvPr id="17" name="TextBox 16"/>
+          <p:cNvSpPr txBox="1"/>
+          <p:nvPr/>
+        </p:nvSpPr>
+        <p:spPr>
+          <a:xfrm>
+            <a:off x="8458200" y="1993392"/>
+            <a:ext cx="2880360" cy="438912"/>
+          </a:xfrm>
+          <a:prstGeom prst="rect">
+            <a:avLst/>
+          </a:prstGeom>
+          <a:noFill/>
+        </p:spPr>
+        <p:txBody>
+          <a:bodyPr wrap="none" anchor="ctr">
+            <a:spAutoFit/>
+          </a:bodyPr>
+          <a:lstStyle/>
+          <a:p>
+            <a:pPr algn="l"/>
+            <a:r>
+              <a:rPr sz="2900" b="1">
+                <a:solidFill>
+                  <a:srgbClr val="F8FAFC"/>
+                </a:solidFill>
+                <a:latin typeface="Aptos"/>
+              </a:rPr>
+              <a:t>95%</a:t>
+            </a:r>
+          </a:p>
+        </p:txBody>
+      </p:sp>
+      <p:sp>
+        <p:nvSpPr>
+          <p:cNvPr id="18" name="TextBox 17"/>
+          <p:cNvSpPr txBox="1"/>
+          <p:nvPr/>
+        </p:nvSpPr>
+        <p:spPr>
+          <a:xfrm>
+            <a:off x="8458200" y="2542032"/>
+            <a:ext cx="2880360" cy="228600"/>
+          </a:xfrm>
+          <a:prstGeom prst="rect">
+            <a:avLst/>
+          </a:prstGeom>
+          <a:noFill/>
+        </p:spPr>
+        <p:txBody>
+          <a:bodyPr wrap="none" anchor="ctr">
+            <a:spAutoFit/>
+          </a:bodyPr>
+          <a:lstStyle/>
+          <a:p>
+            <a:pPr algn="l"/>
+            <a:r>
+              <a:rPr sz="800" b="1">
+                <a:solidFill>
+                  <a:srgbClr val="A0AEC0"/>
+                </a:solidFill>
+                <a:latin typeface="Aptos"/>
+              </a:rPr>
+              <a:t>CONFIDENCE LEVEL</a:t>
+            </a:r>
+          </a:p>
+        </p:txBody>
+      </p:sp>
+      <p:sp>
+        <p:nvSpPr>
+          <p:cNvPr id="19" name="Rectangle 18"/>
+          <p:cNvSpPr/>
+          <p:nvPr/>
+        </p:nvSpPr>
+        <p:spPr>
+          <a:xfrm>
+            <a:off x="8275320" y="1828800"/>
+            <a:ext cx="50292" cy="1554480"/>
+          </a:xfrm>
+          <a:prstGeom prst="rect">
+            <a:avLst/>
+          </a:prstGeom>
+          <a:solidFill>
+            <a:srgbClr val="26BED2"/>
+          </a:solidFill>
+          <a:ln>
+            <a:noFill/>
+          </a:ln>
+        </p:spPr>
+        <p:style>
+          <a:lnRef idx="1">
+            <a:schemeClr val="accent1"/>
+          </a:lnRef>
+          <a:fillRef idx="3">
+            <a:schemeClr val="accent1"/>
+          </a:fillRef>
+          <a:effectRef idx="2">
+            <a:schemeClr val="accent1"/>
+          </a:effectRef>
+          <a:fontRef idx="minor">
+            <a:schemeClr val="lt1"/>
+          </a:fontRef>
+        </p:style>
+        <p:txBody>
+          <a:bodyPr rtlCol="0" anchor="ctr"/>
+          <a:lstStyle/>
+          <a:p>
+            <a:pPr algn="ctr"/>
+          </a:p>
+        </p:txBody>
+      </p:sp>
+      <p:sp>
+        <p:nvSpPr>
+          <p:cNvPr id="20" name="TextBox 19"/>
+          <p:cNvSpPr txBox="1"/>
+          <p:nvPr/>
+        </p:nvSpPr>
+        <p:spPr>
+          <a:xfrm>
+            <a:off x="731520" y="3977639"/>
+            <a:ext cx="4754880" cy="274320"/>
+          </a:xfrm>
+          <a:prstGeom prst="rect">
+            <a:avLst/>
+          </a:prstGeom>
+          <a:noFill/>
+        </p:spPr>
+        <p:txBody>
+          <a:bodyPr wrap="none" anchor="ctr">
+            <a:spAutoFit/>
+          </a:bodyPr>
+          <a:lstStyle/>
+          <a:p>
+            <a:pPr algn="l"/>
+            <a:r>
+              <a:rPr sz="1200" b="1">
+                <a:solidFill>
+                  <a:srgbClr val="DCE4F0"/>
+                </a:solidFill>
+                <a:latin typeface="Aptos"/>
+              </a:rPr>
+              <a:t>95% CI — Female − Male mean difference</a:t>
+            </a:r>
+          </a:p>
+        </p:txBody>
+      </p:sp>
+      <p:sp>
+        <p:nvSpPr>
+          <p:cNvPr id="21" name="Rectangle 20"/>
+          <p:cNvSpPr/>
+          <p:nvPr/>
+        </p:nvSpPr>
+        <p:spPr>
+          <a:xfrm>
+            <a:off x="1828800" y="4800600"/>
+            <a:ext cx="8686800" cy="36576"/>
+          </a:xfrm>
+          <a:prstGeom prst="rect">
+            <a:avLst/>
+          </a:prstGeom>
+          <a:solidFill>
+            <a:srgbClr val="A0AEC0"/>
+          </a:solidFill>
+          <a:ln>
+            <a:noFill/>
+          </a:ln>
+        </p:spPr>
+        <p:style>
+          <a:lnRef idx="1">
+            <a:schemeClr val="accent1"/>
+          </a:lnRef>
+          <a:fillRef idx="3">
+            <a:schemeClr val="accent1"/>
+          </a:fillRef>
+          <a:effectRef idx="2">
+            <a:schemeClr val="accent1"/>
+          </a:effectRef>
+          <a:fontRef idx="minor">
+            <a:schemeClr val="lt1"/>
+          </a:fontRef>
+        </p:style>
+        <p:txBody>
+          <a:bodyPr rtlCol="0" anchor="ctr"/>
+          <a:lstStyle/>
+          <a:p>
+            <a:pPr algn="ctr"/>
+          </a:p>
+        </p:txBody>
+      </p:sp>
+      <p:sp>
+        <p:nvSpPr>
+          <p:cNvPr id="22" name="Rounded Rectangle 21"/>
+          <p:cNvSpPr/>
+          <p:nvPr/>
+        </p:nvSpPr>
+        <p:spPr>
+          <a:xfrm>
+            <a:off x="2552700" y="4700016"/>
+            <a:ext cx="5370756" cy="201168"/>
+          </a:xfrm>
+          <a:prstGeom prst="roundRect">
+            <a:avLst/>
+          </a:prstGeom>
+          <a:solidFill>
+            <a:srgbClr val="26BED2"/>
+          </a:solidFill>
+          <a:ln>
+            <a:noFill/>
+          </a:ln>
+        </p:spPr>
+        <p:style>
+          <a:lnRef idx="1">
+            <a:schemeClr val="accent1"/>
+          </a:lnRef>
+          <a:fillRef idx="3">
+            <a:schemeClr val="accent1"/>
+          </a:fillRef>
+          <a:effectRef idx="2">
+            <a:schemeClr val="accent1"/>
+          </a:effectRef>
+          <a:fontRef idx="minor">
+            <a:schemeClr val="lt1"/>
+          </a:fontRef>
+        </p:style>
+        <p:txBody>
+          <a:bodyPr rtlCol="0" anchor="ctr"/>
+          <a:lstStyle/>
+          <a:p>
+            <a:pPr algn="ctr"/>
+          </a:p>
+        </p:txBody>
+      </p:sp>
+      <p:sp>
+        <p:nvSpPr>
+          <p:cNvPr id="23" name="Rectangle 22"/>
+          <p:cNvSpPr/>
+          <p:nvPr/>
+        </p:nvSpPr>
+        <p:spPr>
+          <a:xfrm>
+            <a:off x="1828800" y="4645152"/>
+            <a:ext cx="22860" cy="329184"/>
+          </a:xfrm>
+          <a:prstGeom prst="rect">
+            <a:avLst/>
+          </a:prstGeom>
+          <a:solidFill>
+            <a:srgbClr val="F8FAFC"/>
+          </a:solidFill>
+          <a:ln>
+            <a:noFill/>
+          </a:ln>
+        </p:spPr>
+        <p:style>
+          <a:lnRef idx="1">
+            <a:schemeClr val="accent1"/>
+          </a:lnRef>
+          <a:fillRef idx="3">
+            <a:schemeClr val="accent1"/>
+          </a:fillRef>
+          <a:effectRef idx="2">
+            <a:schemeClr val="accent1"/>
+          </a:effectRef>
+          <a:fontRef idx="minor">
+            <a:schemeClr val="lt1"/>
+          </a:fontRef>
+        </p:style>
+        <p:txBody>
+          <a:bodyPr rtlCol="0" anchor="ctr"/>
+          <a:lstStyle/>
+          <a:p>
+            <a:pPr algn="ctr"/>
+          </a:p>
+        </p:txBody>
+      </p:sp>
+      <p:sp>
+        <p:nvSpPr>
+          <p:cNvPr id="24" name="Rectangle 23"/>
+          <p:cNvSpPr/>
+          <p:nvPr/>
+        </p:nvSpPr>
+        <p:spPr>
+          <a:xfrm>
+            <a:off x="6172200" y="4645152"/>
+            <a:ext cx="22860" cy="329184"/>
+          </a:xfrm>
+          <a:prstGeom prst="rect">
+            <a:avLst/>
+          </a:prstGeom>
+          <a:solidFill>
+            <a:srgbClr val="F8FAFC"/>
+          </a:solidFill>
+          <a:ln>
+            <a:noFill/>
+          </a:ln>
+        </p:spPr>
+        <p:style>
+          <a:lnRef idx="1">
+            <a:schemeClr val="accent1"/>
+          </a:lnRef>
+          <a:fillRef idx="3">
+            <a:schemeClr val="accent1"/>
+          </a:fillRef>
+          <a:effectRef idx="2">
+            <a:schemeClr val="accent1"/>
+          </a:effectRef>
+          <a:fontRef idx="minor">
+            <a:schemeClr val="lt1"/>
+          </a:fontRef>
+        </p:style>
+        <p:txBody>
+          <a:bodyPr rtlCol="0" anchor="ctr"/>
+          <a:lstStyle/>
+          <a:p>
+            <a:pPr algn="ctr"/>
+          </a:p>
+        </p:txBody>
+      </p:sp>
+      <p:sp>
+        <p:nvSpPr>
+          <p:cNvPr id="25" name="Rectangle 24"/>
+          <p:cNvSpPr/>
+          <p:nvPr/>
+        </p:nvSpPr>
+        <p:spPr>
+          <a:xfrm>
+            <a:off x="10515600" y="4645152"/>
+            <a:ext cx="22860" cy="329184"/>
+          </a:xfrm>
+          <a:prstGeom prst="rect">
+            <a:avLst/>
+          </a:prstGeom>
+          <a:solidFill>
+            <a:srgbClr val="F8FAFC"/>
+          </a:solidFill>
+          <a:ln>
+            <a:noFill/>
+          </a:ln>
+        </p:spPr>
+        <p:style>
+          <a:lnRef idx="1">
+            <a:schemeClr val="accent1"/>
+          </a:lnRef>
+          <a:fillRef idx="3">
+            <a:schemeClr val="accent1"/>
+          </a:fillRef>
+          <a:effectRef idx="2">
+            <a:schemeClr val="accent1"/>
+          </a:effectRef>
+          <a:fontRef idx="minor">
+            <a:schemeClr val="lt1"/>
+          </a:fontRef>
+        </p:style>
+        <p:txBody>
+          <a:bodyPr rtlCol="0" anchor="ctr"/>
+          <a:lstStyle/>
+          <a:p>
+            <a:pPr algn="ctr"/>
+          </a:p>
+        </p:txBody>
+      </p:sp>
+      <p:sp>
+        <p:nvSpPr>
+          <p:cNvPr id="26" name="TextBox 25"/>
+          <p:cNvSpPr txBox="1"/>
+          <p:nvPr/>
+        </p:nvSpPr>
+        <p:spPr>
+          <a:xfrm>
+            <a:off x="1828800" y="5230368"/>
+            <a:ext cx="1371600" cy="274320"/>
+          </a:xfrm>
+          <a:prstGeom prst="rect">
+            <a:avLst/>
+          </a:prstGeom>
+          <a:noFill/>
+        </p:spPr>
+        <p:txBody>
+          <a:bodyPr wrap="none" anchor="ctr">
+            <a:spAutoFit/>
+          </a:bodyPr>
+          <a:lstStyle/>
+          <a:p>
+            <a:pPr algn="l"/>
+            <a:r>
+              <a:rPr sz="1000" b="1">
+                <a:solidFill>
+                  <a:srgbClr val="DCE4F0"/>
+                </a:solidFill>
+                <a:latin typeface="Aptos"/>
+              </a:rPr>
+              <a:t>-19,079.85</a:t>
+            </a:r>
+          </a:p>
+        </p:txBody>
+      </p:sp>
+      <p:sp>
+        <p:nvSpPr>
+          <p:cNvPr id="27" name="TextBox 26"/>
+          <p:cNvSpPr txBox="1"/>
+          <p:nvPr/>
+        </p:nvSpPr>
+        <p:spPr>
+          <a:xfrm>
+            <a:off x="5943600" y="5230368"/>
+            <a:ext cx="457200" cy="274320"/>
+          </a:xfrm>
+          <a:prstGeom prst="rect">
+            <a:avLst/>
+          </a:prstGeom>
+          <a:noFill/>
+        </p:spPr>
+        <p:txBody>
+          <a:bodyPr wrap="none" anchor="ctr">
+            <a:spAutoFit/>
+          </a:bodyPr>
+          <a:lstStyle/>
+          <a:p>
+            <a:pPr algn="ctr"/>
+            <a:r>
+              <a:rPr sz="1000" b="1">
+                <a:solidFill>
+                  <a:srgbClr val="F8FAFC"/>
+                </a:solidFill>
+                <a:latin typeface="Aptos"/>
+              </a:rPr>
+              <a:t>0</a:t>
+            </a:r>
+          </a:p>
+        </p:txBody>
+      </p:sp>
+      <p:sp>
+        <p:nvSpPr>
+          <p:cNvPr id="28" name="TextBox 27"/>
+          <p:cNvSpPr txBox="1"/>
+          <p:nvPr/>
+        </p:nvSpPr>
+        <p:spPr>
+          <a:xfrm>
+            <a:off x="9144000" y="5230368"/>
+            <a:ext cx="1371600" cy="274320"/>
+          </a:xfrm>
+          <a:prstGeom prst="rect">
+            <a:avLst/>
+          </a:prstGeom>
+          <a:noFill/>
+        </p:spPr>
+        <p:txBody>
+          <a:bodyPr wrap="none" anchor="ctr">
+            <a:spAutoFit/>
+          </a:bodyPr>
+          <a:lstStyle/>
+          <a:p>
+            <a:pPr algn="r"/>
+            <a:r>
+              <a:rPr sz="1000" b="1">
+                <a:solidFill>
+                  <a:srgbClr val="DCE4F0"/>
+                </a:solidFill>
+                <a:latin typeface="Aptos"/>
+              </a:rPr>
+              <a:t>9,231.58</a:t>
+            </a:r>
+          </a:p>
+        </p:txBody>
+      </p:sp>
+      <p:sp>
+        <p:nvSpPr>
+          <p:cNvPr id="29" name="TextBox 28"/>
+          <p:cNvSpPr txBox="1"/>
+          <p:nvPr/>
+        </p:nvSpPr>
+        <p:spPr>
+          <a:xfrm>
+            <a:off x="2011680" y="5760720"/>
+            <a:ext cx="8138160" cy="365760"/>
+          </a:xfrm>
+          <a:prstGeom prst="rect">
+            <a:avLst/>
+          </a:prstGeom>
+          <a:noFill/>
+        </p:spPr>
+        <p:txBody>
+          <a:bodyPr wrap="none" anchor="ctr">
+            <a:spAutoFit/>
+          </a:bodyPr>
+          <a:lstStyle/>
+          <a:p>
+            <a:pPr algn="ctr"/>
+            <a:r>
+              <a:rPr sz="1400" b="1">
+                <a:solidFill>
+                  <a:srgbClr val="F8FAFC"/>
+                </a:solidFill>
+                <a:latin typeface="Aptos"/>
+              </a:rPr>
+              <a:t>The confidence interval includes 0 — consistent with the p-value.</a:t>
+            </a:r>
+          </a:p>
+        </p:txBody>
+      </p:sp>
+    </p:spTree>
+  </p:cSld>
+  <p:clrMapOvr>
+    <a:masterClrMapping/>
+  </p:clrMapOvr>
+</p:sld>
+</file>
+
+<file path=ppt/slides/slide7.xml><?xml version="1.0" encoding="utf-8"?>
+<p:sld xmlns:a="http://schemas.openxmlformats.org/drawingml/2006/main" xmlns:p="http://schemas.openxmlformats.org/presentationml/2006/main" xmlns:r="http://schemas.openxmlformats.org/officeDocument/2006/relationships">
+  <p:cSld>
+    <p:spTree>
+      <p:nvGrpSpPr>
+        <p:cNvPr id="1" name=""/>
+        <p:cNvGrpSpPr/>
+        <p:nvPr/>
+      </p:nvGrpSpPr>
+      <p:grpSpPr/>
+      <p:sp>
+        <p:nvSpPr>
+          <p:cNvPr id="2" name="Rectangle 1"/>
+          <p:cNvSpPr/>
+          <p:nvPr/>
+        </p:nvSpPr>
+        <p:spPr>
+          <a:xfrm>
+            <a:off x="0" y="0"/>
+            <a:ext cx="12191695" cy="6858000"/>
+          </a:xfrm>
+          <a:prstGeom prst="rect">
+            <a:avLst/>
+          </a:prstGeom>
+          <a:solidFill>
+            <a:srgbClr val="0C1426"/>
+          </a:solidFill>
+          <a:ln>
+            <a:noFill/>
+          </a:ln>
+        </p:spPr>
+        <p:style>
+          <a:lnRef idx="1">
+            <a:schemeClr val="accent1"/>
+          </a:lnRef>
+          <a:fillRef idx="3">
+            <a:schemeClr val="accent1"/>
+          </a:fillRef>
+          <a:effectRef idx="2">
+            <a:schemeClr val="accent1"/>
+          </a:effectRef>
+          <a:fontRef idx="minor">
+            <a:schemeClr val="lt1"/>
+          </a:fontRef>
+        </p:style>
+        <p:txBody>
+          <a:bodyPr rtlCol="0" anchor="ctr"/>
+          <a:lstStyle/>
+          <a:p>
+            <a:pPr algn="ctr"/>
+          </a:p>
+        </p:txBody>
+      </p:sp>
+      <p:sp>
+        <p:nvSpPr>
+          <p:cNvPr id="3" name="TextBox 2"/>
+          <p:cNvSpPr txBox="1"/>
+          <p:nvPr/>
+        </p:nvSpPr>
+        <p:spPr>
+          <a:xfrm>
+            <a:off x="594360" y="320040"/>
+            <a:ext cx="5486400" cy="274320"/>
+          </a:xfrm>
+          <a:prstGeom prst="rect">
+            <a:avLst/>
+          </a:prstGeom>
+          <a:noFill/>
+        </p:spPr>
+        <p:txBody>
+          <a:bodyPr wrap="none" anchor="ctr">
+            <a:spAutoFit/>
+          </a:bodyPr>
+          <a:lstStyle/>
+          <a:p>
+            <a:pPr algn="l"/>
+            <a:r>
+              <a:rPr sz="1000" b="1">
+                <a:solidFill>
+                  <a:srgbClr val="26BED2"/>
+                </a:solidFill>
+                <a:latin typeface="Aptos"/>
+              </a:rPr>
+              <a:t>DECISION</a:t>
+            </a:r>
+          </a:p>
+        </p:txBody>
+      </p:sp>
+      <p:sp>
+        <p:nvSpPr>
+          <p:cNvPr id="4" name="TextBox 3"/>
+          <p:cNvSpPr txBox="1"/>
+          <p:nvPr/>
+        </p:nvSpPr>
+        <p:spPr>
+          <a:xfrm>
+            <a:off x="594360" y="658368"/>
+            <a:ext cx="10881360" cy="594360"/>
+          </a:xfrm>
+          <a:prstGeom prst="rect">
+            <a:avLst/>
+          </a:prstGeom>
+          <a:noFill/>
+        </p:spPr>
+        <p:txBody>
+          <a:bodyPr wrap="none" anchor="ctr">
+            <a:spAutoFit/>
+          </a:bodyPr>
+          <a:lstStyle/>
+          <a:p>
+            <a:pPr algn="l"/>
+            <a:r>
+              <a:rPr sz="2800" b="1">
+                <a:solidFill>
+                  <a:srgbClr val="F8FAFC"/>
+                </a:solidFill>
+                <a:latin typeface="Aptos"/>
+              </a:rPr>
+              <a:t>Fail to reject H₀ at α = 0.05</a:t>
+            </a:r>
+          </a:p>
+        </p:txBody>
+      </p:sp>
+      <p:sp>
+        <p:nvSpPr>
+          <p:cNvPr id="5" name="TextBox 4"/>
+          <p:cNvSpPr txBox="1"/>
+          <p:nvPr/>
+        </p:nvSpPr>
+        <p:spPr>
+          <a:xfrm>
+            <a:off x="612648" y="1280160"/>
+            <a:ext cx="10698480" cy="365760"/>
+          </a:xfrm>
+          <a:prstGeom prst="rect">
+            <a:avLst/>
+          </a:prstGeom>
+          <a:noFill/>
+        </p:spPr>
+        <p:txBody>
+          <a:bodyPr wrap="none" anchor="ctr">
+            <a:spAutoFit/>
+          </a:bodyPr>
+          <a:lstStyle/>
+          <a:p>
+            <a:pPr algn="l"/>
+            <a:r>
+              <a:rPr sz="1100" b="0">
+                <a:solidFill>
+                  <a:srgbClr val="A0AEC0"/>
+                </a:solidFill>
+                <a:latin typeface="Aptos"/>
+              </a:rPr>
+              <a:t>The available evidence is not sufficient to establish a statistically significant difference in mean transaction sales.</a:t>
+            </a:r>
+          </a:p>
+        </p:txBody>
+      </p:sp>
+      <p:sp>
+        <p:nvSpPr>
+          <p:cNvPr id="6" name="TextBox 5"/>
+          <p:cNvSpPr txBox="1"/>
+          <p:nvPr/>
+        </p:nvSpPr>
+        <p:spPr>
+          <a:xfrm>
+            <a:off x="594360" y="6473952"/>
+            <a:ext cx="5029200" cy="182880"/>
+          </a:xfrm>
+          <a:prstGeom prst="rect">
+            <a:avLst/>
+          </a:prstGeom>
+          <a:noFill/>
+        </p:spPr>
+        <p:txBody>
+          <a:bodyPr wrap="none" anchor="ctr">
+            <a:spAutoFit/>
+          </a:bodyPr>
+          <a:lstStyle/>
+          <a:p>
+            <a:pPr algn="l"/>
+            <a:r>
+              <a:rPr sz="800" b="1">
+                <a:solidFill>
+                  <a:srgbClr val="A0AEC0"/>
+                </a:solidFill>
+                <a:latin typeface="Aptos"/>
+              </a:rPr>
+              <a:t>APEXPLANET • DATA ANALYTICS INTERNSHIP</a:t>
+            </a:r>
+          </a:p>
+        </p:txBody>
+      </p:sp>
+      <p:sp>
+        <p:nvSpPr>
+          <p:cNvPr id="7" name="TextBox 6"/>
+          <p:cNvSpPr txBox="1"/>
+          <p:nvPr/>
+        </p:nvSpPr>
+        <p:spPr>
+          <a:xfrm>
+            <a:off x="11018520" y="6446520"/>
+            <a:ext cx="548640" cy="228600"/>
+          </a:xfrm>
+          <a:prstGeom prst="rect">
+            <a:avLst/>
+          </a:prstGeom>
+          <a:noFill/>
+        </p:spPr>
+        <p:txBody>
+          <a:bodyPr wrap="none" anchor="ctr">
+            <a:spAutoFit/>
+          </a:bodyPr>
+          <a:lstStyle/>
+          <a:p>
+            <a:pPr algn="r"/>
+            <a:r>
+              <a:rPr sz="900" b="1">
+                <a:solidFill>
+                  <a:srgbClr val="A0AEC0"/>
+                </a:solidFill>
+                <a:latin typeface="Aptos"/>
+              </a:rPr>
+              <a:t>07</a:t>
+            </a:r>
+          </a:p>
+        </p:txBody>
+      </p:sp>
+      <p:sp>
+        <p:nvSpPr>
+          <p:cNvPr id="8" name="TextBox 7"/>
+          <p:cNvSpPr txBox="1"/>
+          <p:nvPr/>
+        </p:nvSpPr>
+        <p:spPr>
+          <a:xfrm>
+            <a:off x="914400" y="2057400"/>
+            <a:ext cx="2926080" cy="502920"/>
+          </a:xfrm>
+          <a:prstGeom prst="rect">
+            <a:avLst/>
+          </a:prstGeom>
+          <a:noFill/>
+        </p:spPr>
+        <p:txBody>
+          <a:bodyPr wrap="none" anchor="ctr">
+            <a:spAutoFit/>
+          </a:bodyPr>
+          <a:lstStyle/>
+          <a:p>
+            <a:pPr algn="ctr"/>
+            <a:r>
+              <a:rPr sz="2800" b="1">
+                <a:solidFill>
+                  <a:srgbClr val="F8FAFC"/>
+                </a:solidFill>
+                <a:latin typeface="Aptos"/>
+              </a:rPr>
+              <a:t>0.495011</a:t>
+            </a:r>
+          </a:p>
+        </p:txBody>
+      </p:sp>
+      <p:sp>
+        <p:nvSpPr>
+          <p:cNvPr id="9" name="TextBox 8"/>
+          <p:cNvSpPr txBox="1"/>
+          <p:nvPr/>
+        </p:nvSpPr>
+        <p:spPr>
+          <a:xfrm>
+            <a:off x="3977639" y="2057400"/>
+            <a:ext cx="457200" cy="502920"/>
+          </a:xfrm>
+          <a:prstGeom prst="rect">
+            <a:avLst/>
+          </a:prstGeom>
+          <a:noFill/>
+        </p:spPr>
+        <p:txBody>
+          <a:bodyPr wrap="none" anchor="ctr">
+            <a:spAutoFit/>
+          </a:bodyPr>
+          <a:lstStyle/>
+          <a:p>
+            <a:pPr algn="ctr"/>
+            <a:r>
+              <a:rPr sz="2800" b="1">
+                <a:solidFill>
+                  <a:srgbClr val="A0AEC0"/>
+                </a:solidFill>
+                <a:latin typeface="Aptos"/>
+              </a:rPr>
+              <a:t>&gt;</a:t>
+            </a:r>
+          </a:p>
+        </p:txBody>
+      </p:sp>
+      <p:sp>
+        <p:nvSpPr>
+          <p:cNvPr id="10" name="TextBox 9"/>
+          <p:cNvSpPr txBox="1"/>
+          <p:nvPr/>
+        </p:nvSpPr>
+        <p:spPr>
+          <a:xfrm>
+            <a:off x="4617720" y="2057400"/>
+            <a:ext cx="2011680" cy="502920"/>
+          </a:xfrm>
+          <a:prstGeom prst="rect">
+            <a:avLst/>
+          </a:prstGeom>
+          <a:noFill/>
+        </p:spPr>
+        <p:txBody>
+          <a:bodyPr wrap="none" anchor="ctr">
+            <a:spAutoFit/>
+          </a:bodyPr>
+          <a:lstStyle/>
+          <a:p>
+            <a:pPr algn="ctr"/>
+            <a:r>
+              <a:rPr sz="2800" b="1">
+                <a:solidFill>
+                  <a:srgbClr val="F8FAFC"/>
+                </a:solidFill>
+                <a:latin typeface="Aptos"/>
+              </a:rPr>
+              <a:t>0.05</a:t>
+            </a:r>
+          </a:p>
+        </p:txBody>
+      </p:sp>
+      <p:sp>
+        <p:nvSpPr>
+          <p:cNvPr id="11" name="Rounded Rectangle 10"/>
+          <p:cNvSpPr/>
+          <p:nvPr/>
+        </p:nvSpPr>
+        <p:spPr>
+          <a:xfrm>
+            <a:off x="7315200" y="1828800"/>
+            <a:ext cx="3840480" cy="1188720"/>
+          </a:xfrm>
+          <a:prstGeom prst="roundRect">
+            <a:avLst/>
+          </a:prstGeom>
+          <a:solidFill>
+            <a:srgbClr val="05503C"/>
+          </a:solidFill>
+          <a:ln>
+            <a:solidFill>
+              <a:srgbClr val="28BE87"/>
+            </a:solidFill>
+          </a:ln>
+        </p:spPr>
+        <p:style>
+          <a:lnRef idx="1">
+            <a:schemeClr val="accent1"/>
+          </a:lnRef>
+          <a:fillRef idx="3">
+            <a:schemeClr val="accent1"/>
+          </a:fillRef>
+          <a:effectRef idx="2">
+            <a:schemeClr val="accent1"/>
+          </a:effectRef>
+          <a:fontRef idx="minor">
+            <a:schemeClr val="lt1"/>
+          </a:fontRef>
+        </p:style>
+        <p:txBody>
+          <a:bodyPr rtlCol="0" anchor="ctr"/>
+          <a:lstStyle/>
+          <a:p>
+            <a:pPr algn="ctr"/>
+          </a:p>
+        </p:txBody>
+      </p:sp>
+      <p:sp>
+        <p:nvSpPr>
+          <p:cNvPr id="12" name="TextBox 11"/>
+          <p:cNvSpPr txBox="1"/>
+          <p:nvPr/>
+        </p:nvSpPr>
+        <p:spPr>
+          <a:xfrm>
+            <a:off x="7498079" y="2121408"/>
+            <a:ext cx="3474720" cy="411480"/>
+          </a:xfrm>
+          <a:prstGeom prst="rect">
+            <a:avLst/>
+          </a:prstGeom>
+          <a:noFill/>
+        </p:spPr>
+        <p:txBody>
+          <a:bodyPr wrap="none" anchor="ctr">
+            <a:spAutoFit/>
+          </a:bodyPr>
+          <a:lstStyle/>
+          <a:p>
+            <a:pPr algn="ctr"/>
+            <a:r>
+              <a:rPr sz="2200" b="1">
+                <a:solidFill>
+                  <a:srgbClr val="F8FAFC"/>
+                </a:solidFill>
+                <a:latin typeface="Aptos"/>
+              </a:rPr>
+              <a:t>FAIL TO REJECT H₀</a:t>
+            </a:r>
+          </a:p>
+        </p:txBody>
+      </p:sp>
+      <p:sp>
+        <p:nvSpPr>
+          <p:cNvPr id="13" name="TextBox 12"/>
+          <p:cNvSpPr txBox="1"/>
+          <p:nvPr/>
+        </p:nvSpPr>
+        <p:spPr>
+          <a:xfrm>
+            <a:off x="822960" y="3886200"/>
+            <a:ext cx="182880" cy="274320"/>
+          </a:xfrm>
+          <a:prstGeom prst="rect">
+            <a:avLst/>
+          </a:prstGeom>
+          <a:noFill/>
+        </p:spPr>
+        <p:txBody>
+          <a:bodyPr wrap="none" anchor="ctr">
+            <a:spAutoFit/>
+          </a:bodyPr>
+          <a:lstStyle/>
+          <a:p>
+            <a:pPr algn="l"/>
+            <a:r>
+              <a:rPr sz="1500" b="1">
+                <a:solidFill>
+                  <a:srgbClr val="26BED2"/>
+                </a:solidFill>
+                <a:latin typeface="Aptos"/>
+              </a:rPr>
+              <a:t>•</a:t>
+            </a:r>
+          </a:p>
+        </p:txBody>
+      </p:sp>
+      <p:sp>
+        <p:nvSpPr>
+          <p:cNvPr id="14" name="TextBox 13"/>
+          <p:cNvSpPr txBox="1"/>
+          <p:nvPr/>
+        </p:nvSpPr>
+        <p:spPr>
+          <a:xfrm>
+            <a:off x="1078992" y="3886200"/>
+            <a:ext cx="10076688" cy="502920"/>
+          </a:xfrm>
+          <a:prstGeom prst="rect">
+            <a:avLst/>
+          </a:prstGeom>
+          <a:noFill/>
+        </p:spPr>
+        <p:txBody>
+          <a:bodyPr wrap="none" anchor="ctr">
+            <a:spAutoFit/>
+          </a:bodyPr>
+          <a:lstStyle/>
+          <a:p>
+            <a:pPr algn="l"/>
+            <a:r>
+              <a:rPr sz="1500" b="0">
+                <a:solidFill>
+                  <a:srgbClr val="F8FAFC"/>
+                </a:solidFill>
+                <a:latin typeface="Aptos"/>
+              </a:rPr>
+              <a:t>The test does not provide sufficient evidence to reject the equality of mean transaction sales.</a:t>
+            </a:r>
+          </a:p>
+        </p:txBody>
+      </p:sp>
+      <p:sp>
+        <p:nvSpPr>
+          <p:cNvPr id="15" name="TextBox 14"/>
+          <p:cNvSpPr txBox="1"/>
+          <p:nvPr/>
+        </p:nvSpPr>
+        <p:spPr>
+          <a:xfrm>
+            <a:off x="822960" y="4709160"/>
+            <a:ext cx="182880" cy="274320"/>
+          </a:xfrm>
+          <a:prstGeom prst="rect">
+            <a:avLst/>
+          </a:prstGeom>
+          <a:noFill/>
+        </p:spPr>
+        <p:txBody>
+          <a:bodyPr wrap="none" anchor="ctr">
+            <a:spAutoFit/>
+          </a:bodyPr>
+          <a:lstStyle/>
+          <a:p>
+            <a:pPr algn="l"/>
+            <a:r>
+              <a:rPr sz="1500" b="1">
+                <a:solidFill>
+                  <a:srgbClr val="26BED2"/>
+                </a:solidFill>
+                <a:latin typeface="Aptos"/>
+              </a:rPr>
+              <a:t>•</a:t>
+            </a:r>
+          </a:p>
+        </p:txBody>
+      </p:sp>
+      <p:sp>
+        <p:nvSpPr>
+          <p:cNvPr id="16" name="TextBox 15"/>
+          <p:cNvSpPr txBox="1"/>
+          <p:nvPr/>
+        </p:nvSpPr>
+        <p:spPr>
+          <a:xfrm>
+            <a:off x="1078992" y="4709160"/>
+            <a:ext cx="10076688" cy="502920"/>
+          </a:xfrm>
+          <a:prstGeom prst="rect">
+            <a:avLst/>
+          </a:prstGeom>
+          <a:noFill/>
+        </p:spPr>
+        <p:txBody>
+          <a:bodyPr wrap="none" anchor="ctr">
+            <a:spAutoFit/>
+          </a:bodyPr>
+          <a:lstStyle/>
+          <a:p>
+            <a:pPr algn="l"/>
+            <a:r>
+              <a:rPr sz="1500" b="0">
+                <a:solidFill>
+                  <a:srgbClr val="F8FAFC"/>
+                </a:solidFill>
+                <a:latin typeface="Aptos"/>
+              </a:rPr>
+              <a:t>This does not prove the two groups are identical; it describes what this sample supports at the selected threshold.</a:t>
+            </a:r>
+          </a:p>
+        </p:txBody>
+      </p:sp>
+    </p:spTree>
+  </p:cSld>
+  <p:clrMapOvr>
+    <a:masterClrMapping/>
+  </p:clrMapOvr>
+</p:sld>
+</file>
+
+<file path=ppt/slides/slide8.xml><?xml version="1.0" encoding="utf-8"?>
+<p:sld xmlns:a="http://schemas.openxmlformats.org/drawingml/2006/main" xmlns:p="http://schemas.openxmlformats.org/presentationml/2006/main" xmlns:r="http://schemas.openxmlformats.org/officeDocument/2006/relationships">
+  <p:cSld>
+    <p:spTree>
+      <p:nvGrpSpPr>
+        <p:cNvPr id="1" name=""/>
+        <p:cNvGrpSpPr/>
+        <p:nvPr/>
+      </p:nvGrpSpPr>
+      <p:grpSpPr/>
+      <p:sp>
+        <p:nvSpPr>
+          <p:cNvPr id="2" name="Rectangle 1"/>
+          <p:cNvSpPr/>
+          <p:nvPr/>
+        </p:nvSpPr>
+        <p:spPr>
+          <a:xfrm>
+            <a:off x="0" y="0"/>
+            <a:ext cx="12191695" cy="6858000"/>
+          </a:xfrm>
+          <a:prstGeom prst="rect">
+            <a:avLst/>
+          </a:prstGeom>
+          <a:solidFill>
+            <a:srgbClr val="0C1426"/>
+          </a:solidFill>
+          <a:ln>
+            <a:noFill/>
+          </a:ln>
+        </p:spPr>
+        <p:style>
+          <a:lnRef idx="1">
+            <a:schemeClr val="accent1"/>
+          </a:lnRef>
+          <a:fillRef idx="3">
+            <a:schemeClr val="accent1"/>
+          </a:fillRef>
+          <a:effectRef idx="2">
+            <a:schemeClr val="accent1"/>
+          </a:effectRef>
+          <a:fontRef idx="minor">
+            <a:schemeClr val="lt1"/>
+          </a:fontRef>
+        </p:style>
+        <p:txBody>
+          <a:bodyPr rtlCol="0" anchor="ctr"/>
+          <a:lstStyle/>
+          <a:p>
+            <a:pPr algn="ctr"/>
+          </a:p>
+        </p:txBody>
+      </p:sp>
+      <p:sp>
+        <p:nvSpPr>
+          <p:cNvPr id="3" name="TextBox 2"/>
+          <p:cNvSpPr txBox="1"/>
+          <p:nvPr/>
+        </p:nvSpPr>
+        <p:spPr>
+          <a:xfrm>
+            <a:off x="594360" y="320040"/>
+            <a:ext cx="5486400" cy="274320"/>
+          </a:xfrm>
+          <a:prstGeom prst="rect">
+            <a:avLst/>
+          </a:prstGeom>
+          <a:noFill/>
+        </p:spPr>
+        <p:txBody>
+          <a:bodyPr wrap="none" anchor="ctr">
+            <a:spAutoFit/>
+          </a:bodyPr>
+          <a:lstStyle/>
+          <a:p>
+            <a:pPr algn="l"/>
+            <a:r>
+              <a:rPr sz="1000" b="1">
+                <a:solidFill>
+                  <a:srgbClr val="26BED2"/>
+                </a:solidFill>
+                <a:latin typeface="Aptos"/>
+              </a:rPr>
+              <a:t>BUSINESS INTERPRETATION</a:t>
+            </a:r>
+          </a:p>
+        </p:txBody>
+      </p:sp>
+      <p:sp>
+        <p:nvSpPr>
+          <p:cNvPr id="4" name="TextBox 3"/>
+          <p:cNvSpPr txBox="1"/>
+          <p:nvPr/>
+        </p:nvSpPr>
+        <p:spPr>
+          <a:xfrm>
+            <a:off x="594360" y="658368"/>
+            <a:ext cx="10881360" cy="594360"/>
+          </a:xfrm>
+          <a:prstGeom prst="rect">
+            <a:avLst/>
+          </a:prstGeom>
+          <a:noFill/>
+        </p:spPr>
+        <p:txBody>
+          <a:bodyPr wrap="none" anchor="ctr">
+            <a:spAutoFit/>
+          </a:bodyPr>
+          <a:lstStyle/>
+          <a:p>
+            <a:pPr algn="l"/>
+            <a:r>
+              <a:rPr sz="2800" b="1">
+                <a:solidFill>
+                  <a:srgbClr val="F8FAFC"/>
+                </a:solidFill>
+                <a:latin typeface="Aptos"/>
+              </a:rPr>
+              <a:t>Turn the statistic back into a business story</a:t>
+            </a:r>
+          </a:p>
+        </p:txBody>
+      </p:sp>
+      <p:sp>
+        <p:nvSpPr>
+          <p:cNvPr id="5" name="TextBox 4"/>
+          <p:cNvSpPr txBox="1"/>
+          <p:nvPr/>
+        </p:nvSpPr>
+        <p:spPr>
+          <a:xfrm>
+            <a:off x="612648" y="1280160"/>
+            <a:ext cx="10698480" cy="365760"/>
+          </a:xfrm>
+          <a:prstGeom prst="rect">
+            <a:avLst/>
+          </a:prstGeom>
+          <a:noFill/>
+        </p:spPr>
+        <p:txBody>
+          <a:bodyPr wrap="none" anchor="ctr">
+            <a:spAutoFit/>
+          </a:bodyPr>
+          <a:lstStyle/>
+          <a:p>
+            <a:pPr algn="l"/>
+            <a:r>
+              <a:rPr sz="1100" b="0">
+                <a:solidFill>
+                  <a:srgbClr val="A0AEC0"/>
+                </a:solidFill>
+                <a:latin typeface="Aptos"/>
+              </a:rPr>
+              <a:t>Use descriptive dashboard findings and statistical validation together.</a:t>
+            </a:r>
+          </a:p>
+        </p:txBody>
+      </p:sp>
+      <p:sp>
+        <p:nvSpPr>
+          <p:cNvPr id="6" name="TextBox 5"/>
+          <p:cNvSpPr txBox="1"/>
+          <p:nvPr/>
+        </p:nvSpPr>
+        <p:spPr>
+          <a:xfrm>
+            <a:off x="594360" y="6473952"/>
+            <a:ext cx="5029200" cy="182880"/>
+          </a:xfrm>
+          <a:prstGeom prst="rect">
+            <a:avLst/>
+          </a:prstGeom>
+          <a:noFill/>
+        </p:spPr>
+        <p:txBody>
+          <a:bodyPr wrap="none" anchor="ctr">
+            <a:spAutoFit/>
+          </a:bodyPr>
+          <a:lstStyle/>
+          <a:p>
+            <a:pPr algn="l"/>
+            <a:r>
+              <a:rPr sz="800" b="1">
+                <a:solidFill>
+                  <a:srgbClr val="A0AEC0"/>
+                </a:solidFill>
+                <a:latin typeface="Aptos"/>
+              </a:rPr>
+              <a:t>APEXPLANET • DATA ANALYTICS INTERNSHIP</a:t>
+            </a:r>
+          </a:p>
+        </p:txBody>
+      </p:sp>
+      <p:sp>
+        <p:nvSpPr>
+          <p:cNvPr id="7" name="TextBox 6"/>
+          <p:cNvSpPr txBox="1"/>
+          <p:nvPr/>
+        </p:nvSpPr>
+        <p:spPr>
+          <a:xfrm>
+            <a:off x="11018520" y="6446520"/>
+            <a:ext cx="548640" cy="228600"/>
+          </a:xfrm>
+          <a:prstGeom prst="rect">
+            <a:avLst/>
+          </a:prstGeom>
+          <a:noFill/>
+        </p:spPr>
+        <p:txBody>
+          <a:bodyPr wrap="none" anchor="ctr">
+            <a:spAutoFit/>
+          </a:bodyPr>
+          <a:lstStyle/>
+          <a:p>
+            <a:pPr algn="r"/>
+            <a:r>
+              <a:rPr sz="900" b="1">
+                <a:solidFill>
+                  <a:srgbClr val="A0AEC0"/>
+                </a:solidFill>
+                <a:latin typeface="Aptos"/>
+              </a:rPr>
+              <a:t>08</a:t>
+            </a:r>
+          </a:p>
+        </p:txBody>
+      </p:sp>
+      <p:sp>
+        <p:nvSpPr>
+          <p:cNvPr id="8" name="Rounded Rectangle 7"/>
+          <p:cNvSpPr/>
+          <p:nvPr/>
+        </p:nvSpPr>
+        <p:spPr>
+          <a:xfrm>
+            <a:off x="685800" y="1874519"/>
+            <a:ext cx="3337560" cy="1828800"/>
+          </a:xfrm>
+          <a:prstGeom prst="roundRect">
+            <a:avLst/>
+          </a:prstGeom>
+          <a:solidFill>
+            <a:srgbClr val="18233A"/>
+          </a:solidFill>
+          <a:ln>
+            <a:solidFill>
+              <a:srgbClr val="374660"/>
+            </a:solidFill>
+          </a:ln>
+        </p:spPr>
+        <p:style>
+          <a:lnRef idx="1">
+            <a:schemeClr val="accent1"/>
+          </a:lnRef>
+          <a:fillRef idx="3">
+            <a:schemeClr val="accent1"/>
+          </a:fillRef>
+          <a:effectRef idx="2">
+            <a:schemeClr val="accent1"/>
+          </a:effectRef>
+          <a:fontRef idx="minor">
+            <a:schemeClr val="lt1"/>
+          </a:fontRef>
+        </p:style>
+        <p:txBody>
+          <a:bodyPr rtlCol="0" anchor="ctr"/>
+          <a:lstStyle/>
+          <a:p>
+            <a:pPr algn="ctr"/>
+          </a:p>
+        </p:txBody>
+      </p:sp>
+      <p:sp>
+        <p:nvSpPr>
+          <p:cNvPr id="9" name="TextBox 8"/>
+          <p:cNvSpPr txBox="1"/>
+          <p:nvPr/>
+        </p:nvSpPr>
+        <p:spPr>
+          <a:xfrm>
+            <a:off x="868680" y="2039112"/>
+            <a:ext cx="2971800" cy="438912"/>
+          </a:xfrm>
+          <a:prstGeom prst="rect">
+            <a:avLst/>
+          </a:prstGeom>
+          <a:noFill/>
+        </p:spPr>
+        <p:txBody>
+          <a:bodyPr wrap="none" anchor="ctr">
+            <a:spAutoFit/>
+          </a:bodyPr>
+          <a:lstStyle/>
+          <a:p>
+            <a:pPr algn="l"/>
+            <a:r>
+              <a:rPr sz="2100" b="1">
+                <a:solidFill>
+                  <a:srgbClr val="F8FAFC"/>
+                </a:solidFill>
+                <a:latin typeface="Aptos"/>
+              </a:rPr>
+              <a:t>DESCRIPTIVE</a:t>
+            </a:r>
+          </a:p>
+        </p:txBody>
+      </p:sp>
+      <p:sp>
+        <p:nvSpPr>
+          <p:cNvPr id="10" name="TextBox 9"/>
+          <p:cNvSpPr txBox="1"/>
+          <p:nvPr/>
+        </p:nvSpPr>
+        <p:spPr>
+          <a:xfrm>
+            <a:off x="868680" y="2587752"/>
+            <a:ext cx="2971800" cy="228600"/>
+          </a:xfrm>
+          <a:prstGeom prst="rect">
+            <a:avLst/>
+          </a:prstGeom>
+          <a:noFill/>
+        </p:spPr>
+        <p:txBody>
+          <a:bodyPr wrap="none" anchor="ctr">
+            <a:spAutoFit/>
+          </a:bodyPr>
+          <a:lstStyle/>
+          <a:p>
+            <a:pPr algn="l"/>
+            <a:r>
+              <a:rPr sz="800" b="1">
+                <a:solidFill>
+                  <a:srgbClr val="A0AEC0"/>
+                </a:solidFill>
+                <a:latin typeface="Aptos"/>
+              </a:rPr>
+              <a:t>GENDER TOTALS DIFFER</a:t>
+            </a:r>
+          </a:p>
+        </p:txBody>
+      </p:sp>
+      <p:sp>
+        <p:nvSpPr>
+          <p:cNvPr id="11" name="Rectangle 10"/>
+          <p:cNvSpPr/>
+          <p:nvPr/>
+        </p:nvSpPr>
+        <p:spPr>
+          <a:xfrm>
+            <a:off x="685800" y="1874519"/>
+            <a:ext cx="50292" cy="1828800"/>
+          </a:xfrm>
+          <a:prstGeom prst="rect">
+            <a:avLst/>
+          </a:prstGeom>
+          <a:solidFill>
+            <a:srgbClr val="366EE6"/>
+          </a:solidFill>
+          <a:ln>
+            <a:noFill/>
+          </a:ln>
+        </p:spPr>
+        <p:style>
+          <a:lnRef idx="1">
+            <a:schemeClr val="accent1"/>
+          </a:lnRef>
+          <a:fillRef idx="3">
+            <a:schemeClr val="accent1"/>
+          </a:fillRef>
+          <a:effectRef idx="2">
+            <a:schemeClr val="accent1"/>
+          </a:effectRef>
+          <a:fontRef idx="minor">
+            <a:schemeClr val="lt1"/>
+          </a:fontRef>
+        </p:style>
+        <p:txBody>
+          <a:bodyPr rtlCol="0" anchor="ctr"/>
+          <a:lstStyle/>
+          <a:p>
+            <a:pPr algn="ctr"/>
+          </a:p>
+        </p:txBody>
+      </p:sp>
+      <p:sp>
+        <p:nvSpPr>
+          <p:cNvPr id="12" name="Rounded Rectangle 11"/>
+          <p:cNvSpPr/>
+          <p:nvPr/>
+        </p:nvSpPr>
+        <p:spPr>
+          <a:xfrm>
+            <a:off x="4434840" y="1874519"/>
+            <a:ext cx="3337560" cy="1828800"/>
+          </a:xfrm>
+          <a:prstGeom prst="roundRect">
+            <a:avLst/>
+          </a:prstGeom>
+          <a:solidFill>
+            <a:srgbClr val="18233A"/>
+          </a:solidFill>
+          <a:ln>
+            <a:solidFill>
+              <a:srgbClr val="374660"/>
+            </a:solidFill>
+          </a:ln>
+        </p:spPr>
+        <p:style>
+          <a:lnRef idx="1">
+            <a:schemeClr val="accent1"/>
+          </a:lnRef>
+          <a:fillRef idx="3">
+            <a:schemeClr val="accent1"/>
+          </a:fillRef>
+          <a:effectRef idx="2">
+            <a:schemeClr val="accent1"/>
+          </a:effectRef>
+          <a:fontRef idx="minor">
+            <a:schemeClr val="lt1"/>
+          </a:fontRef>
+        </p:style>
+        <p:txBody>
+          <a:bodyPr rtlCol="0" anchor="ctr"/>
+          <a:lstStyle/>
+          <a:p>
+            <a:pPr algn="ctr"/>
+          </a:p>
+        </p:txBody>
+      </p:sp>
+      <p:sp>
+        <p:nvSpPr>
+          <p:cNvPr id="13" name="TextBox 12"/>
+          <p:cNvSpPr txBox="1"/>
+          <p:nvPr/>
+        </p:nvSpPr>
+        <p:spPr>
+          <a:xfrm>
+            <a:off x="4617720" y="2039112"/>
+            <a:ext cx="2971800" cy="438912"/>
+          </a:xfrm>
+          <a:prstGeom prst="rect">
+            <a:avLst/>
+          </a:prstGeom>
+          <a:noFill/>
+        </p:spPr>
+        <p:txBody>
+          <a:bodyPr wrap="none" anchor="ctr">
+            <a:spAutoFit/>
+          </a:bodyPr>
+          <a:lstStyle/>
+          <a:p>
+            <a:pPr algn="l"/>
+            <a:r>
+              <a:rPr sz="2100" b="1">
+                <a:solidFill>
+                  <a:srgbClr val="F8FAFC"/>
+                </a:solidFill>
+                <a:latin typeface="Aptos"/>
+              </a:rPr>
+              <a:t>STATISTICAL</a:t>
+            </a:r>
+          </a:p>
+        </p:txBody>
+      </p:sp>
+      <p:sp>
+        <p:nvSpPr>
+          <p:cNvPr id="14" name="TextBox 13"/>
+          <p:cNvSpPr txBox="1"/>
+          <p:nvPr/>
+        </p:nvSpPr>
+        <p:spPr>
+          <a:xfrm>
+            <a:off x="4617720" y="2587752"/>
+            <a:ext cx="2971800" cy="228600"/>
+          </a:xfrm>
+          <a:prstGeom prst="rect">
+            <a:avLst/>
+          </a:prstGeom>
+          <a:noFill/>
+        </p:spPr>
+        <p:txBody>
+          <a:bodyPr wrap="none" anchor="ctr">
+            <a:spAutoFit/>
+          </a:bodyPr>
+          <a:lstStyle/>
+          <a:p>
+            <a:pPr algn="l"/>
+            <a:r>
+              <a:rPr sz="800" b="1">
+                <a:solidFill>
+                  <a:srgbClr val="A0AEC0"/>
+                </a:solidFill>
+                <a:latin typeface="Aptos"/>
+              </a:rPr>
+              <a:t>MEAN DIFFERENCE NOT SIGNIFICANT</a:t>
+            </a:r>
+          </a:p>
+        </p:txBody>
+      </p:sp>
+      <p:sp>
+        <p:nvSpPr>
+          <p:cNvPr id="15" name="Rectangle 14"/>
+          <p:cNvSpPr/>
+          <p:nvPr/>
+        </p:nvSpPr>
+        <p:spPr>
+          <a:xfrm>
+            <a:off x="4434840" y="1874519"/>
+            <a:ext cx="50292" cy="1828800"/>
+          </a:xfrm>
+          <a:prstGeom prst="rect">
+            <a:avLst/>
+          </a:prstGeom>
+          <a:solidFill>
+            <a:srgbClr val="26BED2"/>
+          </a:solidFill>
+          <a:ln>
+            <a:noFill/>
+          </a:ln>
+        </p:spPr>
+        <p:style>
+          <a:lnRef idx="1">
+            <a:schemeClr val="accent1"/>
+          </a:lnRef>
+          <a:fillRef idx="3">
+            <a:schemeClr val="accent1"/>
+          </a:fillRef>
+          <a:effectRef idx="2">
+            <a:schemeClr val="accent1"/>
+          </a:effectRef>
+          <a:fontRef idx="minor">
+            <a:schemeClr val="lt1"/>
+          </a:fontRef>
+        </p:style>
+        <p:txBody>
+          <a:bodyPr rtlCol="0" anchor="ctr"/>
+          <a:lstStyle/>
+          <a:p>
+            <a:pPr algn="ctr"/>
+          </a:p>
+        </p:txBody>
+      </p:sp>
+      <p:sp>
+        <p:nvSpPr>
+          <p:cNvPr id="16" name="Rounded Rectangle 15"/>
+          <p:cNvSpPr/>
+          <p:nvPr/>
+        </p:nvSpPr>
+        <p:spPr>
+          <a:xfrm>
+            <a:off x="8183879" y="1874519"/>
+            <a:ext cx="3337560" cy="1828800"/>
+          </a:xfrm>
+          <a:prstGeom prst="roundRect">
+            <a:avLst/>
+          </a:prstGeom>
+          <a:solidFill>
+            <a:srgbClr val="18233A"/>
+          </a:solidFill>
+          <a:ln>
+            <a:solidFill>
+              <a:srgbClr val="374660"/>
+            </a:solidFill>
+          </a:ln>
+        </p:spPr>
+        <p:style>
+          <a:lnRef idx="1">
+            <a:schemeClr val="accent1"/>
+          </a:lnRef>
+          <a:fillRef idx="3">
+            <a:schemeClr val="accent1"/>
+          </a:fillRef>
+          <a:effectRef idx="2">
+            <a:schemeClr val="accent1"/>
+          </a:effectRef>
+          <a:fontRef idx="minor">
+            <a:schemeClr val="lt1"/>
+          </a:fontRef>
+        </p:style>
+        <p:txBody>
+          <a:bodyPr rtlCol="0" anchor="ctr"/>
+          <a:lstStyle/>
+          <a:p>
+            <a:pPr algn="ctr"/>
+          </a:p>
+        </p:txBody>
+      </p:sp>
+      <p:sp>
+        <p:nvSpPr>
+          <p:cNvPr id="17" name="TextBox 16"/>
+          <p:cNvSpPr txBox="1"/>
+          <p:nvPr/>
+        </p:nvSpPr>
+        <p:spPr>
+          <a:xfrm>
+            <a:off x="8366759" y="2039112"/>
+            <a:ext cx="2971800" cy="438912"/>
+          </a:xfrm>
+          <a:prstGeom prst="rect">
+            <a:avLst/>
+          </a:prstGeom>
+          <a:noFill/>
+        </p:spPr>
+        <p:txBody>
+          <a:bodyPr wrap="none" anchor="ctr">
+            <a:spAutoFit/>
+          </a:bodyPr>
+          <a:lstStyle/>
+          <a:p>
+            <a:pPr algn="l"/>
+            <a:r>
+              <a:rPr sz="2100" b="1">
+                <a:solidFill>
+                  <a:srgbClr val="F8FAFC"/>
+                </a:solidFill>
+                <a:latin typeface="Aptos"/>
+              </a:rPr>
+              <a:t>CAUTION</a:t>
+            </a:r>
+          </a:p>
+        </p:txBody>
+      </p:sp>
+      <p:sp>
+        <p:nvSpPr>
+          <p:cNvPr id="18" name="TextBox 17"/>
+          <p:cNvSpPr txBox="1"/>
+          <p:nvPr/>
+        </p:nvSpPr>
+        <p:spPr>
+          <a:xfrm>
+            <a:off x="8366759" y="2587752"/>
+            <a:ext cx="2971800" cy="228600"/>
+          </a:xfrm>
+          <a:prstGeom prst="rect">
+            <a:avLst/>
+          </a:prstGeom>
+          <a:noFill/>
+        </p:spPr>
+        <p:txBody>
+          <a:bodyPr wrap="none" anchor="ctr">
+            <a:spAutoFit/>
+          </a:bodyPr>
+          <a:lstStyle/>
+          <a:p>
+            <a:pPr algn="l"/>
+            <a:r>
+              <a:rPr sz="800" b="1">
+                <a:solidFill>
+                  <a:srgbClr val="A0AEC0"/>
+                </a:solidFill>
+                <a:latin typeface="Aptos"/>
+              </a:rPr>
+              <a:t>DO NOT INFER CAUSATION</a:t>
+            </a:r>
+          </a:p>
+        </p:txBody>
+      </p:sp>
+      <p:sp>
+        <p:nvSpPr>
+          <p:cNvPr id="19" name="Rectangle 18"/>
+          <p:cNvSpPr/>
+          <p:nvPr/>
+        </p:nvSpPr>
+        <p:spPr>
+          <a:xfrm>
+            <a:off x="8183879" y="1874519"/>
+            <a:ext cx="50292" cy="1828800"/>
+          </a:xfrm>
+          <a:prstGeom prst="rect">
+            <a:avLst/>
+          </a:prstGeom>
+          <a:solidFill>
+            <a:srgbClr val="F5AA37"/>
+          </a:solidFill>
+          <a:ln>
+            <a:noFill/>
+          </a:ln>
+        </p:spPr>
+        <p:style>
+          <a:lnRef idx="1">
+            <a:schemeClr val="accent1"/>
+          </a:lnRef>
+          <a:fillRef idx="3">
+            <a:schemeClr val="accent1"/>
+          </a:fillRef>
+          <a:effectRef idx="2">
+            <a:schemeClr val="accent1"/>
+          </a:effectRef>
+          <a:fontRef idx="minor">
+            <a:schemeClr val="lt1"/>
+          </a:fontRef>
+        </p:style>
+        <p:txBody>
+          <a:bodyPr rtlCol="0" anchor="ctr"/>
+          <a:lstStyle/>
+          <a:p>
+            <a:pPr algn="ctr"/>
+          </a:p>
+        </p:txBody>
+      </p:sp>
+      <p:sp>
+        <p:nvSpPr>
+          <p:cNvPr id="20" name="TextBox 19"/>
+          <p:cNvSpPr txBox="1"/>
+          <p:nvPr/>
+        </p:nvSpPr>
+        <p:spPr>
+          <a:xfrm>
+            <a:off x="731520" y="4315968"/>
+            <a:ext cx="1828800" cy="274320"/>
+          </a:xfrm>
+          <a:prstGeom prst="rect">
+            <a:avLst/>
+          </a:prstGeom>
+          <a:noFill/>
+        </p:spPr>
+        <p:txBody>
+          <a:bodyPr wrap="none" anchor="ctr">
+            <a:spAutoFit/>
+          </a:bodyPr>
+          <a:lstStyle/>
+          <a:p>
+            <a:pPr algn="l"/>
+            <a:r>
+              <a:rPr sz="1000" b="1">
+                <a:solidFill>
+                  <a:srgbClr val="26BED2"/>
+                </a:solidFill>
+                <a:latin typeface="Aptos"/>
+              </a:rPr>
+              <a:t>Business implications</a:t>
+            </a:r>
+          </a:p>
+        </p:txBody>
+      </p:sp>
+      <p:sp>
+        <p:nvSpPr>
+          <p:cNvPr id="21" name="TextBox 20"/>
+          <p:cNvSpPr txBox="1"/>
+          <p:nvPr/>
+        </p:nvSpPr>
+        <p:spPr>
+          <a:xfrm>
+            <a:off x="731520" y="4709160"/>
+            <a:ext cx="182880" cy="274320"/>
+          </a:xfrm>
+          <a:prstGeom prst="rect">
+            <a:avLst/>
+          </a:prstGeom>
+          <a:noFill/>
+        </p:spPr>
+        <p:txBody>
+          <a:bodyPr wrap="none" anchor="ctr">
+            <a:spAutoFit/>
+          </a:bodyPr>
+          <a:lstStyle/>
+          <a:p>
+            <a:pPr algn="l"/>
+            <a:r>
+              <a:rPr sz="1400" b="1">
+                <a:solidFill>
+                  <a:srgbClr val="26BED2"/>
+                </a:solidFill>
+                <a:latin typeface="Aptos"/>
+              </a:rPr>
+              <a:t>•</a:t>
+            </a:r>
+          </a:p>
+        </p:txBody>
+      </p:sp>
+      <p:sp>
+        <p:nvSpPr>
+          <p:cNvPr id="22" name="TextBox 21"/>
+          <p:cNvSpPr txBox="1"/>
+          <p:nvPr/>
+        </p:nvSpPr>
+        <p:spPr>
+          <a:xfrm>
+            <a:off x="987552" y="4709160"/>
+            <a:ext cx="10076688" cy="502920"/>
+          </a:xfrm>
+          <a:prstGeom prst="rect">
+            <a:avLst/>
+          </a:prstGeom>
+          <a:noFill/>
+        </p:spPr>
+        <p:txBody>
+          <a:bodyPr wrap="none" anchor="ctr">
+            <a:spAutoFit/>
+          </a:bodyPr>
+          <a:lstStyle/>
+          <a:p>
+            <a:pPr algn="l"/>
+            <a:r>
+              <a:rPr sz="1400" b="0">
+                <a:solidFill>
+                  <a:srgbClr val="F8FAFC"/>
+                </a:solidFill>
+                <a:latin typeface="Aptos"/>
+              </a:rPr>
+              <a:t>Continue using category and product performance to prioritize commercial attention.</a:t>
+            </a:r>
+          </a:p>
+        </p:txBody>
+      </p:sp>
+      <p:sp>
+        <p:nvSpPr>
+          <p:cNvPr id="23" name="TextBox 22"/>
+          <p:cNvSpPr txBox="1"/>
+          <p:nvPr/>
+        </p:nvSpPr>
+        <p:spPr>
+          <a:xfrm>
+            <a:off x="731520" y="5230368"/>
+            <a:ext cx="182880" cy="274320"/>
+          </a:xfrm>
+          <a:prstGeom prst="rect">
+            <a:avLst/>
+          </a:prstGeom>
+          <a:noFill/>
+        </p:spPr>
+        <p:txBody>
+          <a:bodyPr wrap="none" anchor="ctr">
+            <a:spAutoFit/>
+          </a:bodyPr>
+          <a:lstStyle/>
+          <a:p>
+            <a:pPr algn="l"/>
+            <a:r>
+              <a:rPr sz="1400" b="1">
+                <a:solidFill>
+                  <a:srgbClr val="26BED2"/>
+                </a:solidFill>
+                <a:latin typeface="Aptos"/>
+              </a:rPr>
+              <a:t>•</a:t>
+            </a:r>
+          </a:p>
+        </p:txBody>
+      </p:sp>
+      <p:sp>
+        <p:nvSpPr>
+          <p:cNvPr id="24" name="TextBox 23"/>
+          <p:cNvSpPr txBox="1"/>
+          <p:nvPr/>
+        </p:nvSpPr>
+        <p:spPr>
+          <a:xfrm>
+            <a:off x="987552" y="5230368"/>
+            <a:ext cx="10076688" cy="502920"/>
+          </a:xfrm>
+          <a:prstGeom prst="rect">
+            <a:avLst/>
+          </a:prstGeom>
+          <a:noFill/>
+        </p:spPr>
+        <p:txBody>
+          <a:bodyPr wrap="none" anchor="ctr">
+            <a:spAutoFit/>
+          </a:bodyPr>
+          <a:lstStyle/>
+          <a:p>
+            <a:pPr algn="l"/>
+            <a:r>
+              <a:rPr sz="1400" b="0">
+                <a:solidFill>
+                  <a:srgbClr val="F8FAFC"/>
+                </a:solidFill>
+                <a:latin typeface="Aptos"/>
+              </a:rPr>
+              <a:t>Use dashboard filters to investigate city, category, product and customer segments.</a:t>
+            </a:r>
+          </a:p>
+        </p:txBody>
+      </p:sp>
+      <p:sp>
+        <p:nvSpPr>
+          <p:cNvPr id="25" name="TextBox 24"/>
+          <p:cNvSpPr txBox="1"/>
+          <p:nvPr/>
+        </p:nvSpPr>
+        <p:spPr>
+          <a:xfrm>
+            <a:off x="731520" y="5751576"/>
+            <a:ext cx="182880" cy="274320"/>
+          </a:xfrm>
+          <a:prstGeom prst="rect">
+            <a:avLst/>
+          </a:prstGeom>
+          <a:noFill/>
+        </p:spPr>
+        <p:txBody>
+          <a:bodyPr wrap="none" anchor="ctr">
+            <a:spAutoFit/>
+          </a:bodyPr>
+          <a:lstStyle/>
+          <a:p>
+            <a:pPr algn="l"/>
+            <a:r>
+              <a:rPr sz="1400" b="1">
+                <a:solidFill>
+                  <a:srgbClr val="26BED2"/>
+                </a:solidFill>
+                <a:latin typeface="Aptos"/>
+              </a:rPr>
+              <a:t>•</a:t>
+            </a:r>
+          </a:p>
+        </p:txBody>
+      </p:sp>
+      <p:sp>
+        <p:nvSpPr>
+          <p:cNvPr id="26" name="TextBox 25"/>
+          <p:cNvSpPr txBox="1"/>
+          <p:nvPr/>
+        </p:nvSpPr>
+        <p:spPr>
+          <a:xfrm>
+            <a:off x="987552" y="5751576"/>
+            <a:ext cx="10076688" cy="502920"/>
+          </a:xfrm>
+          <a:prstGeom prst="rect">
+            <a:avLst/>
+          </a:prstGeom>
+          <a:noFill/>
+        </p:spPr>
+        <p:txBody>
+          <a:bodyPr wrap="none" anchor="ctr">
+            <a:spAutoFit/>
+          </a:bodyPr>
+          <a:lstStyle/>
+          <a:p>
+            <a:pPr algn="l"/>
+            <a:r>
+              <a:rPr sz="1400" b="0">
+                <a:solidFill>
+                  <a:srgbClr val="F8FAFC"/>
+                </a:solidFill>
+                <a:latin typeface="Aptos"/>
+              </a:rPr>
+              <a:t>Treat gender differences as descriptive evidence rather than a causal explanation.</a:t>
+            </a:r>
+          </a:p>
+        </p:txBody>
+      </p:sp>
+    </p:spTree>
+  </p:cSld>
+  <p:clrMapOvr>
+    <a:masterClrMapping/>
+  </p:clrMapOvr>
+</p:sld>
+</file>
+
+<file path=ppt/slides/slide9.xml><?xml version="1.0" encoding="utf-8"?>
+<p:sld xmlns:a="http://schemas.openxmlformats.org/drawingml/2006/main" xmlns:p="http://schemas.openxmlformats.org/presentationml/2006/main" xmlns:r="http://schemas.openxmlformats.org/officeDocument/2006/relationships">
+  <p:cSld>
+    <p:spTree>
+      <p:nvGrpSpPr>
+        <p:cNvPr id="1" name=""/>
+        <p:cNvGrpSpPr/>
+        <p:nvPr/>
+      </p:nvGrpSpPr>
+      <p:grpSpPr/>
+      <p:sp>
+        <p:nvSpPr>
+          <p:cNvPr id="2" name="Rectangle 1"/>
+          <p:cNvSpPr/>
+          <p:nvPr/>
+        </p:nvSpPr>
+        <p:spPr>
+          <a:xfrm>
+            <a:off x="0" y="0"/>
+            <a:ext cx="12191695" cy="6858000"/>
+          </a:xfrm>
+          <a:prstGeom prst="rect">
+            <a:avLst/>
+          </a:prstGeom>
+          <a:solidFill>
+            <a:srgbClr val="0C1426"/>
+          </a:solidFill>
+          <a:ln>
+            <a:noFill/>
+          </a:ln>
+        </p:spPr>
+        <p:style>
+          <a:lnRef idx="1">
+            <a:schemeClr val="accent1"/>
+          </a:lnRef>
+          <a:fillRef idx="3">
+            <a:schemeClr val="accent1"/>
+          </a:fillRef>
+          <a:effectRef idx="2">
+            <a:schemeClr val="accent1"/>
+          </a:effectRef>
+          <a:fontRef idx="minor">
+            <a:schemeClr val="lt1"/>
+          </a:fontRef>
+        </p:style>
+        <p:txBody>
+          <a:bodyPr rtlCol="0" anchor="ctr"/>
+          <a:lstStyle/>
+          <a:p>
+            <a:pPr algn="ctr"/>
+          </a:p>
+        </p:txBody>
+      </p:sp>
+      <p:sp>
+        <p:nvSpPr>
+          <p:cNvPr id="3" name="TextBox 2"/>
+          <p:cNvSpPr txBox="1"/>
+          <p:nvPr/>
+        </p:nvSpPr>
+        <p:spPr>
+          <a:xfrm>
+            <a:off x="594360" y="320040"/>
+            <a:ext cx="5486400" cy="274320"/>
+          </a:xfrm>
+          <a:prstGeom prst="rect">
+            <a:avLst/>
+          </a:prstGeom>
+          <a:noFill/>
+        </p:spPr>
+        <p:txBody>
+          <a:bodyPr wrap="none" anchor="ctr">
+            <a:spAutoFit/>
+          </a:bodyPr>
+          <a:lstStyle/>
+          <a:p>
+            <a:pPr algn="l"/>
+            <a:r>
+              <a:rPr sz="1000" b="1">
+                <a:solidFill>
+                  <a:srgbClr val="26BED2"/>
+                </a:solidFill>
+                <a:latin typeface="Aptos"/>
+              </a:rPr>
+              <a:t>LIMITATIONS &amp; NEXT STEPS</a:t>
+            </a:r>
+          </a:p>
+        </p:txBody>
+      </p:sp>
+      <p:sp>
+        <p:nvSpPr>
+          <p:cNvPr id="4" name="TextBox 3"/>
+          <p:cNvSpPr txBox="1"/>
+          <p:nvPr/>
+        </p:nvSpPr>
+        <p:spPr>
+          <a:xfrm>
+            <a:off x="594360" y="658368"/>
+            <a:ext cx="10881360" cy="594360"/>
+          </a:xfrm>
+          <a:prstGeom prst="rect">
+            <a:avLst/>
+          </a:prstGeom>
+          <a:noFill/>
+        </p:spPr>
+        <p:txBody>
+          <a:bodyPr wrap="none" anchor="ctr">
+            <a:spAutoFit/>
+          </a:bodyPr>
+          <a:lstStyle/>
+          <a:p>
+            <a:pPr algn="l"/>
+            <a:r>
+              <a:rPr sz="2800" b="1">
+                <a:solidFill>
+                  <a:srgbClr val="F8FAFC"/>
+                </a:solidFill>
+                <a:latin typeface="Aptos"/>
+              </a:rPr>
+              <a:t>Responsible interpretation</a:t>
+            </a:r>
+          </a:p>
+        </p:txBody>
+      </p:sp>
+      <p:sp>
+        <p:nvSpPr>
+          <p:cNvPr id="5" name="TextBox 4"/>
+          <p:cNvSpPr txBox="1"/>
+          <p:nvPr/>
+        </p:nvSpPr>
+        <p:spPr>
+          <a:xfrm>
+            <a:off x="612648" y="1280160"/>
+            <a:ext cx="10698480" cy="365760"/>
+          </a:xfrm>
+          <a:prstGeom prst="rect">
+            <a:avLst/>
+          </a:prstGeom>
+          <a:noFill/>
+        </p:spPr>
+        <p:txBody>
+          <a:bodyPr wrap="none" anchor="ctr">
+            <a:spAutoFit/>
+          </a:bodyPr>
+          <a:lstStyle/>
+          <a:p>
+            <a:pPr algn="l"/>
+            <a:r>
+              <a:rPr sz="1100" b="0">
+                <a:solidFill>
+                  <a:srgbClr val="A0AEC0"/>
+                </a:solidFill>
+                <a:latin typeface="Aptos"/>
+              </a:rPr>
+              <a:t>Statistical validation adds rigor when the scope of the evidence is kept clear.</a:t>
+            </a:r>
+          </a:p>
+        </p:txBody>
+      </p:sp>
+      <p:sp>
+        <p:nvSpPr>
+          <p:cNvPr id="6" name="TextBox 5"/>
+          <p:cNvSpPr txBox="1"/>
+          <p:nvPr/>
+        </p:nvSpPr>
+        <p:spPr>
+          <a:xfrm>
+            <a:off x="594360" y="6473952"/>
+            <a:ext cx="5029200" cy="182880"/>
+          </a:xfrm>
+          <a:prstGeom prst="rect">
+            <a:avLst/>
+          </a:prstGeom>
+          <a:noFill/>
+        </p:spPr>
+        <p:txBody>
+          <a:bodyPr wrap="none" anchor="ctr">
+            <a:spAutoFit/>
+          </a:bodyPr>
+          <a:lstStyle/>
+          <a:p>
+            <a:pPr algn="l"/>
+            <a:r>
+              <a:rPr sz="800" b="1">
+                <a:solidFill>
+                  <a:srgbClr val="A0AEC0"/>
+                </a:solidFill>
+                <a:latin typeface="Aptos"/>
+              </a:rPr>
+              <a:t>APEXPLANET • DATA ANALYTICS INTERNSHIP</a:t>
+            </a:r>
+          </a:p>
+        </p:txBody>
+      </p:sp>
+      <p:sp>
+        <p:nvSpPr>
+          <p:cNvPr id="7" name="TextBox 6"/>
+          <p:cNvSpPr txBox="1"/>
+          <p:nvPr/>
+        </p:nvSpPr>
+        <p:spPr>
+          <a:xfrm>
+            <a:off x="11018520" y="6446520"/>
+            <a:ext cx="548640" cy="228600"/>
+          </a:xfrm>
+          <a:prstGeom prst="rect">
+            <a:avLst/>
+          </a:prstGeom>
+          <a:noFill/>
+        </p:spPr>
+        <p:txBody>
+          <a:bodyPr wrap="none" anchor="ctr">
+            <a:spAutoFit/>
+          </a:bodyPr>
+          <a:lstStyle/>
+          <a:p>
+            <a:pPr algn="r"/>
+            <a:r>
+              <a:rPr sz="900" b="1">
+                <a:solidFill>
+                  <a:srgbClr val="A0AEC0"/>
+                </a:solidFill>
+                <a:latin typeface="Aptos"/>
+              </a:rPr>
+              <a:t>09</a:t>
+            </a:r>
+          </a:p>
+        </p:txBody>
+      </p:sp>
+      <p:sp>
+        <p:nvSpPr>
+          <p:cNvPr id="8" name="Rounded Rectangle 7"/>
+          <p:cNvSpPr/>
+          <p:nvPr/>
+        </p:nvSpPr>
+        <p:spPr>
+          <a:xfrm>
+            <a:off x="685800" y="1828800"/>
+            <a:ext cx="5303520" cy="3977639"/>
+          </a:xfrm>
+          <a:prstGeom prst="roundRect">
+            <a:avLst/>
+          </a:prstGeom>
+          <a:solidFill>
+            <a:srgbClr val="18233A"/>
+          </a:solidFill>
+          <a:ln>
+            <a:solidFill>
+              <a:srgbClr val="374660"/>
+            </a:solidFill>
+          </a:ln>
+        </p:spPr>
+        <p:style>
+          <a:lnRef idx="1">
+            <a:schemeClr val="accent1"/>
+          </a:lnRef>
+          <a:fillRef idx="3">
+            <a:schemeClr val="accent1"/>
+          </a:fillRef>
+          <a:effectRef idx="2">
+            <a:schemeClr val="accent1"/>
+          </a:effectRef>
+          <a:fontRef idx="minor">
+            <a:schemeClr val="lt1"/>
+          </a:fontRef>
+        </p:style>
+        <p:txBody>
+          <a:bodyPr rtlCol="0" anchor="ctr"/>
+          <a:lstStyle/>
+          <a:p>
+            <a:pPr algn="ctr"/>
+          </a:p>
+        </p:txBody>
+      </p:sp>
+      <p:sp>
+        <p:nvSpPr>
+          <p:cNvPr id="9" name="Rounded Rectangle 8"/>
+          <p:cNvSpPr/>
+          <p:nvPr/>
+        </p:nvSpPr>
+        <p:spPr>
+          <a:xfrm>
+            <a:off x="6217920" y="1828800"/>
+            <a:ext cx="5303520" cy="3977639"/>
+          </a:xfrm>
+          <a:prstGeom prst="roundRect">
+            <a:avLst/>
+          </a:prstGeom>
+          <a:solidFill>
+            <a:srgbClr val="18233A"/>
+          </a:solidFill>
+          <a:ln>
+            <a:solidFill>
+              <a:srgbClr val="374660"/>
+            </a:solidFill>
+          </a:ln>
+        </p:spPr>
+        <p:style>
+          <a:lnRef idx="1">
+            <a:schemeClr val="accent1"/>
+          </a:lnRef>
+          <a:fillRef idx="3">
+            <a:schemeClr val="accent1"/>
+          </a:fillRef>
+          <a:effectRef idx="2">
+            <a:schemeClr val="accent1"/>
+          </a:effectRef>
+          <a:fontRef idx="minor">
+            <a:schemeClr val="lt1"/>
+          </a:fontRef>
+        </p:style>
+        <p:txBody>
+          <a:bodyPr rtlCol="0" anchor="ctr"/>
+          <a:lstStyle/>
+          <a:p>
+            <a:pPr algn="ctr"/>
+          </a:p>
+        </p:txBody>
+      </p:sp>
+      <p:sp>
+        <p:nvSpPr>
+          <p:cNvPr id="10" name="TextBox 9"/>
+          <p:cNvSpPr txBox="1"/>
+          <p:nvPr/>
+        </p:nvSpPr>
+        <p:spPr>
+          <a:xfrm>
+            <a:off x="960120" y="2103120"/>
+            <a:ext cx="1828800" cy="274320"/>
+          </a:xfrm>
+          <a:prstGeom prst="rect">
+            <a:avLst/>
+          </a:prstGeom>
+          <a:noFill/>
+        </p:spPr>
+        <p:txBody>
+          <a:bodyPr wrap="none" anchor="ctr">
+            <a:spAutoFit/>
+          </a:bodyPr>
+          <a:lstStyle/>
+          <a:p>
+            <a:pPr algn="l"/>
+            <a:r>
+              <a:rPr sz="1200" b="1">
+                <a:solidFill>
+                  <a:srgbClr val="26BED2"/>
+                </a:solidFill>
+                <a:latin typeface="Aptos"/>
+              </a:rPr>
+              <a:t>LIMITATIONS</a:t>
+            </a:r>
+          </a:p>
+        </p:txBody>
+      </p:sp>
+      <p:sp>
+        <p:nvSpPr>
+          <p:cNvPr id="11" name="TextBox 10"/>
+          <p:cNvSpPr txBox="1"/>
+          <p:nvPr/>
+        </p:nvSpPr>
+        <p:spPr>
+          <a:xfrm>
+            <a:off x="960120" y="2651760"/>
+            <a:ext cx="182880" cy="274320"/>
+          </a:xfrm>
+          <a:prstGeom prst="rect">
+            <a:avLst/>
+          </a:prstGeom>
+          <a:noFill/>
+        </p:spPr>
+        <p:txBody>
+          <a:bodyPr wrap="none" anchor="ctr">
+            <a:spAutoFit/>
+          </a:bodyPr>
+          <a:lstStyle/>
+          <a:p>
+            <a:pPr algn="l"/>
+            <a:r>
+              <a:rPr sz="1400" b="1">
+                <a:solidFill>
+                  <a:srgbClr val="26BED2"/>
+                </a:solidFill>
+                <a:latin typeface="Aptos"/>
+              </a:rPr>
+              <a:t>•</a:t>
+            </a:r>
+          </a:p>
+        </p:txBody>
+      </p:sp>
+      <p:sp>
+        <p:nvSpPr>
+          <p:cNvPr id="12" name="TextBox 11"/>
+          <p:cNvSpPr txBox="1"/>
+          <p:nvPr/>
+        </p:nvSpPr>
+        <p:spPr>
+          <a:xfrm>
+            <a:off x="1216152" y="2651760"/>
+            <a:ext cx="4224528" cy="502920"/>
+          </a:xfrm>
+          <a:prstGeom prst="rect">
+            <a:avLst/>
+          </a:prstGeom>
+          <a:noFill/>
+        </p:spPr>
+        <p:txBody>
+          <a:bodyPr wrap="none" anchor="ctr">
+            <a:spAutoFit/>
+          </a:bodyPr>
+          <a:lstStyle/>
+          <a:p>
+            <a:pPr algn="l"/>
+            <a:r>
+              <a:rPr sz="1400" b="0">
+                <a:solidFill>
+                  <a:srgbClr val="F8FAFC"/>
+                </a:solidFill>
+                <a:latin typeface="Aptos"/>
+              </a:rPr>
+              <a:t>Transaction-level analysis does not explain every driver of sales.</a:t>
+            </a:r>
+          </a:p>
+        </p:txBody>
+      </p:sp>
+      <p:sp>
+        <p:nvSpPr>
+          <p:cNvPr id="13" name="TextBox 12"/>
+          <p:cNvSpPr txBox="1"/>
+          <p:nvPr/>
+        </p:nvSpPr>
+        <p:spPr>
+          <a:xfrm>
+            <a:off x="960120" y="3383280"/>
+            <a:ext cx="182880" cy="274320"/>
+          </a:xfrm>
+          <a:prstGeom prst="rect">
+            <a:avLst/>
+          </a:prstGeom>
+          <a:noFill/>
+        </p:spPr>
+        <p:txBody>
+          <a:bodyPr wrap="none" anchor="ctr">
+            <a:spAutoFit/>
+          </a:bodyPr>
+          <a:lstStyle/>
+          <a:p>
+            <a:pPr algn="l"/>
+            <a:r>
+              <a:rPr sz="1400" b="1">
+                <a:solidFill>
+                  <a:srgbClr val="26BED2"/>
+                </a:solidFill>
+                <a:latin typeface="Aptos"/>
+              </a:rPr>
+              <a:t>•</a:t>
+            </a:r>
+          </a:p>
+        </p:txBody>
+      </p:sp>
+      <p:sp>
+        <p:nvSpPr>
+          <p:cNvPr id="14" name="TextBox 13"/>
+          <p:cNvSpPr txBox="1"/>
+          <p:nvPr/>
+        </p:nvSpPr>
+        <p:spPr>
+          <a:xfrm>
+            <a:off x="1216152" y="3383280"/>
+            <a:ext cx="4224528" cy="502920"/>
+          </a:xfrm>
+          <a:prstGeom prst="rect">
+            <a:avLst/>
+          </a:prstGeom>
+          <a:noFill/>
+        </p:spPr>
+        <p:txBody>
+          <a:bodyPr wrap="none" anchor="ctr">
+            <a:spAutoFit/>
+          </a:bodyPr>
+          <a:lstStyle/>
+          <a:p>
+            <a:pPr algn="l"/>
+            <a:r>
+              <a:rPr sz="1400" b="0">
+                <a:solidFill>
+                  <a:srgbClr val="F8FAFC"/>
+                </a:solidFill>
+                <a:latin typeface="Aptos"/>
+              </a:rPr>
+              <a:t>Gender is one segmentation variable among many.</a:t>
+            </a:r>
+          </a:p>
+        </p:txBody>
+      </p:sp>
+      <p:sp>
+        <p:nvSpPr>
+          <p:cNvPr id="15" name="TextBox 14"/>
+          <p:cNvSpPr txBox="1"/>
+          <p:nvPr/>
+        </p:nvSpPr>
+        <p:spPr>
+          <a:xfrm>
+            <a:off x="960120" y="4114800"/>
+            <a:ext cx="182880" cy="274320"/>
+          </a:xfrm>
+          <a:prstGeom prst="rect">
+            <a:avLst/>
+          </a:prstGeom>
+          <a:noFill/>
+        </p:spPr>
+        <p:txBody>
+          <a:bodyPr wrap="none" anchor="ctr">
+            <a:spAutoFit/>
+          </a:bodyPr>
+          <a:lstStyle/>
+          <a:p>
+            <a:pPr algn="l"/>
+            <a:r>
+              <a:rPr sz="1400" b="1">
+                <a:solidFill>
+                  <a:srgbClr val="26BED2"/>
+                </a:solidFill>
+                <a:latin typeface="Aptos"/>
+              </a:rPr>
+              <a:t>•</a:t>
+            </a:r>
+          </a:p>
+        </p:txBody>
+      </p:sp>
+      <p:sp>
+        <p:nvSpPr>
+          <p:cNvPr id="16" name="TextBox 15"/>
+          <p:cNvSpPr txBox="1"/>
+          <p:nvPr/>
+        </p:nvSpPr>
+        <p:spPr>
+          <a:xfrm>
+            <a:off x="1216152" y="4114800"/>
+            <a:ext cx="4224528" cy="502920"/>
+          </a:xfrm>
+          <a:prstGeom prst="rect">
+            <a:avLst/>
+          </a:prstGeom>
+          <a:noFill/>
+        </p:spPr>
+        <p:txBody>
+          <a:bodyPr wrap="none" anchor="ctr">
+            <a:spAutoFit/>
+          </a:bodyPr>
+          <a:lstStyle/>
+          <a:p>
+            <a:pPr algn="l"/>
+            <a:r>
+              <a:rPr sz="1400" b="0">
+                <a:solidFill>
+                  <a:srgbClr val="F8FAFC"/>
+                </a:solidFill>
+                <a:latin typeface="Aptos"/>
+              </a:rPr>
+              <a:t>A statistical difference would not by itself establish causation.</a:t>
+            </a:r>
+          </a:p>
+        </p:txBody>
+      </p:sp>
+      <p:sp>
+        <p:nvSpPr>
+          <p:cNvPr id="17" name="TextBox 16"/>
+          <p:cNvSpPr txBox="1"/>
+          <p:nvPr/>
+        </p:nvSpPr>
+        <p:spPr>
+          <a:xfrm>
+            <a:off x="6492240" y="2103120"/>
+            <a:ext cx="3291840" cy="274320"/>
+          </a:xfrm>
+          <a:prstGeom prst="rect">
+            <a:avLst/>
+          </a:prstGeom>
+          <a:noFill/>
+        </p:spPr>
+        <p:txBody>
+          <a:bodyPr wrap="none" anchor="ctr">
+            <a:spAutoFit/>
+          </a:bodyPr>
+          <a:lstStyle/>
+          <a:p>
+            <a:pPr algn="l"/>
+            <a:r>
+              <a:rPr sz="1200" b="1">
+                <a:solidFill>
+                  <a:srgbClr val="28BE87"/>
+                </a:solidFill>
+                <a:latin typeface="Aptos"/>
+              </a:rPr>
+              <a:t>NEXT ANALYTICAL DIRECTIONS</a:t>
+            </a:r>
+          </a:p>
+        </p:txBody>
+      </p:sp>
+      <p:sp>
+        <p:nvSpPr>
+          <p:cNvPr id="18" name="TextBox 17"/>
+          <p:cNvSpPr txBox="1"/>
+          <p:nvPr/>
+        </p:nvSpPr>
+        <p:spPr>
+          <a:xfrm>
+            <a:off x="6492240" y="2651760"/>
+            <a:ext cx="182880" cy="274320"/>
+          </a:xfrm>
+          <a:prstGeom prst="rect">
+            <a:avLst/>
+          </a:prstGeom>
+          <a:noFill/>
+        </p:spPr>
+        <p:txBody>
+          <a:bodyPr wrap="none" anchor="ctr">
+            <a:spAutoFit/>
+          </a:bodyPr>
+          <a:lstStyle/>
+          <a:p>
+            <a:pPr algn="l"/>
+            <a:r>
+              <a:rPr sz="1400" b="1">
+                <a:solidFill>
+                  <a:srgbClr val="28BE87"/>
+                </a:solidFill>
+                <a:latin typeface="Aptos"/>
+              </a:rPr>
+              <a:t>•</a:t>
+            </a:r>
+          </a:p>
+        </p:txBody>
+      </p:sp>
+      <p:sp>
+        <p:nvSpPr>
+          <p:cNvPr id="19" name="TextBox 18"/>
+          <p:cNvSpPr txBox="1"/>
+          <p:nvPr/>
+        </p:nvSpPr>
+        <p:spPr>
+          <a:xfrm>
+            <a:off x="6748272" y="2651760"/>
+            <a:ext cx="4224528" cy="502920"/>
+          </a:xfrm>
+          <a:prstGeom prst="rect">
+            <a:avLst/>
+          </a:prstGeom>
+          <a:noFill/>
+        </p:spPr>
+        <p:txBody>
+          <a:bodyPr wrap="none" anchor="ctr">
+            <a:spAutoFit/>
+          </a:bodyPr>
+          <a:lstStyle/>
+          <a:p>
+            <a:pPr algn="l"/>
+            <a:r>
+              <a:rPr sz="1400" b="0">
+                <a:solidFill>
+                  <a:srgbClr val="F8FAFC"/>
+                </a:solidFill>
+                <a:latin typeface="Aptos"/>
+              </a:rPr>
+              <a:t>Segment performance by category, product, city and age group.</a:t>
+            </a:r>
+          </a:p>
+        </p:txBody>
+      </p:sp>
+      <p:sp>
+        <p:nvSpPr>
+          <p:cNvPr id="20" name="TextBox 19"/>
+          <p:cNvSpPr txBox="1"/>
+          <p:nvPr/>
+        </p:nvSpPr>
+        <p:spPr>
+          <a:xfrm>
+            <a:off x="6492240" y="3383280"/>
+            <a:ext cx="182880" cy="274320"/>
+          </a:xfrm>
+          <a:prstGeom prst="rect">
+            <a:avLst/>
+          </a:prstGeom>
+          <a:noFill/>
+        </p:spPr>
+        <p:txBody>
+          <a:bodyPr wrap="none" anchor="ctr">
+            <a:spAutoFit/>
+          </a:bodyPr>
+          <a:lstStyle/>
+          <a:p>
+            <a:pPr algn="l"/>
+            <a:r>
+              <a:rPr sz="1400" b="1">
+                <a:solidFill>
+                  <a:srgbClr val="28BE87"/>
+                </a:solidFill>
+                <a:latin typeface="Aptos"/>
+              </a:rPr>
+              <a:t>•</a:t>
+            </a:r>
+          </a:p>
+        </p:txBody>
+      </p:sp>
+      <p:sp>
+        <p:nvSpPr>
+          <p:cNvPr id="21" name="TextBox 20"/>
+          <p:cNvSpPr txBox="1"/>
+          <p:nvPr/>
+        </p:nvSpPr>
+        <p:spPr>
+          <a:xfrm>
+            <a:off x="6748272" y="3383280"/>
+            <a:ext cx="4224528" cy="502920"/>
+          </a:xfrm>
+          <a:prstGeom prst="rect">
+            <a:avLst/>
+          </a:prstGeom>
+          <a:noFill/>
+        </p:spPr>
+        <p:txBody>
+          <a:bodyPr wrap="none" anchor="ctr">
+            <a:spAutoFit/>
+          </a:bodyPr>
+          <a:lstStyle/>
+          <a:p>
+            <a:pPr algn="l"/>
+            <a:r>
+              <a:rPr sz="1400" b="0">
+                <a:solidFill>
+                  <a:srgbClr val="F8FAFC"/>
+                </a:solidFill>
+                <a:latin typeface="Aptos"/>
+              </a:rPr>
               <a:t>Monitor monthly sales movement and city-level concentration.</a:t>
             </a:r>
           </a:p>
-          <a:p>
-            <a:pPr>
-              <a:spcAft>
-                <a:spcPts val="1200"/>
-              </a:spcAft>
-              <a:defRPr sz="1800"/>
-            </a:pPr>
-            <a:r>
-              <a:t>Use dashboard filters to move from portfolio-level KPIs to product-level detail.</a:t>
-            </a:r>
-          </a:p>
-          <a:p>
-            <a:pPr>
-              <a:spcAft>
-                <a:spcPts val="1200"/>
-              </a:spcAft>
-              <a:defRPr sz="1800"/>
-            </a:pPr>
-            <a:r>
-              <a:t>Treat gender differences as descriptive evidence; do not infer causation from this dataset alone.</a:t>
-            </a:r>
-          </a:p>
-          <a:p>
-            <a:pPr>
-              <a:spcAft>
-                <a:spcPts val="1200"/>
-              </a:spcAft>
-              <a:defRPr sz="1800"/>
-            </a:pPr>
-            <a:r>
-              <a:t>Keep data-quality flags visible so stakeholders understand how missing and repeated IDs were handled.</a:t>
+        </p:txBody>
+      </p:sp>
+      <p:sp>
+        <p:nvSpPr>
+          <p:cNvPr id="22" name="TextBox 21"/>
+          <p:cNvSpPr txBox="1"/>
+          <p:nvPr/>
+        </p:nvSpPr>
+        <p:spPr>
+          <a:xfrm>
+            <a:off x="6492240" y="4114800"/>
+            <a:ext cx="182880" cy="274320"/>
+          </a:xfrm>
+          <a:prstGeom prst="rect">
+            <a:avLst/>
+          </a:prstGeom>
+          <a:noFill/>
+        </p:spPr>
+        <p:txBody>
+          <a:bodyPr wrap="none" anchor="ctr">
+            <a:spAutoFit/>
+          </a:bodyPr>
+          <a:lstStyle/>
+          <a:p>
+            <a:pPr algn="l"/>
+            <a:r>
+              <a:rPr sz="1400" b="1">
+                <a:solidFill>
+                  <a:srgbClr val="28BE87"/>
+                </a:solidFill>
+                <a:latin typeface="Aptos"/>
+              </a:rPr>
+              <a:t>•</a:t>
+            </a:r>
+          </a:p>
+        </p:txBody>
+      </p:sp>
+      <p:sp>
+        <p:nvSpPr>
+          <p:cNvPr id="23" name="TextBox 22"/>
+          <p:cNvSpPr txBox="1"/>
+          <p:nvPr/>
+        </p:nvSpPr>
+        <p:spPr>
+          <a:xfrm>
+            <a:off x="6748272" y="4114800"/>
+            <a:ext cx="4224528" cy="502920"/>
+          </a:xfrm>
+          <a:prstGeom prst="rect">
+            <a:avLst/>
+          </a:prstGeom>
+          <a:noFill/>
+        </p:spPr>
+        <p:txBody>
+          <a:bodyPr wrap="none" anchor="ctr">
+            <a:spAutoFit/>
+          </a:bodyPr>
+          <a:lstStyle/>
+          <a:p>
+            <a:pPr algn="l"/>
+            <a:r>
+              <a:rPr sz="1400" b="0">
+                <a:solidFill>
+                  <a:srgbClr val="F8FAFC"/>
+                </a:solidFill>
+                <a:latin typeface="Aptos"/>
+              </a:rPr>
+              <a:t>Keep data-quality flags visible for stakeholder transparency.</a:t>
             </a:r>
           </a:p>
         </p:txBody>
